--- a/Week07/Week07_Daily_Journal.pptx
+++ b/Week07/Week07_Daily_Journal.pptx
@@ -1,24 +1,27 @@
 
 <file path=ppt/presentation.xml><?xml version="1.0" encoding="utf-8"?>
-<p:presentation xmlns:a="http://schemas.openxmlformats.org/drawingml/2006/main" xmlns:r="http://schemas.openxmlformats.org/officeDocument/2006/relationships" xmlns:p="http://schemas.openxmlformats.org/presentationml/2006/main" saveSubsetFonts="1" autoCompressPictures="0">
+<p:presentation xmlns:a="http://schemas.openxmlformats.org/drawingml/2006/main" xmlns:r="http://schemas.openxmlformats.org/officeDocument/2006/relationships" xmlns:p="http://schemas.openxmlformats.org/presentationml/2006/main" autoCompressPictures="0">
   <p:sldMasterIdLst>
     <p:sldMasterId id="2147483648" r:id="rId1"/>
   </p:sldMasterIdLst>
+  <p:notesMasterIdLst>
+    <p:notesMasterId r:id="rId4"/>
+  </p:notesMasterIdLst>
   <p:sldIdLst>
-    <p:sldId id="256" r:id="rId7"/>
-    <p:sldId id="257" r:id="rId9"/>
-    <p:sldId id="258" r:id="rId10"/>
-    <p:sldId id="259" r:id="rId11"/>
-    <p:sldId id="260" r:id="rId12"/>
-    <p:sldId id="261" r:id="rId13"/>
-    <p:sldId id="262" r:id="rId14"/>
-    <p:sldId id="263" r:id="rId15"/>
-    <p:sldId id="264" r:id="rId16"/>
-    <p:sldId id="265" r:id="rId17"/>
-    <p:sldId id="266" r:id="rId18"/>
-    <p:sldId id="267" r:id="rId19"/>
+    <p:sldId id="256" r:id="rId3"/>
+    <p:sldId id="257" r:id="rId5"/>
+    <p:sldId id="258" r:id="rId6"/>
+    <p:sldId id="259" r:id="rId7"/>
+    <p:sldId id="260" r:id="rId8"/>
+    <p:sldId id="261" r:id="rId9"/>
+    <p:sldId id="262" r:id="rId10"/>
+    <p:sldId id="263" r:id="rId11"/>
+    <p:sldId id="264" r:id="rId12"/>
+    <p:sldId id="265" r:id="rId13"/>
+    <p:sldId id="266" r:id="rId14"/>
+    <p:sldId id="267" r:id="rId15"/>
   </p:sldIdLst>
-  <p:sldSz cx="12191695" cy="6858000" type="screen4x3"/>
+  <p:sldSz cx="12191365" cy="6858000" type="screen4x3"/>
   <p:notesSz cx="6858000" cy="9144000"/>
   <p:defaultTextStyle>
     <a:defPPr>
@@ -115,11 +118,27 @@
       </a:defRPr>
     </a:lvl9pPr>
   </p:defaultTextStyle>
+  <p:extLst>
+    <p:ext uri="{EFAFB233-063F-42B5-8137-9DF3F51BA10A}">
+      <p15:sldGuideLst xmlns:p15="http://schemas.microsoft.com/office/powerpoint/2012/main">
+        <p15:guide id="1" orient="horz" pos="2160" userDrawn="1">
+          <p15:clr>
+            <a:srgbClr val="A4A3A4"/>
+          </p15:clr>
+        </p15:guide>
+        <p15:guide id="2" pos="2880" userDrawn="1">
+          <p15:clr>
+            <a:srgbClr val="A4A3A4"/>
+          </p15:clr>
+        </p15:guide>
+      </p15:sldGuideLst>
+    </p:ext>
+  </p:extLst>
 </p:presentation>
 </file>
 
 <file path=ppt/notesMasters/notesMaster1.xml><?xml version="1.0" encoding="utf-8"?>
-<p:notesMaster xmlns:a="http://schemas.openxmlformats.org/drawingml/2006/main" xmlns:p="http://schemas.openxmlformats.org/presentationml/2006/main" xmlns:r="http://schemas.openxmlformats.org/officeDocument/2006/relationships">
+<p:notesMaster xmlns:a="http://schemas.openxmlformats.org/drawingml/2006/main" xmlns:r="http://schemas.openxmlformats.org/officeDocument/2006/relationships" xmlns:p="http://schemas.openxmlformats.org/presentationml/2006/main">
   <p:cSld>
     <p:bg>
       <p:bgRef idx="1001">
@@ -200,7 +219,6 @@
           <a:p>
             <a:fld id="{0F89C1C7-3DCD-1040-A9CF-14679D8B5DDD}" type="datetimeFigureOut">
               <a:rPr lang="en-US" smtClean="0"/>
-              <a:t>10/17/16</a:t>
             </a:fld>
             <a:endParaRPr lang="en-US"/>
           </a:p>
@@ -267,6 +285,7 @@
               <a:rPr lang="en-US" smtClean="0"/>
               <a:t>Click to edit Master text styles</a:t>
             </a:r>
+            <a:endParaRPr lang="en-US" smtClean="0"/>
           </a:p>
           <a:p>
             <a:pPr lvl="1"/>
@@ -274,6 +293,7 @@
               <a:rPr lang="en-US" smtClean="0"/>
               <a:t>Second level</a:t>
             </a:r>
+            <a:endParaRPr lang="en-US" smtClean="0"/>
           </a:p>
           <a:p>
             <a:pPr lvl="2"/>
@@ -281,6 +301,7 @@
               <a:rPr lang="en-US" smtClean="0"/>
               <a:t>Third level</a:t>
             </a:r>
+            <a:endParaRPr lang="en-US" smtClean="0"/>
           </a:p>
           <a:p>
             <a:pPr lvl="3"/>
@@ -288,6 +309,7 @@
               <a:rPr lang="en-US" smtClean="0"/>
               <a:t>Fourth level</a:t>
             </a:r>
+            <a:endParaRPr lang="en-US" smtClean="0"/>
           </a:p>
           <a:p>
             <a:pPr lvl="4"/>
@@ -359,18 +381,12 @@
           <a:p>
             <a:fld id="{BB5E49A5-4136-284D-997B-48E1D791AD67}" type="slidenum">
               <a:rPr lang="en-US" smtClean="0"/>
-              <a:t>‹#›</a:t>
             </a:fld>
             <a:endParaRPr lang="en-US"/>
           </a:p>
         </p:txBody>
       </p:sp>
     </p:spTree>
-    <p:extLst>
-      <p:ext uri="{BB962C8B-B14F-4D97-AF65-F5344CB8AC3E}">
-        <p14:creationId xmlns:p14="http://schemas.microsoft.com/office/powerpoint/2010/main" val="2623252185"/>
-      </p:ext>
-    </p:extLst>
   </p:cSld>
   <p:clrMap bg1="lt1" tx1="dk1" bg2="lt2" tx2="dk2" accent1="accent1" accent2="accent2" accent3="accent3" accent4="accent4" accent5="accent5" accent6="accent6" hlink="hlink" folHlink="folHlink"/>
   <p:notesStyle>
@@ -469,7 +485,7 @@
 </file>
 
 <file path=ppt/notesSlides/notesSlide1.xml><?xml version="1.0" encoding="utf-8"?>
-<p:notes xmlns:a="http://schemas.openxmlformats.org/drawingml/2006/main" xmlns:p="http://schemas.openxmlformats.org/presentationml/2006/main" xmlns:r="http://schemas.openxmlformats.org/officeDocument/2006/relationships">
+<p:notes xmlns:a="http://schemas.openxmlformats.org/drawingml/2006/main" xmlns:r="http://schemas.openxmlformats.org/officeDocument/2006/relationships" xmlns:p="http://schemas.openxmlformats.org/presentationml/2006/main">
   <p:cSld>
     <p:spTree>
       <p:nvGrpSpPr>
@@ -504,7 +520,7 @@
             <a:spLocks noGrp="1"/>
           </p:cNvSpPr>
           <p:nvPr>
-            <p:ph type="body" idx="3" sz="quarter"/>
+            <p:ph type="body" sz="quarter" idx="3"/>
           </p:nvPr>
         </p:nvSpPr>
         <p:spPr/>
@@ -525,7 +541,7 @@
             <a:spLocks noGrp="1"/>
           </p:cNvSpPr>
           <p:nvPr>
-            <p:ph type="sldNum" idx="5" sz="quarter"/>
+            <p:ph type="sldNum" sz="quarter" idx="5"/>
           </p:nvPr>
         </p:nvSpPr>
         <p:spPr/>
@@ -539,7 +555,7 @@
 </file>
 
 <file path=ppt/notesSlides/notesSlide10.xml><?xml version="1.0" encoding="utf-8"?>
-<p:notes xmlns:a="http://schemas.openxmlformats.org/drawingml/2006/main" xmlns:p="http://schemas.openxmlformats.org/presentationml/2006/main" xmlns:r="http://schemas.openxmlformats.org/officeDocument/2006/relationships">
+<p:notes xmlns:a="http://schemas.openxmlformats.org/drawingml/2006/main" xmlns:r="http://schemas.openxmlformats.org/officeDocument/2006/relationships" xmlns:p="http://schemas.openxmlformats.org/presentationml/2006/main">
   <p:cSld>
     <p:spTree>
       <p:nvGrpSpPr>
@@ -574,7 +590,7 @@
             <a:spLocks noGrp="1"/>
           </p:cNvSpPr>
           <p:nvPr>
-            <p:ph type="body" idx="3" sz="quarter"/>
+            <p:ph type="body" sz="quarter" idx="3"/>
           </p:nvPr>
         </p:nvSpPr>
         <p:spPr/>
@@ -595,7 +611,7 @@
             <a:spLocks noGrp="1"/>
           </p:cNvSpPr>
           <p:nvPr>
-            <p:ph type="sldNum" idx="5" sz="quarter"/>
+            <p:ph type="sldNum" sz="quarter" idx="5"/>
           </p:nvPr>
         </p:nvSpPr>
         <p:spPr/>
@@ -609,7 +625,7 @@
 </file>
 
 <file path=ppt/notesSlides/notesSlide11.xml><?xml version="1.0" encoding="utf-8"?>
-<p:notes xmlns:a="http://schemas.openxmlformats.org/drawingml/2006/main" xmlns:p="http://schemas.openxmlformats.org/presentationml/2006/main" xmlns:r="http://schemas.openxmlformats.org/officeDocument/2006/relationships">
+<p:notes xmlns:a="http://schemas.openxmlformats.org/drawingml/2006/main" xmlns:r="http://schemas.openxmlformats.org/officeDocument/2006/relationships" xmlns:p="http://schemas.openxmlformats.org/presentationml/2006/main">
   <p:cSld>
     <p:spTree>
       <p:nvGrpSpPr>
@@ -644,7 +660,7 @@
             <a:spLocks noGrp="1"/>
           </p:cNvSpPr>
           <p:nvPr>
-            <p:ph type="body" idx="3" sz="quarter"/>
+            <p:ph type="body" sz="quarter" idx="3"/>
           </p:nvPr>
         </p:nvSpPr>
         <p:spPr/>
@@ -665,7 +681,7 @@
             <a:spLocks noGrp="1"/>
           </p:cNvSpPr>
           <p:nvPr>
-            <p:ph type="sldNum" idx="5" sz="quarter"/>
+            <p:ph type="sldNum" sz="quarter" idx="5"/>
           </p:nvPr>
         </p:nvSpPr>
         <p:spPr/>
@@ -679,7 +695,7 @@
 </file>
 
 <file path=ppt/notesSlides/notesSlide12.xml><?xml version="1.0" encoding="utf-8"?>
-<p:notes xmlns:a="http://schemas.openxmlformats.org/drawingml/2006/main" xmlns:p="http://schemas.openxmlformats.org/presentationml/2006/main" xmlns:r="http://schemas.openxmlformats.org/officeDocument/2006/relationships">
+<p:notes xmlns:a="http://schemas.openxmlformats.org/drawingml/2006/main" xmlns:r="http://schemas.openxmlformats.org/officeDocument/2006/relationships" xmlns:p="http://schemas.openxmlformats.org/presentationml/2006/main">
   <p:cSld>
     <p:spTree>
       <p:nvGrpSpPr>
@@ -714,7 +730,7 @@
             <a:spLocks noGrp="1"/>
           </p:cNvSpPr>
           <p:nvPr>
-            <p:ph type="body" idx="3" sz="quarter"/>
+            <p:ph type="body" sz="quarter" idx="3"/>
           </p:nvPr>
         </p:nvSpPr>
         <p:spPr/>
@@ -735,7 +751,7 @@
             <a:spLocks noGrp="1"/>
           </p:cNvSpPr>
           <p:nvPr>
-            <p:ph type="sldNum" idx="5" sz="quarter"/>
+            <p:ph type="sldNum" sz="quarter" idx="5"/>
           </p:nvPr>
         </p:nvSpPr>
         <p:spPr/>
@@ -749,7 +765,7 @@
 </file>
 
 <file path=ppt/notesSlides/notesSlide2.xml><?xml version="1.0" encoding="utf-8"?>
-<p:notes xmlns:a="http://schemas.openxmlformats.org/drawingml/2006/main" xmlns:p="http://schemas.openxmlformats.org/presentationml/2006/main" xmlns:r="http://schemas.openxmlformats.org/officeDocument/2006/relationships">
+<p:notes xmlns:a="http://schemas.openxmlformats.org/drawingml/2006/main" xmlns:r="http://schemas.openxmlformats.org/officeDocument/2006/relationships" xmlns:p="http://schemas.openxmlformats.org/presentationml/2006/main">
   <p:cSld>
     <p:spTree>
       <p:nvGrpSpPr>
@@ -784,7 +800,7 @@
             <a:spLocks noGrp="1"/>
           </p:cNvSpPr>
           <p:nvPr>
-            <p:ph type="body" idx="3" sz="quarter"/>
+            <p:ph type="body" sz="quarter" idx="3"/>
           </p:nvPr>
         </p:nvSpPr>
         <p:spPr/>
@@ -805,7 +821,7 @@
             <a:spLocks noGrp="1"/>
           </p:cNvSpPr>
           <p:nvPr>
-            <p:ph type="sldNum" idx="5" sz="quarter"/>
+            <p:ph type="sldNum" sz="quarter" idx="5"/>
           </p:nvPr>
         </p:nvSpPr>
         <p:spPr/>
@@ -819,7 +835,7 @@
 </file>
 
 <file path=ppt/notesSlides/notesSlide3.xml><?xml version="1.0" encoding="utf-8"?>
-<p:notes xmlns:a="http://schemas.openxmlformats.org/drawingml/2006/main" xmlns:p="http://schemas.openxmlformats.org/presentationml/2006/main" xmlns:r="http://schemas.openxmlformats.org/officeDocument/2006/relationships">
+<p:notes xmlns:a="http://schemas.openxmlformats.org/drawingml/2006/main" xmlns:r="http://schemas.openxmlformats.org/officeDocument/2006/relationships" xmlns:p="http://schemas.openxmlformats.org/presentationml/2006/main">
   <p:cSld>
     <p:spTree>
       <p:nvGrpSpPr>
@@ -854,7 +870,7 @@
             <a:spLocks noGrp="1"/>
           </p:cNvSpPr>
           <p:nvPr>
-            <p:ph type="body" idx="3" sz="quarter"/>
+            <p:ph type="body" sz="quarter" idx="3"/>
           </p:nvPr>
         </p:nvSpPr>
         <p:spPr/>
@@ -875,7 +891,7 @@
             <a:spLocks noGrp="1"/>
           </p:cNvSpPr>
           <p:nvPr>
-            <p:ph type="sldNum" idx="5" sz="quarter"/>
+            <p:ph type="sldNum" sz="quarter" idx="5"/>
           </p:nvPr>
         </p:nvSpPr>
         <p:spPr/>
@@ -889,7 +905,7 @@
 </file>
 
 <file path=ppt/notesSlides/notesSlide4.xml><?xml version="1.0" encoding="utf-8"?>
-<p:notes xmlns:a="http://schemas.openxmlformats.org/drawingml/2006/main" xmlns:p="http://schemas.openxmlformats.org/presentationml/2006/main" xmlns:r="http://schemas.openxmlformats.org/officeDocument/2006/relationships">
+<p:notes xmlns:a="http://schemas.openxmlformats.org/drawingml/2006/main" xmlns:r="http://schemas.openxmlformats.org/officeDocument/2006/relationships" xmlns:p="http://schemas.openxmlformats.org/presentationml/2006/main">
   <p:cSld>
     <p:spTree>
       <p:nvGrpSpPr>
@@ -924,7 +940,7 @@
             <a:spLocks noGrp="1"/>
           </p:cNvSpPr>
           <p:nvPr>
-            <p:ph type="body" idx="3" sz="quarter"/>
+            <p:ph type="body" sz="quarter" idx="3"/>
           </p:nvPr>
         </p:nvSpPr>
         <p:spPr/>
@@ -945,7 +961,7 @@
             <a:spLocks noGrp="1"/>
           </p:cNvSpPr>
           <p:nvPr>
-            <p:ph type="sldNum" idx="5" sz="quarter"/>
+            <p:ph type="sldNum" sz="quarter" idx="5"/>
           </p:nvPr>
         </p:nvSpPr>
         <p:spPr/>
@@ -959,7 +975,7 @@
 </file>
 
 <file path=ppt/notesSlides/notesSlide5.xml><?xml version="1.0" encoding="utf-8"?>
-<p:notes xmlns:a="http://schemas.openxmlformats.org/drawingml/2006/main" xmlns:p="http://schemas.openxmlformats.org/presentationml/2006/main" xmlns:r="http://schemas.openxmlformats.org/officeDocument/2006/relationships">
+<p:notes xmlns:a="http://schemas.openxmlformats.org/drawingml/2006/main" xmlns:r="http://schemas.openxmlformats.org/officeDocument/2006/relationships" xmlns:p="http://schemas.openxmlformats.org/presentationml/2006/main">
   <p:cSld>
     <p:spTree>
       <p:nvGrpSpPr>
@@ -994,7 +1010,7 @@
             <a:spLocks noGrp="1"/>
           </p:cNvSpPr>
           <p:nvPr>
-            <p:ph type="body" idx="3" sz="quarter"/>
+            <p:ph type="body" sz="quarter" idx="3"/>
           </p:nvPr>
         </p:nvSpPr>
         <p:spPr/>
@@ -1015,7 +1031,7 @@
             <a:spLocks noGrp="1"/>
           </p:cNvSpPr>
           <p:nvPr>
-            <p:ph type="sldNum" idx="5" sz="quarter"/>
+            <p:ph type="sldNum" sz="quarter" idx="5"/>
           </p:nvPr>
         </p:nvSpPr>
         <p:spPr/>
@@ -1029,7 +1045,7 @@
 </file>
 
 <file path=ppt/notesSlides/notesSlide6.xml><?xml version="1.0" encoding="utf-8"?>
-<p:notes xmlns:a="http://schemas.openxmlformats.org/drawingml/2006/main" xmlns:p="http://schemas.openxmlformats.org/presentationml/2006/main" xmlns:r="http://schemas.openxmlformats.org/officeDocument/2006/relationships">
+<p:notes xmlns:a="http://schemas.openxmlformats.org/drawingml/2006/main" xmlns:r="http://schemas.openxmlformats.org/officeDocument/2006/relationships" xmlns:p="http://schemas.openxmlformats.org/presentationml/2006/main">
   <p:cSld>
     <p:spTree>
       <p:nvGrpSpPr>
@@ -1064,7 +1080,7 @@
             <a:spLocks noGrp="1"/>
           </p:cNvSpPr>
           <p:nvPr>
-            <p:ph type="body" idx="3" sz="quarter"/>
+            <p:ph type="body" sz="quarter" idx="3"/>
           </p:nvPr>
         </p:nvSpPr>
         <p:spPr/>
@@ -1085,7 +1101,7 @@
             <a:spLocks noGrp="1"/>
           </p:cNvSpPr>
           <p:nvPr>
-            <p:ph type="sldNum" idx="5" sz="quarter"/>
+            <p:ph type="sldNum" sz="quarter" idx="5"/>
           </p:nvPr>
         </p:nvSpPr>
         <p:spPr/>
@@ -1099,7 +1115,7 @@
 </file>
 
 <file path=ppt/notesSlides/notesSlide7.xml><?xml version="1.0" encoding="utf-8"?>
-<p:notes xmlns:a="http://schemas.openxmlformats.org/drawingml/2006/main" xmlns:p="http://schemas.openxmlformats.org/presentationml/2006/main" xmlns:r="http://schemas.openxmlformats.org/officeDocument/2006/relationships">
+<p:notes xmlns:a="http://schemas.openxmlformats.org/drawingml/2006/main" xmlns:r="http://schemas.openxmlformats.org/officeDocument/2006/relationships" xmlns:p="http://schemas.openxmlformats.org/presentationml/2006/main">
   <p:cSld>
     <p:spTree>
       <p:nvGrpSpPr>
@@ -1134,7 +1150,7 @@
             <a:spLocks noGrp="1"/>
           </p:cNvSpPr>
           <p:nvPr>
-            <p:ph type="body" idx="3" sz="quarter"/>
+            <p:ph type="body" sz="quarter" idx="3"/>
           </p:nvPr>
         </p:nvSpPr>
         <p:spPr/>
@@ -1155,7 +1171,7 @@
             <a:spLocks noGrp="1"/>
           </p:cNvSpPr>
           <p:nvPr>
-            <p:ph type="sldNum" idx="5" sz="quarter"/>
+            <p:ph type="sldNum" sz="quarter" idx="5"/>
           </p:nvPr>
         </p:nvSpPr>
         <p:spPr/>
@@ -1169,7 +1185,7 @@
 </file>
 
 <file path=ppt/notesSlides/notesSlide8.xml><?xml version="1.0" encoding="utf-8"?>
-<p:notes xmlns:a="http://schemas.openxmlformats.org/drawingml/2006/main" xmlns:p="http://schemas.openxmlformats.org/presentationml/2006/main" xmlns:r="http://schemas.openxmlformats.org/officeDocument/2006/relationships">
+<p:notes xmlns:a="http://schemas.openxmlformats.org/drawingml/2006/main" xmlns:r="http://schemas.openxmlformats.org/officeDocument/2006/relationships" xmlns:p="http://schemas.openxmlformats.org/presentationml/2006/main">
   <p:cSld>
     <p:spTree>
       <p:nvGrpSpPr>
@@ -1204,7 +1220,7 @@
             <a:spLocks noGrp="1"/>
           </p:cNvSpPr>
           <p:nvPr>
-            <p:ph type="body" idx="3" sz="quarter"/>
+            <p:ph type="body" sz="quarter" idx="3"/>
           </p:nvPr>
         </p:nvSpPr>
         <p:spPr/>
@@ -1225,7 +1241,7 @@
             <a:spLocks noGrp="1"/>
           </p:cNvSpPr>
           <p:nvPr>
-            <p:ph type="sldNum" idx="5" sz="quarter"/>
+            <p:ph type="sldNum" sz="quarter" idx="5"/>
           </p:nvPr>
         </p:nvSpPr>
         <p:spPr/>
@@ -1239,7 +1255,7 @@
 </file>
 
 <file path=ppt/notesSlides/notesSlide9.xml><?xml version="1.0" encoding="utf-8"?>
-<p:notes xmlns:a="http://schemas.openxmlformats.org/drawingml/2006/main" xmlns:p="http://schemas.openxmlformats.org/presentationml/2006/main" xmlns:r="http://schemas.openxmlformats.org/officeDocument/2006/relationships">
+<p:notes xmlns:a="http://schemas.openxmlformats.org/drawingml/2006/main" xmlns:r="http://schemas.openxmlformats.org/officeDocument/2006/relationships" xmlns:p="http://schemas.openxmlformats.org/presentationml/2006/main">
   <p:cSld>
     <p:spTree>
       <p:nvGrpSpPr>
@@ -1274,7 +1290,7 @@
             <a:spLocks noGrp="1"/>
           </p:cNvSpPr>
           <p:nvPr>
-            <p:ph type="body" idx="3" sz="quarter"/>
+            <p:ph type="body" sz="quarter" idx="3"/>
           </p:nvPr>
         </p:nvSpPr>
         <p:spPr/>
@@ -1295,7 +1311,7 @@
             <a:spLocks noGrp="1"/>
           </p:cNvSpPr>
           <p:nvPr>
-            <p:ph type="sldNum" idx="5" sz="quarter"/>
+            <p:ph type="sldNum" sz="quarter" idx="5"/>
           </p:nvPr>
         </p:nvSpPr>
         <p:spPr/>
@@ -1489,7 +1505,6 @@
           <a:p>
             <a:fld id="{5BCAD085-E8A6-8845-BD4E-CB4CCA059FC4}" type="datetimeFigureOut">
               <a:rPr lang="en-US" smtClean="0"/>
-              <a:t>1/27/13</a:t>
             </a:fld>
             <a:endParaRPr lang="en-US"/>
           </a:p>
@@ -1531,18 +1546,12 @@
           <a:p>
             <a:fld id="{C1FF6DA9-008F-8B48-92A6-B652298478BF}" type="slidenum">
               <a:rPr lang="en-US" smtClean="0"/>
-              <a:t>‹#›</a:t>
             </a:fld>
             <a:endParaRPr lang="en-US"/>
           </a:p>
         </p:txBody>
       </p:sp>
     </p:spTree>
-    <p:extLst>
-      <p:ext uri="{BB962C8B-B14F-4D97-AF65-F5344CB8AC3E}">
-        <p14:creationId xmlns:p14="http://schemas.microsoft.com/office/powerpoint/2010/main" val="3168075583"/>
-      </p:ext>
-    </p:extLst>
   </p:cSld>
   <p:clrMapOvr>
     <a:masterClrMapping/>
@@ -1610,6 +1619,7 @@
               <a:rPr lang="en-US" smtClean="0"/>
               <a:t>Click to edit Master text styles</a:t>
             </a:r>
+            <a:endParaRPr lang="en-US" smtClean="0"/>
           </a:p>
           <a:p>
             <a:pPr lvl="1"/>
@@ -1617,6 +1627,7 @@
               <a:rPr lang="en-US" smtClean="0"/>
               <a:t>Second level</a:t>
             </a:r>
+            <a:endParaRPr lang="en-US" smtClean="0"/>
           </a:p>
           <a:p>
             <a:pPr lvl="2"/>
@@ -1624,6 +1635,7 @@
               <a:rPr lang="en-US" smtClean="0"/>
               <a:t>Third level</a:t>
             </a:r>
+            <a:endParaRPr lang="en-US" smtClean="0"/>
           </a:p>
           <a:p>
             <a:pPr lvl="3"/>
@@ -1631,6 +1643,7 @@
               <a:rPr lang="en-US" smtClean="0"/>
               <a:t>Fourth level</a:t>
             </a:r>
+            <a:endParaRPr lang="en-US" smtClean="0"/>
           </a:p>
           <a:p>
             <a:pPr lvl="4"/>
@@ -1659,7 +1672,6 @@
           <a:p>
             <a:fld id="{5BCAD085-E8A6-8845-BD4E-CB4CCA059FC4}" type="datetimeFigureOut">
               <a:rPr lang="en-US" smtClean="0"/>
-              <a:t>1/27/13</a:t>
             </a:fld>
             <a:endParaRPr lang="en-US"/>
           </a:p>
@@ -1701,18 +1713,12 @@
           <a:p>
             <a:fld id="{C1FF6DA9-008F-8B48-92A6-B652298478BF}" type="slidenum">
               <a:rPr lang="en-US" smtClean="0"/>
-              <a:t>‹#›</a:t>
             </a:fld>
             <a:endParaRPr lang="en-US"/>
           </a:p>
         </p:txBody>
       </p:sp>
     </p:spTree>
-    <p:extLst>
-      <p:ext uri="{BB962C8B-B14F-4D97-AF65-F5344CB8AC3E}">
-        <p14:creationId xmlns:p14="http://schemas.microsoft.com/office/powerpoint/2010/main" val="2910927964"/>
-      </p:ext>
-    </p:extLst>
   </p:cSld>
   <p:clrMapOvr>
     <a:masterClrMapping/>
@@ -1790,6 +1796,7 @@
               <a:rPr lang="en-US" smtClean="0"/>
               <a:t>Click to edit Master text styles</a:t>
             </a:r>
+            <a:endParaRPr lang="en-US" smtClean="0"/>
           </a:p>
           <a:p>
             <a:pPr lvl="1"/>
@@ -1797,6 +1804,7 @@
               <a:rPr lang="en-US" smtClean="0"/>
               <a:t>Second level</a:t>
             </a:r>
+            <a:endParaRPr lang="en-US" smtClean="0"/>
           </a:p>
           <a:p>
             <a:pPr lvl="2"/>
@@ -1804,6 +1812,7 @@
               <a:rPr lang="en-US" smtClean="0"/>
               <a:t>Third level</a:t>
             </a:r>
+            <a:endParaRPr lang="en-US" smtClean="0"/>
           </a:p>
           <a:p>
             <a:pPr lvl="3"/>
@@ -1811,6 +1820,7 @@
               <a:rPr lang="en-US" smtClean="0"/>
               <a:t>Fourth level</a:t>
             </a:r>
+            <a:endParaRPr lang="en-US" smtClean="0"/>
           </a:p>
           <a:p>
             <a:pPr lvl="4"/>
@@ -1839,7 +1849,6 @@
           <a:p>
             <a:fld id="{5BCAD085-E8A6-8845-BD4E-CB4CCA059FC4}" type="datetimeFigureOut">
               <a:rPr lang="en-US" smtClean="0"/>
-              <a:t>1/27/13</a:t>
             </a:fld>
             <a:endParaRPr lang="en-US"/>
           </a:p>
@@ -1881,18 +1890,12 @@
           <a:p>
             <a:fld id="{C1FF6DA9-008F-8B48-92A6-B652298478BF}" type="slidenum">
               <a:rPr lang="en-US" smtClean="0"/>
-              <a:t>‹#›</a:t>
             </a:fld>
             <a:endParaRPr lang="en-US"/>
           </a:p>
         </p:txBody>
       </p:sp>
     </p:spTree>
-    <p:extLst>
-      <p:ext uri="{BB962C8B-B14F-4D97-AF65-F5344CB8AC3E}">
-        <p14:creationId xmlns:p14="http://schemas.microsoft.com/office/powerpoint/2010/main" val="3612223792"/>
-      </p:ext>
-    </p:extLst>
   </p:cSld>
   <p:clrMapOvr>
     <a:masterClrMapping/>
@@ -1960,6 +1963,7 @@
               <a:rPr lang="en-US" smtClean="0"/>
               <a:t>Click to edit Master text styles</a:t>
             </a:r>
+            <a:endParaRPr lang="en-US" smtClean="0"/>
           </a:p>
           <a:p>
             <a:pPr lvl="1"/>
@@ -1967,6 +1971,7 @@
               <a:rPr lang="en-US" smtClean="0"/>
               <a:t>Second level</a:t>
             </a:r>
+            <a:endParaRPr lang="en-US" smtClean="0"/>
           </a:p>
           <a:p>
             <a:pPr lvl="2"/>
@@ -1974,6 +1979,7 @@
               <a:rPr lang="en-US" smtClean="0"/>
               <a:t>Third level</a:t>
             </a:r>
+            <a:endParaRPr lang="en-US" smtClean="0"/>
           </a:p>
           <a:p>
             <a:pPr lvl="3"/>
@@ -1981,6 +1987,7 @@
               <a:rPr lang="en-US" smtClean="0"/>
               <a:t>Fourth level</a:t>
             </a:r>
+            <a:endParaRPr lang="en-US" smtClean="0"/>
           </a:p>
           <a:p>
             <a:pPr lvl="4"/>
@@ -2009,7 +2016,6 @@
           <a:p>
             <a:fld id="{5BCAD085-E8A6-8845-BD4E-CB4CCA059FC4}" type="datetimeFigureOut">
               <a:rPr lang="en-US" smtClean="0"/>
-              <a:t>1/27/13</a:t>
             </a:fld>
             <a:endParaRPr lang="en-US"/>
           </a:p>
@@ -2051,18 +2057,12 @@
           <a:p>
             <a:fld id="{C1FF6DA9-008F-8B48-92A6-B652298478BF}" type="slidenum">
               <a:rPr lang="en-US" smtClean="0"/>
-              <a:t>‹#›</a:t>
             </a:fld>
             <a:endParaRPr lang="en-US"/>
           </a:p>
         </p:txBody>
       </p:sp>
     </p:spTree>
-    <p:extLst>
-      <p:ext uri="{BB962C8B-B14F-4D97-AF65-F5344CB8AC3E}">
-        <p14:creationId xmlns:p14="http://schemas.microsoft.com/office/powerpoint/2010/main" val="2614314258"/>
-      </p:ext>
-    </p:extLst>
   </p:cSld>
   <p:clrMapOvr>
     <a:masterClrMapping/>
@@ -2235,6 +2235,7 @@
               <a:rPr lang="en-US" smtClean="0"/>
               <a:t>Click to edit Master text styles</a:t>
             </a:r>
+            <a:endParaRPr lang="en-US" smtClean="0"/>
           </a:p>
         </p:txBody>
       </p:sp>
@@ -2255,7 +2256,6 @@
           <a:p>
             <a:fld id="{5BCAD085-E8A6-8845-BD4E-CB4CCA059FC4}" type="datetimeFigureOut">
               <a:rPr lang="en-US" smtClean="0"/>
-              <a:t>1/27/13</a:t>
             </a:fld>
             <a:endParaRPr lang="en-US"/>
           </a:p>
@@ -2297,18 +2297,12 @@
           <a:p>
             <a:fld id="{C1FF6DA9-008F-8B48-92A6-B652298478BF}" type="slidenum">
               <a:rPr lang="en-US" smtClean="0"/>
-              <a:t>‹#›</a:t>
             </a:fld>
             <a:endParaRPr lang="en-US"/>
           </a:p>
         </p:txBody>
       </p:sp>
     </p:spTree>
-    <p:extLst>
-      <p:ext uri="{BB962C8B-B14F-4D97-AF65-F5344CB8AC3E}">
-        <p14:creationId xmlns:p14="http://schemas.microsoft.com/office/powerpoint/2010/main" val="960648375"/>
-      </p:ext>
-    </p:extLst>
   </p:cSld>
   <p:clrMapOvr>
     <a:masterClrMapping/>
@@ -2409,6 +2403,7 @@
               <a:rPr lang="en-US" smtClean="0"/>
               <a:t>Click to edit Master text styles</a:t>
             </a:r>
+            <a:endParaRPr lang="en-US" smtClean="0"/>
           </a:p>
           <a:p>
             <a:pPr lvl="1"/>
@@ -2416,6 +2411,7 @@
               <a:rPr lang="en-US" smtClean="0"/>
               <a:t>Second level</a:t>
             </a:r>
+            <a:endParaRPr lang="en-US" smtClean="0"/>
           </a:p>
           <a:p>
             <a:pPr lvl="2"/>
@@ -2423,6 +2419,7 @@
               <a:rPr lang="en-US" smtClean="0"/>
               <a:t>Third level</a:t>
             </a:r>
+            <a:endParaRPr lang="en-US" smtClean="0"/>
           </a:p>
           <a:p>
             <a:pPr lvl="3"/>
@@ -2430,6 +2427,7 @@
               <a:rPr lang="en-US" smtClean="0"/>
               <a:t>Fourth level</a:t>
             </a:r>
+            <a:endParaRPr lang="en-US" smtClean="0"/>
           </a:p>
           <a:p>
             <a:pPr lvl="4"/>
@@ -2494,6 +2492,7 @@
               <a:rPr lang="en-US" smtClean="0"/>
               <a:t>Click to edit Master text styles</a:t>
             </a:r>
+            <a:endParaRPr lang="en-US" smtClean="0"/>
           </a:p>
           <a:p>
             <a:pPr lvl="1"/>
@@ -2501,6 +2500,7 @@
               <a:rPr lang="en-US" smtClean="0"/>
               <a:t>Second level</a:t>
             </a:r>
+            <a:endParaRPr lang="en-US" smtClean="0"/>
           </a:p>
           <a:p>
             <a:pPr lvl="2"/>
@@ -2508,6 +2508,7 @@
               <a:rPr lang="en-US" smtClean="0"/>
               <a:t>Third level</a:t>
             </a:r>
+            <a:endParaRPr lang="en-US" smtClean="0"/>
           </a:p>
           <a:p>
             <a:pPr lvl="3"/>
@@ -2515,6 +2516,7 @@
               <a:rPr lang="en-US" smtClean="0"/>
               <a:t>Fourth level</a:t>
             </a:r>
+            <a:endParaRPr lang="en-US" smtClean="0"/>
           </a:p>
           <a:p>
             <a:pPr lvl="4"/>
@@ -2543,7 +2545,6 @@
           <a:p>
             <a:fld id="{5BCAD085-E8A6-8845-BD4E-CB4CCA059FC4}" type="datetimeFigureOut">
               <a:rPr lang="en-US" smtClean="0"/>
-              <a:t>1/27/13</a:t>
             </a:fld>
             <a:endParaRPr lang="en-US"/>
           </a:p>
@@ -2585,18 +2586,12 @@
           <a:p>
             <a:fld id="{C1FF6DA9-008F-8B48-92A6-B652298478BF}" type="slidenum">
               <a:rPr lang="en-US" smtClean="0"/>
-              <a:t>‹#›</a:t>
             </a:fld>
             <a:endParaRPr lang="en-US"/>
           </a:p>
         </p:txBody>
       </p:sp>
     </p:spTree>
-    <p:extLst>
-      <p:ext uri="{BB962C8B-B14F-4D97-AF65-F5344CB8AC3E}">
-        <p14:creationId xmlns:p14="http://schemas.microsoft.com/office/powerpoint/2010/main" val="2782244947"/>
-      </p:ext>
-    </p:extLst>
   </p:cSld>
   <p:clrMapOvr>
     <a:masterClrMapping/>
@@ -2710,6 +2705,7 @@
               <a:rPr lang="en-US" smtClean="0"/>
               <a:t>Click to edit Master text styles</a:t>
             </a:r>
+            <a:endParaRPr lang="en-US" smtClean="0"/>
           </a:p>
         </p:txBody>
       </p:sp>
@@ -2766,6 +2762,7 @@
               <a:rPr lang="en-US" smtClean="0"/>
               <a:t>Click to edit Master text styles</a:t>
             </a:r>
+            <a:endParaRPr lang="en-US" smtClean="0"/>
           </a:p>
           <a:p>
             <a:pPr lvl="1"/>
@@ -2773,6 +2770,7 @@
               <a:rPr lang="en-US" smtClean="0"/>
               <a:t>Second level</a:t>
             </a:r>
+            <a:endParaRPr lang="en-US" smtClean="0"/>
           </a:p>
           <a:p>
             <a:pPr lvl="2"/>
@@ -2780,6 +2778,7 @@
               <a:rPr lang="en-US" smtClean="0"/>
               <a:t>Third level</a:t>
             </a:r>
+            <a:endParaRPr lang="en-US" smtClean="0"/>
           </a:p>
           <a:p>
             <a:pPr lvl="3"/>
@@ -2787,6 +2786,7 @@
               <a:rPr lang="en-US" smtClean="0"/>
               <a:t>Fourth level</a:t>
             </a:r>
+            <a:endParaRPr lang="en-US" smtClean="0"/>
           </a:p>
           <a:p>
             <a:pPr lvl="4"/>
@@ -2860,6 +2860,7 @@
               <a:rPr lang="en-US" smtClean="0"/>
               <a:t>Click to edit Master text styles</a:t>
             </a:r>
+            <a:endParaRPr lang="en-US" smtClean="0"/>
           </a:p>
         </p:txBody>
       </p:sp>
@@ -2916,6 +2917,7 @@
               <a:rPr lang="en-US" smtClean="0"/>
               <a:t>Click to edit Master text styles</a:t>
             </a:r>
+            <a:endParaRPr lang="en-US" smtClean="0"/>
           </a:p>
           <a:p>
             <a:pPr lvl="1"/>
@@ -2923,6 +2925,7 @@
               <a:rPr lang="en-US" smtClean="0"/>
               <a:t>Second level</a:t>
             </a:r>
+            <a:endParaRPr lang="en-US" smtClean="0"/>
           </a:p>
           <a:p>
             <a:pPr lvl="2"/>
@@ -2930,6 +2933,7 @@
               <a:rPr lang="en-US" smtClean="0"/>
               <a:t>Third level</a:t>
             </a:r>
+            <a:endParaRPr lang="en-US" smtClean="0"/>
           </a:p>
           <a:p>
             <a:pPr lvl="3"/>
@@ -2937,6 +2941,7 @@
               <a:rPr lang="en-US" smtClean="0"/>
               <a:t>Fourth level</a:t>
             </a:r>
+            <a:endParaRPr lang="en-US" smtClean="0"/>
           </a:p>
           <a:p>
             <a:pPr lvl="4"/>
@@ -2965,7 +2970,6 @@
           <a:p>
             <a:fld id="{5BCAD085-E8A6-8845-BD4E-CB4CCA059FC4}" type="datetimeFigureOut">
               <a:rPr lang="en-US" smtClean="0"/>
-              <a:t>1/27/13</a:t>
             </a:fld>
             <a:endParaRPr lang="en-US"/>
           </a:p>
@@ -3007,18 +3011,12 @@
           <a:p>
             <a:fld id="{C1FF6DA9-008F-8B48-92A6-B652298478BF}" type="slidenum">
               <a:rPr lang="en-US" smtClean="0"/>
-              <a:t>‹#›</a:t>
             </a:fld>
             <a:endParaRPr lang="en-US"/>
           </a:p>
         </p:txBody>
       </p:sp>
     </p:spTree>
-    <p:extLst>
-      <p:ext uri="{BB962C8B-B14F-4D97-AF65-F5344CB8AC3E}">
-        <p14:creationId xmlns:p14="http://schemas.microsoft.com/office/powerpoint/2010/main" val="990158736"/>
-      </p:ext>
-    </p:extLst>
   </p:cSld>
   <p:clrMapOvr>
     <a:masterClrMapping/>
@@ -3083,7 +3081,6 @@
           <a:p>
             <a:fld id="{5BCAD085-E8A6-8845-BD4E-CB4CCA059FC4}" type="datetimeFigureOut">
               <a:rPr lang="en-US" smtClean="0"/>
-              <a:t>1/27/13</a:t>
             </a:fld>
             <a:endParaRPr lang="en-US"/>
           </a:p>
@@ -3125,18 +3122,12 @@
           <a:p>
             <a:fld id="{C1FF6DA9-008F-8B48-92A6-B652298478BF}" type="slidenum">
               <a:rPr lang="en-US" smtClean="0"/>
-              <a:t>‹#›</a:t>
             </a:fld>
             <a:endParaRPr lang="en-US"/>
           </a:p>
         </p:txBody>
       </p:sp>
     </p:spTree>
-    <p:extLst>
-      <p:ext uri="{BB962C8B-B14F-4D97-AF65-F5344CB8AC3E}">
-        <p14:creationId xmlns:p14="http://schemas.microsoft.com/office/powerpoint/2010/main" val="727027711"/>
-      </p:ext>
-    </p:extLst>
   </p:cSld>
   <p:clrMapOvr>
     <a:masterClrMapping/>
@@ -3178,7 +3169,6 @@
           <a:p>
             <a:fld id="{5BCAD085-E8A6-8845-BD4E-CB4CCA059FC4}" type="datetimeFigureOut">
               <a:rPr lang="en-US" smtClean="0"/>
-              <a:t>1/27/13</a:t>
             </a:fld>
             <a:endParaRPr lang="en-US"/>
           </a:p>
@@ -3220,18 +3210,12 @@
           <a:p>
             <a:fld id="{C1FF6DA9-008F-8B48-92A6-B652298478BF}" type="slidenum">
               <a:rPr lang="en-US" smtClean="0"/>
-              <a:t>‹#›</a:t>
             </a:fld>
             <a:endParaRPr lang="en-US"/>
           </a:p>
         </p:txBody>
       </p:sp>
     </p:spTree>
-    <p:extLst>
-      <p:ext uri="{BB962C8B-B14F-4D97-AF65-F5344CB8AC3E}">
-        <p14:creationId xmlns:p14="http://schemas.microsoft.com/office/powerpoint/2010/main" val="1212999818"/>
-      </p:ext>
-    </p:extLst>
   </p:cSld>
   <p:clrMapOvr>
     <a:masterClrMapping/>
@@ -3341,6 +3325,7 @@
               <a:rPr lang="en-US" smtClean="0"/>
               <a:t>Click to edit Master text styles</a:t>
             </a:r>
+            <a:endParaRPr lang="en-US" smtClean="0"/>
           </a:p>
           <a:p>
             <a:pPr lvl="1"/>
@@ -3348,6 +3333,7 @@
               <a:rPr lang="en-US" smtClean="0"/>
               <a:t>Second level</a:t>
             </a:r>
+            <a:endParaRPr lang="en-US" smtClean="0"/>
           </a:p>
           <a:p>
             <a:pPr lvl="2"/>
@@ -3355,6 +3341,7 @@
               <a:rPr lang="en-US" smtClean="0"/>
               <a:t>Third level</a:t>
             </a:r>
+            <a:endParaRPr lang="en-US" smtClean="0"/>
           </a:p>
           <a:p>
             <a:pPr lvl="3"/>
@@ -3362,6 +3349,7 @@
               <a:rPr lang="en-US" smtClean="0"/>
               <a:t>Fourth level</a:t>
             </a:r>
+            <a:endParaRPr lang="en-US" smtClean="0"/>
           </a:p>
           <a:p>
             <a:pPr lvl="4"/>
@@ -3435,6 +3423,7 @@
               <a:rPr lang="en-US" smtClean="0"/>
               <a:t>Click to edit Master text styles</a:t>
             </a:r>
+            <a:endParaRPr lang="en-US" smtClean="0"/>
           </a:p>
         </p:txBody>
       </p:sp>
@@ -3455,7 +3444,6 @@
           <a:p>
             <a:fld id="{5BCAD085-E8A6-8845-BD4E-CB4CCA059FC4}" type="datetimeFigureOut">
               <a:rPr lang="en-US" smtClean="0"/>
-              <a:t>1/27/13</a:t>
             </a:fld>
             <a:endParaRPr lang="en-US"/>
           </a:p>
@@ -3497,18 +3485,12 @@
           <a:p>
             <a:fld id="{C1FF6DA9-008F-8B48-92A6-B652298478BF}" type="slidenum">
               <a:rPr lang="en-US" smtClean="0"/>
-              <a:t>‹#›</a:t>
             </a:fld>
             <a:endParaRPr lang="en-US"/>
           </a:p>
         </p:txBody>
       </p:sp>
     </p:spTree>
-    <p:extLst>
-      <p:ext uri="{BB962C8B-B14F-4D97-AF65-F5344CB8AC3E}">
-        <p14:creationId xmlns:p14="http://schemas.microsoft.com/office/powerpoint/2010/main" val="1840726560"/>
-      </p:ext>
-    </p:extLst>
   </p:cSld>
   <p:clrMapOvr>
     <a:masterClrMapping/>
@@ -3688,6 +3670,7 @@
               <a:rPr lang="en-US" smtClean="0"/>
               <a:t>Click to edit Master text styles</a:t>
             </a:r>
+            <a:endParaRPr lang="en-US" smtClean="0"/>
           </a:p>
         </p:txBody>
       </p:sp>
@@ -3708,7 +3691,6 @@
           <a:p>
             <a:fld id="{5BCAD085-E8A6-8845-BD4E-CB4CCA059FC4}" type="datetimeFigureOut">
               <a:rPr lang="en-US" smtClean="0"/>
-              <a:t>1/27/13</a:t>
             </a:fld>
             <a:endParaRPr lang="en-US"/>
           </a:p>
@@ -3750,18 +3732,12 @@
           <a:p>
             <a:fld id="{C1FF6DA9-008F-8B48-92A6-B652298478BF}" type="slidenum">
               <a:rPr lang="en-US" smtClean="0"/>
-              <a:t>‹#›</a:t>
             </a:fld>
             <a:endParaRPr lang="en-US"/>
           </a:p>
         </p:txBody>
       </p:sp>
     </p:spTree>
-    <p:extLst>
-      <p:ext uri="{BB962C8B-B14F-4D97-AF65-F5344CB8AC3E}">
-        <p14:creationId xmlns:p14="http://schemas.microsoft.com/office/powerpoint/2010/main" val="3889236939"/>
-      </p:ext>
-    </p:extLst>
   </p:cSld>
   <p:clrMapOvr>
     <a:masterClrMapping/>
@@ -3854,6 +3830,7 @@
               <a:rPr lang="en-US" smtClean="0"/>
               <a:t>Click to edit Master text styles</a:t>
             </a:r>
+            <a:endParaRPr lang="en-US" smtClean="0"/>
           </a:p>
           <a:p>
             <a:pPr lvl="1"/>
@@ -3861,6 +3838,7 @@
               <a:rPr lang="en-US" smtClean="0"/>
               <a:t>Second level</a:t>
             </a:r>
+            <a:endParaRPr lang="en-US" smtClean="0"/>
           </a:p>
           <a:p>
             <a:pPr lvl="2"/>
@@ -3868,6 +3846,7 @@
               <a:rPr lang="en-US" smtClean="0"/>
               <a:t>Third level</a:t>
             </a:r>
+            <a:endParaRPr lang="en-US" smtClean="0"/>
           </a:p>
           <a:p>
             <a:pPr lvl="3"/>
@@ -3875,6 +3854,7 @@
               <a:rPr lang="en-US" smtClean="0"/>
               <a:t>Fourth level</a:t>
             </a:r>
+            <a:endParaRPr lang="en-US" smtClean="0"/>
           </a:p>
           <a:p>
             <a:pPr lvl="4"/>
@@ -3921,7 +3901,6 @@
           <a:p>
             <a:fld id="{5BCAD085-E8A6-8845-BD4E-CB4CCA059FC4}" type="datetimeFigureOut">
               <a:rPr lang="en-US" smtClean="0"/>
-              <a:t>1/27/13</a:t>
             </a:fld>
             <a:endParaRPr lang="en-US"/>
           </a:p>
@@ -3999,18 +3978,12 @@
           <a:p>
             <a:fld id="{C1FF6DA9-008F-8B48-92A6-B652298478BF}" type="slidenum">
               <a:rPr lang="en-US" smtClean="0"/>
-              <a:t>‹#›</a:t>
             </a:fld>
             <a:endParaRPr lang="en-US"/>
           </a:p>
         </p:txBody>
       </p:sp>
     </p:spTree>
-    <p:extLst>
-      <p:ext uri="{BB962C8B-B14F-4D97-AF65-F5344CB8AC3E}">
-        <p14:creationId xmlns:p14="http://schemas.microsoft.com/office/powerpoint/2010/main" val="2209977519"/>
-      </p:ext>
-    </p:extLst>
   </p:cSld>
   <p:clrMap bg1="lt1" tx1="dk1" bg2="lt2" tx2="dk2" accent1="accent1" accent2="accent2" accent3="accent3" accent4="accent4" accent5="accent5" accent6="accent6" hlink="hlink" folHlink="folHlink"/>
   <p:sldLayoutIdLst>
@@ -4048,7 +4021,7 @@
         <a:spcBef>
           <a:spcPct val="20000"/>
         </a:spcBef>
-        <a:buFont typeface="Arial"/>
+        <a:buFont typeface="Arial" panose="020B0604020202090204"/>
         <a:buChar char="•"/>
         <a:defRPr sz="3200" kern="1200">
           <a:solidFill>
@@ -4063,7 +4036,7 @@
         <a:spcBef>
           <a:spcPct val="20000"/>
         </a:spcBef>
-        <a:buFont typeface="Arial"/>
+        <a:buFont typeface="Arial" panose="020B0604020202090204"/>
         <a:buChar char="–"/>
         <a:defRPr sz="2800" kern="1200">
           <a:solidFill>
@@ -4078,7 +4051,7 @@
         <a:spcBef>
           <a:spcPct val="20000"/>
         </a:spcBef>
-        <a:buFont typeface="Arial"/>
+        <a:buFont typeface="Arial" panose="020B0604020202090204"/>
         <a:buChar char="•"/>
         <a:defRPr sz="2400" kern="1200">
           <a:solidFill>
@@ -4093,7 +4066,7 @@
         <a:spcBef>
           <a:spcPct val="20000"/>
         </a:spcBef>
-        <a:buFont typeface="Arial"/>
+        <a:buFont typeface="Arial" panose="020B0604020202090204"/>
         <a:buChar char="–"/>
         <a:defRPr sz="2000" kern="1200">
           <a:solidFill>
@@ -4108,7 +4081,7 @@
         <a:spcBef>
           <a:spcPct val="20000"/>
         </a:spcBef>
-        <a:buFont typeface="Arial"/>
+        <a:buFont typeface="Arial" panose="020B0604020202090204"/>
         <a:buChar char="»"/>
         <a:defRPr sz="2000" kern="1200">
           <a:solidFill>
@@ -4123,7 +4096,7 @@
         <a:spcBef>
           <a:spcPct val="20000"/>
         </a:spcBef>
-        <a:buFont typeface="Arial"/>
+        <a:buFont typeface="Arial" panose="020B0604020202090204"/>
         <a:buChar char="•"/>
         <a:defRPr sz="2000" kern="1200">
           <a:solidFill>
@@ -4138,7 +4111,7 @@
         <a:spcBef>
           <a:spcPct val="20000"/>
         </a:spcBef>
-        <a:buFont typeface="Arial"/>
+        <a:buFont typeface="Arial" panose="020B0604020202090204"/>
         <a:buChar char="•"/>
         <a:defRPr sz="2000" kern="1200">
           <a:solidFill>
@@ -4153,7 +4126,7 @@
         <a:spcBef>
           <a:spcPct val="20000"/>
         </a:spcBef>
-        <a:buFont typeface="Arial"/>
+        <a:buFont typeface="Arial" panose="020B0604020202090204"/>
         <a:buChar char="•"/>
         <a:defRPr sz="2000" kern="1200">
           <a:solidFill>
@@ -4168,7 +4141,7 @@
         <a:spcBef>
           <a:spcPct val="20000"/>
         </a:spcBef>
-        <a:buFont typeface="Arial"/>
+        <a:buFont typeface="Arial" panose="020B0604020202090204"/>
         <a:buChar char="•"/>
         <a:defRPr sz="2000" kern="1200">
           <a:solidFill>
@@ -4280,7 +4253,7 @@
 </file>
 
 <file path=ppt/slides/slide1.xml><?xml version="1.0" encoding="utf-8"?>
-<p:sld xmlns:a="http://schemas.openxmlformats.org/drawingml/2006/main" xmlns:p="http://schemas.openxmlformats.org/presentationml/2006/main" xmlns:r="http://schemas.openxmlformats.org/officeDocument/2006/relationships">
+<p:sld xmlns:a="http://schemas.openxmlformats.org/drawingml/2006/main" xmlns:r="http://schemas.openxmlformats.org/officeDocument/2006/relationships" xmlns:p="http://schemas.openxmlformats.org/presentationml/2006/main">
   <p:cSld>
     <p:spTree>
       <p:nvGrpSpPr>
@@ -4463,17 +4436,19 @@
       </p:sp>
       <p:sp>
         <p:nvSpPr>
-          <p:cNvPr id="6" name="Oval 5"/>
+          <p:cNvPr id="7" name="Rounded Rectangle 6"/>
           <p:cNvSpPr/>
           <p:nvPr/>
         </p:nvSpPr>
         <p:spPr>
           <a:xfrm>
-            <a:off x="1005840" y="2926080"/>
-            <a:ext cx="502920" cy="502920"/>
-          </a:xfrm>
-          <a:prstGeom prst="ellipse">
-            <a:avLst/>
+            <a:off x="548640" y="548640"/>
+            <a:ext cx="2194560" cy="347472"/>
+          </a:xfrm>
+          <a:prstGeom prst="roundRect">
+            <a:avLst>
+              <a:gd name="adj" fmla="val 50000"/>
+            </a:avLst>
           </a:prstGeom>
           <a:solidFill>
             <a:srgbClr val="FFFFFF"/>
@@ -4497,55 +4472,10 @@
           </a:fontRef>
         </p:style>
         <p:txBody>
-          <a:bodyPr rtlCol="0" anchor="ctr"/>
+          <a:bodyPr lIns="40000" tIns="20000" rIns="40000" bIns="20000" rtlCol="0" anchor="ctr"/>
           <a:lstStyle/>
           <a:p>
             <a:pPr algn="ctr"/>
-          </a:p>
-        </p:txBody>
-      </p:sp>
-      <p:sp>
-        <p:nvSpPr>
-          <p:cNvPr id="7" name="Rounded Rectangle 6"/>
-          <p:cNvSpPr/>
-          <p:nvPr/>
-        </p:nvSpPr>
-        <p:spPr>
-          <a:xfrm>
-            <a:off x="548640" y="548640"/>
-            <a:ext cx="2194560" cy="347472"/>
-          </a:xfrm>
-          <a:prstGeom prst="roundRect">
-            <a:avLst>
-              <a:gd name="adj" fmla="val 50000"/>
-            </a:avLst>
-          </a:prstGeom>
-          <a:solidFill>
-            <a:srgbClr val="FFFFFF"/>
-          </a:solidFill>
-          <a:ln>
-            <a:noFill/>
-          </a:ln>
-        </p:spPr>
-        <p:style>
-          <a:lnRef idx="1">
-            <a:schemeClr val="accent1"/>
-          </a:lnRef>
-          <a:fillRef idx="3">
-            <a:schemeClr val="accent1"/>
-          </a:fillRef>
-          <a:effectRef idx="2">
-            <a:schemeClr val="accent1"/>
-          </a:effectRef>
-          <a:fontRef idx="minor">
-            <a:schemeClr val="lt1"/>
-          </a:fontRef>
-        </p:style>
-        <p:txBody>
-          <a:bodyPr rtlCol="0" anchor="ctr" lIns="40000" rIns="40000" tIns="20000" bIns="20000"/>
-          <a:lstStyle/>
-          <a:p>
-            <a:pPr algn="ctr"/>
             <a:r>
               <a:rPr sz="1100" b="1">
                 <a:solidFill>
@@ -4555,6 +4485,12 @@
               </a:rPr>
               <a:t>iOS · SwiftUI · Week 7</a:t>
             </a:r>
+            <a:endParaRPr sz="1100" b="1">
+              <a:solidFill>
+                <a:srgbClr val="A052D4"/>
+              </a:solidFill>
+              <a:latin typeface="SF Pro Text"/>
+            </a:endParaRPr>
           </a:p>
         </p:txBody>
       </p:sp>
@@ -4575,7 +4511,7 @@
           <a:noFill/>
         </p:spPr>
         <p:txBody>
-          <a:bodyPr wrap="square" lIns="60000" rIns="60000" tIns="40000" bIns="40000" anchor="t">
+          <a:bodyPr wrap="square" lIns="60000" tIns="40000" rIns="60000" bIns="40000" anchor="t">
             <a:spAutoFit/>
           </a:bodyPr>
           <a:lstStyle/>
@@ -4590,6 +4526,12 @@
               </a:rPr>
               <a:t>Daily Journal</a:t>
             </a:r>
+            <a:endParaRPr sz="5200" b="1">
+              <a:solidFill>
+                <a:srgbClr val="FFFFFF"/>
+              </a:solidFill>
+              <a:latin typeface="SF Pro Display"/>
+            </a:endParaRPr>
           </a:p>
         </p:txBody>
       </p:sp>
@@ -4610,7 +4552,7 @@
           <a:noFill/>
         </p:spPr>
         <p:txBody>
-          <a:bodyPr wrap="square" lIns="60000" rIns="60000" tIns="40000" bIns="40000" anchor="t">
+          <a:bodyPr wrap="square" lIns="60000" tIns="40000" rIns="60000" bIns="40000" anchor="t">
             <a:spAutoFit/>
           </a:bodyPr>
           <a:lstStyle/>
@@ -4625,6 +4567,12 @@
               </a:rPr>
               <a:t>Your Digital Notebook</a:t>
             </a:r>
+            <a:endParaRPr sz="4400" b="1">
+              <a:solidFill>
+                <a:srgbClr val="FFFFFF"/>
+              </a:solidFill>
+              <a:latin typeface="SF Pro Display"/>
+            </a:endParaRPr>
           </a:p>
         </p:txBody>
       </p:sp>
@@ -4636,7 +4584,7 @@
         </p:nvSpPr>
         <p:spPr>
           <a:xfrm>
-            <a:off x="548640" y="3063240"/>
+            <a:off x="640080" y="2926080"/>
             <a:ext cx="10972800" cy="548640"/>
           </a:xfrm>
           <a:prstGeom prst="rect">
@@ -4645,7 +4593,7 @@
           <a:noFill/>
         </p:spPr>
         <p:txBody>
-          <a:bodyPr wrap="square" lIns="60000" rIns="60000" tIns="40000" bIns="40000" anchor="t">
+          <a:bodyPr wrap="square" lIns="60000" tIns="40000" rIns="60000" bIns="40000" anchor="t">
             <a:spAutoFit/>
           </a:bodyPr>
           <a:lstStyle/>
@@ -4660,6 +4608,12 @@
               </a:rPr>
               <a:t>SwiftUI  ·  Core Data  ·  Photos  ·  Weather</a:t>
             </a:r>
+            <a:endParaRPr sz="2200" b="0">
+              <a:solidFill>
+                <a:srgbClr val="FFFFFF"/>
+              </a:solidFill>
+              <a:latin typeface="SF Pro Text"/>
+            </a:endParaRPr>
           </a:p>
         </p:txBody>
       </p:sp>
@@ -4726,7 +4680,7 @@
           <a:noFill/>
         </p:spPr>
         <p:txBody>
-          <a:bodyPr wrap="square" lIns="60000" rIns="60000" tIns="40000" bIns="40000" anchor="t">
+          <a:bodyPr wrap="square" lIns="60000" tIns="40000" rIns="60000" bIns="40000" anchor="t">
             <a:spAutoFit/>
           </a:bodyPr>
           <a:lstStyle/>
@@ -4741,6 +4695,12 @@
               </a:rPr>
               <a:t>AUDIENCE</a:t>
             </a:r>
+            <a:endParaRPr sz="1100" b="1">
+              <a:solidFill>
+                <a:srgbClr val="8E8E93"/>
+              </a:solidFill>
+              <a:latin typeface="SF Pro Text"/>
+            </a:endParaRPr>
           </a:p>
         </p:txBody>
       </p:sp>
@@ -4761,7 +4721,7 @@
           <a:noFill/>
         </p:spPr>
         <p:txBody>
-          <a:bodyPr wrap="square" lIns="60000" rIns="60000" tIns="40000" bIns="40000" anchor="t">
+          <a:bodyPr wrap="square" lIns="60000" tIns="40000" rIns="60000" bIns="40000" anchor="t">
             <a:spAutoFit/>
           </a:bodyPr>
           <a:lstStyle/>
@@ -4776,6 +4736,12 @@
               </a:rPr>
               <a:t>Beginner iOS Developers</a:t>
             </a:r>
+            <a:endParaRPr sz="2000" b="1">
+              <a:solidFill>
+                <a:srgbClr val="1C1C1E"/>
+              </a:solidFill>
+              <a:latin typeface="SF Pro Display"/>
+            </a:endParaRPr>
           </a:p>
         </p:txBody>
       </p:sp>
@@ -4796,7 +4762,7 @@
           <a:noFill/>
         </p:spPr>
         <p:txBody>
-          <a:bodyPr wrap="square" lIns="60000" rIns="60000" tIns="40000" bIns="40000" anchor="t">
+          <a:bodyPr wrap="square" lIns="60000" tIns="40000" rIns="60000" bIns="40000" anchor="t">
             <a:spAutoFit/>
           </a:bodyPr>
           <a:lstStyle/>
@@ -4811,6 +4777,12 @@
               </a:rPr>
               <a:t>JournalEntry · Timeline list · Weather picker · UIKit bridge · Custom search</a:t>
             </a:r>
+            <a:endParaRPr sz="1300" b="0">
+              <a:solidFill>
+                <a:srgbClr val="8E8E93"/>
+              </a:solidFill>
+              <a:latin typeface="SF Pro Text"/>
+            </a:endParaRPr>
           </a:p>
         </p:txBody>
       </p:sp>
@@ -4831,7 +4803,7 @@
           <a:noFill/>
         </p:spPr>
         <p:txBody>
-          <a:bodyPr wrap="square" lIns="60000" rIns="60000" tIns="40000" bIns="40000" anchor="t">
+          <a:bodyPr wrap="square" lIns="60000" tIns="40000" rIns="60000" bIns="40000" anchor="t">
             <a:spAutoFit/>
           </a:bodyPr>
           <a:lstStyle/>
@@ -4846,6 +4818,12 @@
               </a:rPr>
               <a:t>PROJECT 4 — SMART FARMER ASSISTANT</a:t>
             </a:r>
+            <a:endParaRPr sz="1100" b="1">
+              <a:solidFill>
+                <a:srgbClr val="8E8E93"/>
+              </a:solidFill>
+              <a:latin typeface="SF Pro Text"/>
+            </a:endParaRPr>
           </a:p>
         </p:txBody>
       </p:sp>
@@ -4866,7 +4844,7 @@
           <a:noFill/>
         </p:spPr>
         <p:txBody>
-          <a:bodyPr wrap="square" lIns="60000" rIns="60000" tIns="40000" bIns="40000" anchor="t">
+          <a:bodyPr wrap="square" lIns="60000" tIns="40000" rIns="60000" bIns="40000" anchor="t">
             <a:spAutoFit/>
           </a:bodyPr>
           <a:lstStyle/>
@@ -4881,6 +4859,12 @@
               </a:rPr>
               <a:t>Journal Module</a:t>
             </a:r>
+            <a:endParaRPr sz="2000" b="1">
+              <a:solidFill>
+                <a:srgbClr val="1C1C1E"/>
+              </a:solidFill>
+              <a:latin typeface="SF Pro Display"/>
+            </a:endParaRPr>
           </a:p>
         </p:txBody>
       </p:sp>
@@ -4892,8 +4876,8 @@
         </p:nvSpPr>
         <p:spPr>
           <a:xfrm>
-            <a:off x="7132320" y="5440680"/>
-            <a:ext cx="4389120" cy="457200"/>
+            <a:off x="6604000" y="5440680"/>
+            <a:ext cx="4917440" cy="478790"/>
           </a:xfrm>
           <a:prstGeom prst="rect">
             <a:avLst/>
@@ -4901,7 +4885,7 @@
           <a:noFill/>
         </p:spPr>
         <p:txBody>
-          <a:bodyPr wrap="square" lIns="60000" rIns="60000" tIns="40000" bIns="40000" anchor="t">
+          <a:bodyPr wrap="square" lIns="60000" tIns="40000" rIns="60000" bIns="40000" anchor="t">
             <a:spAutoFit/>
           </a:bodyPr>
           <a:lstStyle/>
@@ -4916,6 +4900,12 @@
               </a:rPr>
               <a:t>iOS 13+ — ObservableObject · NavigationView · UIImagePickerController</a:t>
             </a:r>
+            <a:endParaRPr sz="1300" b="0">
+              <a:solidFill>
+                <a:srgbClr val="8E8E93"/>
+              </a:solidFill>
+              <a:latin typeface="SF Pro Text"/>
+            </a:endParaRPr>
           </a:p>
         </p:txBody>
       </p:sp>
@@ -4936,7 +4926,7 @@
           <a:noFill/>
         </p:spPr>
         <p:txBody>
-          <a:bodyPr wrap="square" lIns="60000" rIns="60000" tIns="40000" bIns="40000" anchor="t">
+          <a:bodyPr wrap="square" lIns="60000" tIns="40000" rIns="60000" bIns="40000" anchor="t">
             <a:spAutoFit/>
           </a:bodyPr>
           <a:lstStyle/>
@@ -4951,6 +4941,12 @@
               </a:rPr>
               <a:t>Week 7 · Daily Journal · SmartFarmerAssistant</a:t>
             </a:r>
+            <a:endParaRPr sz="1000" b="0">
+              <a:solidFill>
+                <a:srgbClr val="8E8E93"/>
+              </a:solidFill>
+              <a:latin typeface="SF Pro Text"/>
+            </a:endParaRPr>
           </a:p>
         </p:txBody>
       </p:sp>
@@ -4971,7 +4967,7 @@
           <a:noFill/>
         </p:spPr>
         <p:txBody>
-          <a:bodyPr wrap="square" lIns="60000" rIns="60000" tIns="40000" bIns="40000" anchor="t">
+          <a:bodyPr wrap="square" lIns="60000" tIns="40000" rIns="60000" bIns="40000" anchor="t">
             <a:spAutoFit/>
           </a:bodyPr>
           <a:lstStyle/>
@@ -4986,6 +4982,12 @@
               </a:rPr>
               <a:t>1 / 12</a:t>
             </a:r>
+            <a:endParaRPr sz="1000" b="0">
+              <a:solidFill>
+                <a:srgbClr val="8E8E93"/>
+              </a:solidFill>
+              <a:latin typeface="SF Pro Text"/>
+            </a:endParaRPr>
           </a:p>
         </p:txBody>
       </p:sp>
@@ -5001,7 +5003,7 @@
 </file>
 
 <file path=ppt/slides/slide10.xml><?xml version="1.0" encoding="utf-8"?>
-<p:sld xmlns:a="http://schemas.openxmlformats.org/drawingml/2006/main" xmlns:p="http://schemas.openxmlformats.org/presentationml/2006/main" xmlns:r="http://schemas.openxmlformats.org/officeDocument/2006/relationships">
+<p:sld xmlns:a="http://schemas.openxmlformats.org/drawingml/2006/main" xmlns:r="http://schemas.openxmlformats.org/officeDocument/2006/relationships" xmlns:p="http://schemas.openxmlformats.org/presentationml/2006/main">
   <p:cSld>
     <p:spTree>
       <p:nvGrpSpPr>
@@ -5113,7 +5115,7 @@
           <a:noFill/>
         </p:spPr>
         <p:txBody>
-          <a:bodyPr wrap="square" lIns="60000" rIns="60000" tIns="40000" bIns="40000" anchor="t">
+          <a:bodyPr wrap="square" lIns="60000" tIns="40000" rIns="60000" bIns="40000" anchor="t">
             <a:spAutoFit/>
           </a:bodyPr>
           <a:lstStyle/>
@@ -5128,6 +5130,12 @@
               </a:rPr>
               <a:t>DATA FLOW</a:t>
             </a:r>
+            <a:endParaRPr sz="1200" b="1">
+              <a:solidFill>
+                <a:srgbClr val="0A84FF"/>
+              </a:solidFill>
+              <a:latin typeface="SF Pro Text"/>
+            </a:endParaRPr>
           </a:p>
         </p:txBody>
       </p:sp>
@@ -5148,7 +5156,7 @@
           <a:noFill/>
         </p:spPr>
         <p:txBody>
-          <a:bodyPr wrap="square" lIns="60000" rIns="60000" tIns="40000" bIns="40000" anchor="t">
+          <a:bodyPr wrap="square" lIns="60000" tIns="40000" rIns="60000" bIns="40000" anchor="t">
             <a:spAutoFit/>
           </a:bodyPr>
           <a:lstStyle/>
@@ -5163,6 +5171,12 @@
               </a:rPr>
               <a:t>From '+' tap to re-rendered timeline</a:t>
             </a:r>
+            <a:endParaRPr sz="3000" b="1">
+              <a:solidFill>
+                <a:srgbClr val="1C1C1E"/>
+              </a:solidFill>
+              <a:latin typeface="SF Pro Display"/>
+            </a:endParaRPr>
           </a:p>
         </p:txBody>
       </p:sp>
@@ -5231,7 +5245,7 @@
           <a:noFill/>
         </p:spPr>
         <p:txBody>
-          <a:bodyPr wrap="square" lIns="60000" rIns="60000" tIns="40000" bIns="40000" anchor="t">
+          <a:bodyPr wrap="square" lIns="60000" tIns="40000" rIns="60000" bIns="40000" anchor="t">
             <a:spAutoFit/>
           </a:bodyPr>
           <a:lstStyle/>
@@ -5246,6 +5260,12 @@
               </a:rPr>
               <a:t>User taps +</a:t>
             </a:r>
+            <a:endParaRPr sz="1500" b="1">
+              <a:solidFill>
+                <a:srgbClr val="A052D4"/>
+              </a:solidFill>
+              <a:latin typeface="SF Pro Display"/>
+            </a:endParaRPr>
           </a:p>
         </p:txBody>
       </p:sp>
@@ -5266,7 +5286,7 @@
           <a:noFill/>
         </p:spPr>
         <p:txBody>
-          <a:bodyPr wrap="square" lIns="60000" rIns="60000" tIns="40000" bIns="40000" anchor="t">
+          <a:bodyPr wrap="square" lIns="60000" tIns="40000" rIns="60000" bIns="40000" anchor="t">
             <a:spAutoFit/>
           </a:bodyPr>
           <a:lstStyle/>
@@ -5281,6 +5301,12 @@
               </a:rPr>
               <a:t>Toolbar + button on JournalTabView</a:t>
             </a:r>
+            <a:endParaRPr sz="1200" b="0">
+              <a:solidFill>
+                <a:srgbClr val="1C1C1E"/>
+              </a:solidFill>
+              <a:latin typeface="SF Pro Text"/>
+            </a:endParaRPr>
           </a:p>
         </p:txBody>
       </p:sp>
@@ -5392,7 +5418,7 @@
           <a:noFill/>
         </p:spPr>
         <p:txBody>
-          <a:bodyPr wrap="square" lIns="60000" rIns="60000" tIns="40000" bIns="40000" anchor="t">
+          <a:bodyPr wrap="square" lIns="60000" tIns="40000" rIns="60000" bIns="40000" anchor="t">
             <a:spAutoFit/>
           </a:bodyPr>
           <a:lstStyle/>
@@ -5407,6 +5433,12 @@
               </a:rPr>
               <a:t>AddJournalEntryView</a:t>
             </a:r>
+            <a:endParaRPr sz="1500" b="1">
+              <a:solidFill>
+                <a:srgbClr val="0A84FF"/>
+              </a:solidFill>
+              <a:latin typeface="SF Pro Display"/>
+            </a:endParaRPr>
           </a:p>
         </p:txBody>
       </p:sp>
@@ -5427,7 +5459,7 @@
           <a:noFill/>
         </p:spPr>
         <p:txBody>
-          <a:bodyPr wrap="square" lIns="60000" rIns="60000" tIns="40000" bIns="40000" anchor="t">
+          <a:bodyPr wrap="square" lIns="60000" tIns="40000" rIns="60000" bIns="40000" anchor="t">
             <a:spAutoFit/>
           </a:bodyPr>
           <a:lstStyle/>
@@ -5442,6 +5474,12 @@
               </a:rPr>
               <a:t>Form — title, weather, content, photo</a:t>
             </a:r>
+            <a:endParaRPr sz="1200" b="0">
+              <a:solidFill>
+                <a:srgbClr val="1C1C1E"/>
+              </a:solidFill>
+              <a:latin typeface="SF Pro Text"/>
+            </a:endParaRPr>
           </a:p>
         </p:txBody>
       </p:sp>
@@ -5553,7 +5591,7 @@
           <a:noFill/>
         </p:spPr>
         <p:txBody>
-          <a:bodyPr wrap="square" lIns="60000" rIns="60000" tIns="40000" bIns="40000" anchor="t">
+          <a:bodyPr wrap="square" lIns="60000" tIns="40000" rIns="60000" bIns="40000" anchor="t">
             <a:spAutoFit/>
           </a:bodyPr>
           <a:lstStyle/>
@@ -5568,6 +5606,12 @@
               </a:rPr>
               <a:t>JournalEntry(context:)</a:t>
             </a:r>
+            <a:endParaRPr sz="1500" b="1">
+              <a:solidFill>
+                <a:srgbClr val="0A84FF"/>
+              </a:solidFill>
+              <a:latin typeface="SF Pro Display"/>
+            </a:endParaRPr>
           </a:p>
         </p:txBody>
       </p:sp>
@@ -5588,7 +5632,7 @@
           <a:noFill/>
         </p:spPr>
         <p:txBody>
-          <a:bodyPr wrap="square" lIns="60000" rIns="60000" tIns="40000" bIns="40000" anchor="t">
+          <a:bodyPr wrap="square" lIns="60000" tIns="40000" rIns="60000" bIns="40000" anchor="t">
             <a:spAutoFit/>
           </a:bodyPr>
           <a:lstStyle/>
@@ -5603,6 +5647,12 @@
               </a:rPr>
               <a:t>New NSManagedObject attached to context</a:t>
             </a:r>
+            <a:endParaRPr sz="1200" b="0">
+              <a:solidFill>
+                <a:srgbClr val="1C1C1E"/>
+              </a:solidFill>
+              <a:latin typeface="SF Pro Text"/>
+            </a:endParaRPr>
           </a:p>
         </p:txBody>
       </p:sp>
@@ -5714,7 +5764,7 @@
           <a:noFill/>
         </p:spPr>
         <p:txBody>
-          <a:bodyPr wrap="square" lIns="60000" rIns="60000" tIns="40000" bIns="40000" anchor="t">
+          <a:bodyPr wrap="square" lIns="60000" tIns="40000" rIns="60000" bIns="40000" anchor="t">
             <a:spAutoFit/>
           </a:bodyPr>
           <a:lstStyle/>
@@ -5729,6 +5779,12 @@
               </a:rPr>
               <a:t>context.save()</a:t>
             </a:r>
+            <a:endParaRPr sz="1500" b="1">
+              <a:solidFill>
+                <a:srgbClr val="34C759"/>
+              </a:solidFill>
+              <a:latin typeface="SF Pro Display"/>
+            </a:endParaRPr>
           </a:p>
         </p:txBody>
       </p:sp>
@@ -5749,7 +5805,7 @@
           <a:noFill/>
         </p:spPr>
         <p:txBody>
-          <a:bodyPr wrap="square" lIns="60000" rIns="60000" tIns="40000" bIns="40000" anchor="t">
+          <a:bodyPr wrap="square" lIns="60000" tIns="40000" rIns="60000" bIns="40000" anchor="t">
             <a:spAutoFit/>
           </a:bodyPr>
           <a:lstStyle/>
@@ -5764,6 +5820,12 @@
               </a:rPr>
               <a:t>Commits to SQLite store</a:t>
             </a:r>
+            <a:endParaRPr sz="1200" b="0">
+              <a:solidFill>
+                <a:srgbClr val="1C1C1E"/>
+              </a:solidFill>
+              <a:latin typeface="SF Pro Text"/>
+            </a:endParaRPr>
           </a:p>
         </p:txBody>
       </p:sp>
@@ -5875,7 +5937,7 @@
           <a:noFill/>
         </p:spPr>
         <p:txBody>
-          <a:bodyPr wrap="square" lIns="60000" rIns="60000" tIns="40000" bIns="40000" anchor="t">
+          <a:bodyPr wrap="square" lIns="60000" tIns="40000" rIns="60000" bIns="40000" anchor="t">
             <a:spAutoFit/>
           </a:bodyPr>
           <a:lstStyle/>
@@ -5890,6 +5952,12 @@
               </a:rPr>
               <a:t>@FetchRequest re-renders</a:t>
             </a:r>
+            <a:endParaRPr sz="1500" b="1">
+              <a:solidFill>
+                <a:srgbClr val="34C759"/>
+              </a:solidFill>
+              <a:latin typeface="SF Pro Display"/>
+            </a:endParaRPr>
           </a:p>
         </p:txBody>
       </p:sp>
@@ -5910,7 +5978,7 @@
           <a:noFill/>
         </p:spPr>
         <p:txBody>
-          <a:bodyPr wrap="square" lIns="60000" rIns="60000" tIns="40000" bIns="40000" anchor="t">
+          <a:bodyPr wrap="square" lIns="60000" tIns="40000" rIns="60000" bIns="40000" anchor="t">
             <a:spAutoFit/>
           </a:bodyPr>
           <a:lstStyle/>
@@ -5925,6 +5993,12 @@
               </a:rPr>
               <a:t>Timeline auto-updates — no manual refresh</a:t>
             </a:r>
+            <a:endParaRPr sz="1200" b="0">
+              <a:solidFill>
+                <a:srgbClr val="1C1C1E"/>
+              </a:solidFill>
+              <a:latin typeface="SF Pro Text"/>
+            </a:endParaRPr>
           </a:p>
         </p:txBody>
       </p:sp>
@@ -5945,7 +6019,7 @@
           <a:noFill/>
         </p:spPr>
         <p:txBody>
-          <a:bodyPr wrap="square" lIns="60000" rIns="60000" tIns="40000" bIns="40000" anchor="t">
+          <a:bodyPr wrap="square" lIns="60000" tIns="40000" rIns="60000" bIns="40000" anchor="t">
             <a:spAutoFit/>
           </a:bodyPr>
           <a:lstStyle/>
@@ -5960,6 +6034,12 @@
               </a:rPr>
               <a:t>One save() at step 4 → every view bound to @FetchRequest&lt;JournalEntry&gt; re-renders automatically.</a:t>
             </a:r>
+            <a:endParaRPr sz="1300" b="1">
+              <a:solidFill>
+                <a:srgbClr val="8E8E93"/>
+              </a:solidFill>
+              <a:latin typeface="SF Pro Text"/>
+            </a:endParaRPr>
           </a:p>
         </p:txBody>
       </p:sp>
@@ -5980,7 +6060,7 @@
           <a:noFill/>
         </p:spPr>
         <p:txBody>
-          <a:bodyPr wrap="square" lIns="60000" rIns="60000" tIns="40000" bIns="40000" anchor="t">
+          <a:bodyPr wrap="square" lIns="60000" tIns="40000" rIns="60000" bIns="40000" anchor="t">
             <a:spAutoFit/>
           </a:bodyPr>
           <a:lstStyle/>
@@ -5995,6 +6075,12 @@
               </a:rPr>
               <a:t>Week 7 · Daily Journal · SmartFarmerAssistant</a:t>
             </a:r>
+            <a:endParaRPr sz="1000" b="0">
+              <a:solidFill>
+                <a:srgbClr val="8E8E93"/>
+              </a:solidFill>
+              <a:latin typeface="SF Pro Text"/>
+            </a:endParaRPr>
           </a:p>
         </p:txBody>
       </p:sp>
@@ -6015,7 +6101,7 @@
           <a:noFill/>
         </p:spPr>
         <p:txBody>
-          <a:bodyPr wrap="square" lIns="60000" rIns="60000" tIns="40000" bIns="40000" anchor="t">
+          <a:bodyPr wrap="square" lIns="60000" tIns="40000" rIns="60000" bIns="40000" anchor="t">
             <a:spAutoFit/>
           </a:bodyPr>
           <a:lstStyle/>
@@ -6030,6 +6116,12 @@
               </a:rPr>
               <a:t>10 / 12</a:t>
             </a:r>
+            <a:endParaRPr sz="1000" b="0">
+              <a:solidFill>
+                <a:srgbClr val="8E8E93"/>
+              </a:solidFill>
+              <a:latin typeface="SF Pro Text"/>
+            </a:endParaRPr>
           </a:p>
         </p:txBody>
       </p:sp>
@@ -6045,7 +6137,7 @@
 </file>
 
 <file path=ppt/slides/slide11.xml><?xml version="1.0" encoding="utf-8"?>
-<p:sld xmlns:a="http://schemas.openxmlformats.org/drawingml/2006/main" xmlns:p="http://schemas.openxmlformats.org/presentationml/2006/main" xmlns:r="http://schemas.openxmlformats.org/officeDocument/2006/relationships">
+<p:sld xmlns:a="http://schemas.openxmlformats.org/drawingml/2006/main" xmlns:r="http://schemas.openxmlformats.org/officeDocument/2006/relationships" xmlns:p="http://schemas.openxmlformats.org/presentationml/2006/main">
   <p:cSld>
     <p:spTree>
       <p:nvGrpSpPr>
@@ -6157,7 +6249,7 @@
           <a:noFill/>
         </p:spPr>
         <p:txBody>
-          <a:bodyPr wrap="square" lIns="60000" rIns="60000" tIns="40000" bIns="40000" anchor="t">
+          <a:bodyPr wrap="square" lIns="60000" tIns="40000" rIns="60000" bIns="40000" anchor="t">
             <a:spAutoFit/>
           </a:bodyPr>
           <a:lstStyle/>
@@ -6172,6 +6264,12 @@
               </a:rPr>
               <a:t>CONCEPT</a:t>
             </a:r>
+            <a:endParaRPr sz="1200" b="1">
+              <a:solidFill>
+                <a:srgbClr val="FF9500"/>
+              </a:solidFill>
+              <a:latin typeface="SF Pro Text"/>
+            </a:endParaRPr>
           </a:p>
         </p:txBody>
       </p:sp>
@@ -6192,7 +6290,7 @@
           <a:noFill/>
         </p:spPr>
         <p:txBody>
-          <a:bodyPr wrap="square" lIns="60000" rIns="60000" tIns="40000" bIns="40000" anchor="t">
+          <a:bodyPr wrap="square" lIns="60000" tIns="40000" rIns="60000" bIns="40000" anchor="t">
             <a:spAutoFit/>
           </a:bodyPr>
           <a:lstStyle/>
@@ -6207,6 +6305,12 @@
               </a:rPr>
               <a:t>Offline-first — reframed for a journal</a:t>
             </a:r>
+            <a:endParaRPr sz="3000" b="1">
+              <a:solidFill>
+                <a:srgbClr val="1C1C1E"/>
+              </a:solidFill>
+              <a:latin typeface="SF Pro Display"/>
+            </a:endParaRPr>
           </a:p>
         </p:txBody>
       </p:sp>
@@ -6227,7 +6331,7 @@
           <a:noFill/>
         </p:spPr>
         <p:txBody>
-          <a:bodyPr wrap="square" lIns="60000" rIns="60000" tIns="40000" bIns="40000" anchor="t">
+          <a:bodyPr wrap="square" lIns="60000" tIns="40000" rIns="60000" bIns="40000" anchor="t">
             <a:spAutoFit/>
           </a:bodyPr>
           <a:lstStyle/>
@@ -6242,6 +6346,12 @@
               </a:rPr>
               <a:t>❌ NETWORK-FIRST</a:t>
             </a:r>
+            <a:endParaRPr sz="1200" b="1">
+              <a:solidFill>
+                <a:srgbClr val="D03030"/>
+              </a:solidFill>
+              <a:latin typeface="SF Pro Text"/>
+            </a:endParaRPr>
           </a:p>
         </p:txBody>
       </p:sp>
@@ -6262,7 +6372,7 @@
           <a:noFill/>
         </p:spPr>
         <p:txBody>
-          <a:bodyPr wrap="square" lIns="60000" rIns="60000" tIns="40000" bIns="40000" anchor="t">
+          <a:bodyPr wrap="square" lIns="60000" tIns="40000" rIns="60000" bIns="40000" anchor="t">
             <a:spAutoFit/>
           </a:bodyPr>
           <a:lstStyle/>
@@ -6277,6 +6387,12 @@
               </a:rPr>
               <a:t>✅ OFFLINE-FIRST</a:t>
             </a:r>
+            <a:endParaRPr sz="1200" b="1">
+              <a:solidFill>
+                <a:srgbClr val="34C759"/>
+              </a:solidFill>
+              <a:latin typeface="SF Pro Text"/>
+            </a:endParaRPr>
           </a:p>
         </p:txBody>
       </p:sp>
@@ -6297,7 +6413,7 @@
           <a:noFill/>
         </p:spPr>
         <p:txBody>
-          <a:bodyPr wrap="square" lIns="60000" rIns="60000" tIns="40000" bIns="40000" anchor="t">
+          <a:bodyPr wrap="square" lIns="60000" tIns="40000" rIns="60000" bIns="40000" anchor="t">
             <a:spAutoFit/>
           </a:bodyPr>
           <a:lstStyle/>
@@ -6312,6 +6428,12 @@
               </a:rPr>
               <a:t>First launch</a:t>
             </a:r>
+            <a:endParaRPr sz="1300" b="1">
+              <a:solidFill>
+                <a:srgbClr val="1C1C1E"/>
+              </a:solidFill>
+              <a:latin typeface="SF Pro Text"/>
+            </a:endParaRPr>
           </a:p>
         </p:txBody>
       </p:sp>
@@ -6378,7 +6500,7 @@
           <a:noFill/>
         </p:spPr>
         <p:txBody>
-          <a:bodyPr wrap="square" lIns="60000" rIns="60000" tIns="40000" bIns="40000" anchor="t">
+          <a:bodyPr wrap="square" lIns="60000" tIns="40000" rIns="60000" bIns="40000" anchor="t">
             <a:spAutoFit/>
           </a:bodyPr>
           <a:lstStyle/>
@@ -6393,6 +6515,12 @@
               </a:rPr>
               <a:t>Blocked until cloud sign-in completes</a:t>
             </a:r>
+            <a:endParaRPr sz="1200" b="0">
+              <a:solidFill>
+                <a:srgbClr val="1C1C1E"/>
+              </a:solidFill>
+              <a:latin typeface="SF Pro Text"/>
+            </a:endParaRPr>
           </a:p>
         </p:txBody>
       </p:sp>
@@ -6459,7 +6587,7 @@
           <a:noFill/>
         </p:spPr>
         <p:txBody>
-          <a:bodyPr wrap="square" lIns="60000" rIns="60000" tIns="40000" bIns="40000" anchor="t">
+          <a:bodyPr wrap="square" lIns="60000" tIns="40000" rIns="60000" bIns="40000" anchor="t">
             <a:spAutoFit/>
           </a:bodyPr>
           <a:lstStyle/>
@@ -6474,6 +6602,12 @@
               </a:rPr>
               <a:t>Opens empty, ready for the first entry</a:t>
             </a:r>
+            <a:endParaRPr sz="1200" b="0">
+              <a:solidFill>
+                <a:srgbClr val="1C1C1E"/>
+              </a:solidFill>
+              <a:latin typeface="SF Pro Text"/>
+            </a:endParaRPr>
           </a:p>
         </p:txBody>
       </p:sp>
@@ -6494,7 +6628,7 @@
           <a:noFill/>
         </p:spPr>
         <p:txBody>
-          <a:bodyPr wrap="square" lIns="60000" rIns="60000" tIns="40000" bIns="40000" anchor="t">
+          <a:bodyPr wrap="square" lIns="60000" tIns="40000" rIns="60000" bIns="40000" anchor="t">
             <a:spAutoFit/>
           </a:bodyPr>
           <a:lstStyle/>
@@ -6509,6 +6643,12 @@
               </a:rPr>
               <a:t>Weather</a:t>
             </a:r>
+            <a:endParaRPr sz="1300" b="1">
+              <a:solidFill>
+                <a:srgbClr val="1C1C1E"/>
+              </a:solidFill>
+              <a:latin typeface="SF Pro Text"/>
+            </a:endParaRPr>
           </a:p>
         </p:txBody>
       </p:sp>
@@ -6575,7 +6715,7 @@
           <a:noFill/>
         </p:spPr>
         <p:txBody>
-          <a:bodyPr wrap="square" lIns="60000" rIns="60000" tIns="40000" bIns="40000" anchor="t">
+          <a:bodyPr wrap="square" lIns="60000" tIns="40000" rIns="60000" bIns="40000" anchor="t">
             <a:spAutoFit/>
           </a:bodyPr>
           <a:lstStyle/>
@@ -6590,6 +6730,12 @@
               </a:rPr>
               <a:t>Fetches live forecast from an API</a:t>
             </a:r>
+            <a:endParaRPr sz="1200" b="0">
+              <a:solidFill>
+                <a:srgbClr val="1C1C1E"/>
+              </a:solidFill>
+              <a:latin typeface="SF Pro Text"/>
+            </a:endParaRPr>
           </a:p>
         </p:txBody>
       </p:sp>
@@ -6656,7 +6802,7 @@
           <a:noFill/>
         </p:spPr>
         <p:txBody>
-          <a:bodyPr wrap="square" lIns="60000" rIns="60000" tIns="40000" bIns="40000" anchor="t">
+          <a:bodyPr wrap="square" lIns="60000" tIns="40000" rIns="60000" bIns="40000" anchor="t">
             <a:spAutoFit/>
           </a:bodyPr>
           <a:lstStyle/>
@@ -6671,6 +6817,12 @@
               </a:rPr>
               <a:t>User picks — it's the felt weather</a:t>
             </a:r>
+            <a:endParaRPr sz="1200" b="0">
+              <a:solidFill>
+                <a:srgbClr val="1C1C1E"/>
+              </a:solidFill>
+              <a:latin typeface="SF Pro Text"/>
+            </a:endParaRPr>
           </a:p>
         </p:txBody>
       </p:sp>
@@ -6691,7 +6843,7 @@
           <a:noFill/>
         </p:spPr>
         <p:txBody>
-          <a:bodyPr wrap="square" lIns="60000" rIns="60000" tIns="40000" bIns="40000" anchor="t">
+          <a:bodyPr wrap="square" lIns="60000" tIns="40000" rIns="60000" bIns="40000" anchor="t">
             <a:spAutoFit/>
           </a:bodyPr>
           <a:lstStyle/>
@@ -6706,6 +6858,12 @@
               </a:rPr>
               <a:t>Photos</a:t>
             </a:r>
+            <a:endParaRPr sz="1300" b="1">
+              <a:solidFill>
+                <a:srgbClr val="1C1C1E"/>
+              </a:solidFill>
+              <a:latin typeface="SF Pro Text"/>
+            </a:endParaRPr>
           </a:p>
         </p:txBody>
       </p:sp>
@@ -6772,7 +6930,7 @@
           <a:noFill/>
         </p:spPr>
         <p:txBody>
-          <a:bodyPr wrap="square" lIns="60000" rIns="60000" tIns="40000" bIns="40000" anchor="t">
+          <a:bodyPr wrap="square" lIns="60000" tIns="40000" rIns="60000" bIns="40000" anchor="t">
             <a:spAutoFit/>
           </a:bodyPr>
           <a:lstStyle/>
@@ -6787,6 +6945,12 @@
               </a:rPr>
               <a:t>Upload to cloud, store URL</a:t>
             </a:r>
+            <a:endParaRPr sz="1200" b="0">
+              <a:solidFill>
+                <a:srgbClr val="1C1C1E"/>
+              </a:solidFill>
+              <a:latin typeface="SF Pro Text"/>
+            </a:endParaRPr>
           </a:p>
         </p:txBody>
       </p:sp>
@@ -6853,7 +7017,7 @@
           <a:noFill/>
         </p:spPr>
         <p:txBody>
-          <a:bodyPr wrap="square" lIns="60000" rIns="60000" tIns="40000" bIns="40000" anchor="t">
+          <a:bodyPr wrap="square" lIns="60000" tIns="40000" rIns="60000" bIns="40000" anchor="t">
             <a:spAutoFit/>
           </a:bodyPr>
           <a:lstStyle/>
@@ -6868,6 +7032,12 @@
               </a:rPr>
               <a:t>JPEG Data lives inside the Core Data store</a:t>
             </a:r>
+            <a:endParaRPr sz="1200" b="0">
+              <a:solidFill>
+                <a:srgbClr val="1C1C1E"/>
+              </a:solidFill>
+              <a:latin typeface="SF Pro Text"/>
+            </a:endParaRPr>
           </a:p>
         </p:txBody>
       </p:sp>
@@ -6888,7 +7058,7 @@
           <a:noFill/>
         </p:spPr>
         <p:txBody>
-          <a:bodyPr wrap="square" lIns="60000" rIns="60000" tIns="40000" bIns="40000" anchor="t">
+          <a:bodyPr wrap="square" lIns="60000" tIns="40000" rIns="60000" bIns="40000" anchor="t">
             <a:spAutoFit/>
           </a:bodyPr>
           <a:lstStyle/>
@@ -6903,6 +7073,12 @@
               </a:rPr>
               <a:t>Privacy</a:t>
             </a:r>
+            <a:endParaRPr sz="1300" b="1">
+              <a:solidFill>
+                <a:srgbClr val="1C1C1E"/>
+              </a:solidFill>
+              <a:latin typeface="SF Pro Text"/>
+            </a:endParaRPr>
           </a:p>
         </p:txBody>
       </p:sp>
@@ -6969,7 +7145,7 @@
           <a:noFill/>
         </p:spPr>
         <p:txBody>
-          <a:bodyPr wrap="square" lIns="60000" rIns="60000" tIns="40000" bIns="40000" anchor="t">
+          <a:bodyPr wrap="square" lIns="60000" tIns="40000" rIns="60000" bIns="40000" anchor="t">
             <a:spAutoFit/>
           </a:bodyPr>
           <a:lstStyle/>
@@ -6984,6 +7160,12 @@
               </a:rPr>
               <a:t>Every entry leaks to a server</a:t>
             </a:r>
+            <a:endParaRPr sz="1200" b="0">
+              <a:solidFill>
+                <a:srgbClr val="1C1C1E"/>
+              </a:solidFill>
+              <a:latin typeface="SF Pro Text"/>
+            </a:endParaRPr>
           </a:p>
         </p:txBody>
       </p:sp>
@@ -7050,7 +7232,7 @@
           <a:noFill/>
         </p:spPr>
         <p:txBody>
-          <a:bodyPr wrap="square" lIns="60000" rIns="60000" tIns="40000" bIns="40000" anchor="t">
+          <a:bodyPr wrap="square" lIns="60000" tIns="40000" rIns="60000" bIns="40000" anchor="t">
             <a:spAutoFit/>
           </a:bodyPr>
           <a:lstStyle/>
@@ -7065,6 +7247,12 @@
               </a:rPr>
               <a:t>Entries never touch the network</a:t>
             </a:r>
+            <a:endParaRPr sz="1200" b="0">
+              <a:solidFill>
+                <a:srgbClr val="1C1C1E"/>
+              </a:solidFill>
+              <a:latin typeface="SF Pro Text"/>
+            </a:endParaRPr>
           </a:p>
         </p:txBody>
       </p:sp>
@@ -7131,7 +7319,7 @@
           <a:noFill/>
         </p:spPr>
         <p:txBody>
-          <a:bodyPr wrap="square" lIns="60000" rIns="60000" tIns="40000" bIns="40000" anchor="t">
+          <a:bodyPr wrap="square" lIns="60000" tIns="40000" rIns="60000" bIns="40000" anchor="t">
             <a:spAutoFit/>
           </a:bodyPr>
           <a:lstStyle/>
@@ -7146,6 +7334,12 @@
               </a:rPr>
               <a:t>Rule of thumb: a journal's weather is the *felt* weather, not the meteorological truth — user-picked beats API-fetched.</a:t>
             </a:r>
+            <a:endParaRPr sz="1300" b="1">
+              <a:solidFill>
+                <a:srgbClr val="FF9500"/>
+              </a:solidFill>
+              <a:latin typeface="SF Pro Text"/>
+            </a:endParaRPr>
           </a:p>
         </p:txBody>
       </p:sp>
@@ -7166,7 +7360,7 @@
           <a:noFill/>
         </p:spPr>
         <p:txBody>
-          <a:bodyPr wrap="square" lIns="60000" rIns="60000" tIns="40000" bIns="40000" anchor="t">
+          <a:bodyPr wrap="square" lIns="60000" tIns="40000" rIns="60000" bIns="40000" anchor="t">
             <a:spAutoFit/>
           </a:bodyPr>
           <a:lstStyle/>
@@ -7181,6 +7375,12 @@
               </a:rPr>
               <a:t>Week 7 · Daily Journal · SmartFarmerAssistant</a:t>
             </a:r>
+            <a:endParaRPr sz="1000" b="0">
+              <a:solidFill>
+                <a:srgbClr val="8E8E93"/>
+              </a:solidFill>
+              <a:latin typeface="SF Pro Text"/>
+            </a:endParaRPr>
           </a:p>
         </p:txBody>
       </p:sp>
@@ -7201,7 +7401,7 @@
           <a:noFill/>
         </p:spPr>
         <p:txBody>
-          <a:bodyPr wrap="square" lIns="60000" rIns="60000" tIns="40000" bIns="40000" anchor="t">
+          <a:bodyPr wrap="square" lIns="60000" tIns="40000" rIns="60000" bIns="40000" anchor="t">
             <a:spAutoFit/>
           </a:bodyPr>
           <a:lstStyle/>
@@ -7216,6 +7416,12 @@
               </a:rPr>
               <a:t>11 / 12</a:t>
             </a:r>
+            <a:endParaRPr sz="1000" b="0">
+              <a:solidFill>
+                <a:srgbClr val="8E8E93"/>
+              </a:solidFill>
+              <a:latin typeface="SF Pro Text"/>
+            </a:endParaRPr>
           </a:p>
         </p:txBody>
       </p:sp>
@@ -7231,7 +7437,7 @@
 </file>
 
 <file path=ppt/slides/slide12.xml><?xml version="1.0" encoding="utf-8"?>
-<p:sld xmlns:a="http://schemas.openxmlformats.org/drawingml/2006/main" xmlns:p="http://schemas.openxmlformats.org/presentationml/2006/main" xmlns:r="http://schemas.openxmlformats.org/officeDocument/2006/relationships">
+<p:sld xmlns:a="http://schemas.openxmlformats.org/drawingml/2006/main" xmlns:r="http://schemas.openxmlformats.org/officeDocument/2006/relationships" xmlns:p="http://schemas.openxmlformats.org/presentationml/2006/main">
   <p:cSld>
     <p:spTree>
       <p:nvGrpSpPr>
@@ -7364,7 +7570,7 @@
           </a:fontRef>
         </p:style>
         <p:txBody>
-          <a:bodyPr rtlCol="0" anchor="ctr" lIns="40000" rIns="40000" tIns="20000" bIns="20000"/>
+          <a:bodyPr lIns="40000" tIns="20000" rIns="40000" bIns="20000" rtlCol="0" anchor="ctr"/>
           <a:lstStyle/>
           <a:p>
             <a:pPr algn="ctr"/>
@@ -7377,6 +7583,12 @@
               </a:rPr>
               <a:t>WEEK 7 · WRAP</a:t>
             </a:r>
+            <a:endParaRPr sz="1100" b="1">
+              <a:solidFill>
+                <a:srgbClr val="A052D4"/>
+              </a:solidFill>
+              <a:latin typeface="SF Pro Text"/>
+            </a:endParaRPr>
           </a:p>
         </p:txBody>
       </p:sp>
@@ -7397,7 +7609,7 @@
           <a:noFill/>
         </p:spPr>
         <p:txBody>
-          <a:bodyPr wrap="square" lIns="60000" rIns="60000" tIns="40000" bIns="40000" anchor="t">
+          <a:bodyPr wrap="square" lIns="60000" tIns="40000" rIns="60000" bIns="40000" anchor="t">
             <a:spAutoFit/>
           </a:bodyPr>
           <a:lstStyle/>
@@ -7412,6 +7624,12 @@
               </a:rPr>
               <a:t>You built a digital notebook.</a:t>
             </a:r>
+            <a:endParaRPr sz="3800" b="1">
+              <a:solidFill>
+                <a:srgbClr val="FFFFFF"/>
+              </a:solidFill>
+              <a:latin typeface="SF Pro Display"/>
+            </a:endParaRPr>
           </a:p>
         </p:txBody>
       </p:sp>
@@ -7432,7 +7650,7 @@
           <a:noFill/>
         </p:spPr>
         <p:txBody>
-          <a:bodyPr wrap="square" lIns="60000" rIns="60000" tIns="40000" bIns="40000" anchor="t">
+          <a:bodyPr wrap="square" lIns="60000" tIns="40000" rIns="60000" bIns="40000" anchor="t">
             <a:spAutoFit/>
           </a:bodyPr>
           <a:lstStyle/>
@@ -7447,6 +7665,12 @@
               </a:rPr>
               <a:t>JournalEntry · Timeline list · Weather picker · UIKit bridge · Custom search</a:t>
             </a:r>
+            <a:endParaRPr sz="1800" b="0">
+              <a:solidFill>
+                <a:srgbClr val="FFFFFF"/>
+              </a:solidFill>
+              <a:latin typeface="SF Pro Text"/>
+            </a:endParaRPr>
           </a:p>
         </p:txBody>
       </p:sp>
@@ -7513,7 +7737,7 @@
           <a:noFill/>
         </p:spPr>
         <p:txBody>
-          <a:bodyPr wrap="square" lIns="60000" rIns="60000" tIns="40000" bIns="40000" anchor="t">
+          <a:bodyPr wrap="square" lIns="60000" tIns="40000" rIns="60000" bIns="40000" anchor="t">
             <a:spAutoFit/>
           </a:bodyPr>
           <a:lstStyle/>
@@ -7528,6 +7752,12 @@
               </a:rPr>
               <a:t>WHAT YOU SHIPPED</a:t>
             </a:r>
+            <a:endParaRPr sz="1200" b="1">
+              <a:solidFill>
+                <a:srgbClr val="34C759"/>
+              </a:solidFill>
+              <a:latin typeface="SF Pro Text"/>
+            </a:endParaRPr>
           </a:p>
         </p:txBody>
       </p:sp>
@@ -7548,7 +7778,7 @@
           <a:noFill/>
         </p:spPr>
         <p:txBody>
-          <a:bodyPr wrap="square" lIns="60000" rIns="60000" tIns="40000" bIns="40000" anchor="t">
+          <a:bodyPr wrap="square" lIns="60000" tIns="40000" rIns="60000" bIns="40000" anchor="t">
             <a:spAutoFit/>
           </a:bodyPr>
           <a:lstStyle/>
@@ -7563,6 +7793,12 @@
               </a:rPr>
               <a:t>•  JournalEntry Core Data entity with 7 attributes</a:t>
             </a:r>
+            <a:endParaRPr sz="1300" b="0">
+              <a:solidFill>
+                <a:srgbClr val="1C1C1E"/>
+              </a:solidFill>
+              <a:latin typeface="SF Pro Text"/>
+            </a:endParaRPr>
           </a:p>
         </p:txBody>
       </p:sp>
@@ -7583,7 +7819,7 @@
           <a:noFill/>
         </p:spPr>
         <p:txBody>
-          <a:bodyPr wrap="square" lIns="60000" rIns="60000" tIns="40000" bIns="40000" anchor="t">
+          <a:bodyPr wrap="square" lIns="60000" tIns="40000" rIns="60000" bIns="40000" anchor="t">
             <a:spAutoFit/>
           </a:bodyPr>
           <a:lstStyle/>
@@ -7598,6 +7834,12 @@
               </a:rPr>
               <a:t>•  JournalViewModel — search + weather filter + day grouping</a:t>
             </a:r>
+            <a:endParaRPr sz="1300" b="0">
+              <a:solidFill>
+                <a:srgbClr val="1C1C1E"/>
+              </a:solidFill>
+              <a:latin typeface="SF Pro Text"/>
+            </a:endParaRPr>
           </a:p>
         </p:txBody>
       </p:sp>
@@ -7618,7 +7860,7 @@
           <a:noFill/>
         </p:spPr>
         <p:txBody>
-          <a:bodyPr wrap="square" lIns="60000" rIns="60000" tIns="40000" bIns="40000" anchor="t">
+          <a:bodyPr wrap="square" lIns="60000" tIns="40000" rIns="60000" bIns="40000" anchor="t">
             <a:spAutoFit/>
           </a:bodyPr>
           <a:lstStyle/>
@@ -7633,6 +7875,12 @@
               </a:rPr>
               <a:t>•  JournalTabView — timeline list grouped by day</a:t>
             </a:r>
+            <a:endParaRPr sz="1300" b="0">
+              <a:solidFill>
+                <a:srgbClr val="1C1C1E"/>
+              </a:solidFill>
+              <a:latin typeface="SF Pro Text"/>
+            </a:endParaRPr>
           </a:p>
         </p:txBody>
       </p:sp>
@@ -7653,7 +7901,7 @@
           <a:noFill/>
         </p:spPr>
         <p:txBody>
-          <a:bodyPr wrap="square" lIns="60000" rIns="60000" tIns="40000" bIns="40000" anchor="t">
+          <a:bodyPr wrap="square" lIns="60000" tIns="40000" rIns="60000" bIns="40000" anchor="t">
             <a:spAutoFit/>
           </a:bodyPr>
           <a:lstStyle/>
@@ -7668,6 +7916,12 @@
               </a:rPr>
               <a:t>•  Weather enum + WeatherPickerView (4 options)</a:t>
             </a:r>
+            <a:endParaRPr sz="1300" b="0">
+              <a:solidFill>
+                <a:srgbClr val="1C1C1E"/>
+              </a:solidFill>
+              <a:latin typeface="SF Pro Text"/>
+            </a:endParaRPr>
           </a:p>
         </p:txBody>
       </p:sp>
@@ -7688,7 +7942,7 @@
           <a:noFill/>
         </p:spPr>
         <p:txBody>
-          <a:bodyPr wrap="square" lIns="60000" rIns="60000" tIns="40000" bIns="40000" anchor="t">
+          <a:bodyPr wrap="square" lIns="60000" tIns="40000" rIns="60000" bIns="40000" anchor="t">
             <a:spAutoFit/>
           </a:bodyPr>
           <a:lstStyle/>
@@ -7703,6 +7957,12 @@
               </a:rPr>
               <a:t>•  PhotoPicker — UIViewControllerRepresentable bridge</a:t>
             </a:r>
+            <a:endParaRPr sz="1300" b="0">
+              <a:solidFill>
+                <a:srgbClr val="1C1C1E"/>
+              </a:solidFill>
+              <a:latin typeface="SF Pro Text"/>
+            </a:endParaRPr>
           </a:p>
         </p:txBody>
       </p:sp>
@@ -7723,7 +7983,7 @@
           <a:noFill/>
         </p:spPr>
         <p:txBody>
-          <a:bodyPr wrap="square" lIns="60000" rIns="60000" tIns="40000" bIns="40000" anchor="t">
+          <a:bodyPr wrap="square" lIns="60000" tIns="40000" rIns="60000" bIns="40000" anchor="t">
             <a:spAutoFit/>
           </a:bodyPr>
           <a:lstStyle/>
@@ -7738,6 +7998,12 @@
               </a:rPr>
               <a:t>•  AddJournalEntryView &amp; EditJournalEntryView sheets</a:t>
             </a:r>
+            <a:endParaRPr sz="1300" b="0">
+              <a:solidFill>
+                <a:srgbClr val="1C1C1E"/>
+              </a:solidFill>
+              <a:latin typeface="SF Pro Text"/>
+            </a:endParaRPr>
           </a:p>
         </p:txBody>
       </p:sp>
@@ -7804,7 +8070,7 @@
           <a:noFill/>
         </p:spPr>
         <p:txBody>
-          <a:bodyPr wrap="square" lIns="60000" rIns="60000" tIns="40000" bIns="40000" anchor="t">
+          <a:bodyPr wrap="square" lIns="60000" tIns="40000" rIns="60000" bIns="40000" anchor="t">
             <a:spAutoFit/>
           </a:bodyPr>
           <a:lstStyle/>
@@ -7819,6 +8085,12 @@
               </a:rPr>
               <a:t>QUESTIONS TO DRIVE DISCUSSION</a:t>
             </a:r>
+            <a:endParaRPr sz="1200" b="1">
+              <a:solidFill>
+                <a:srgbClr val="0A84FF"/>
+              </a:solidFill>
+              <a:latin typeface="SF Pro Text"/>
+            </a:endParaRPr>
           </a:p>
         </p:txBody>
       </p:sp>
@@ -7839,7 +8111,7 @@
           <a:noFill/>
         </p:spPr>
         <p:txBody>
-          <a:bodyPr wrap="square" lIns="60000" rIns="60000" tIns="40000" bIns="40000" anchor="t">
+          <a:bodyPr wrap="square" lIns="60000" tIns="40000" rIns="60000" bIns="40000" anchor="t">
             <a:spAutoFit/>
           </a:bodyPr>
           <a:lstStyle/>
@@ -7854,6 +8126,12 @@
               </a:rPr>
               <a:t>?  Why store Weather as a String instead of the raw enum?</a:t>
             </a:r>
+            <a:endParaRPr sz="1300" b="0">
+              <a:solidFill>
+                <a:srgbClr val="1C1C1E"/>
+              </a:solidFill>
+              <a:latin typeface="SF Pro Text"/>
+            </a:endParaRPr>
           </a:p>
         </p:txBody>
       </p:sp>
@@ -7874,7 +8152,7 @@
           <a:noFill/>
         </p:spPr>
         <p:txBody>
-          <a:bodyPr wrap="square" lIns="60000" rIns="60000" tIns="40000" bIns="40000" anchor="t">
+          <a:bodyPr wrap="square" lIns="60000" tIns="40000" rIns="60000" bIns="40000" anchor="t">
             <a:spAutoFit/>
           </a:bodyPr>
           <a:lstStyle/>
@@ -7889,6 +8167,12 @@
               </a:rPr>
               <a:t>?  What breaks if we forget Codegen = Manual/None?</a:t>
             </a:r>
+            <a:endParaRPr sz="1300" b="0">
+              <a:solidFill>
+                <a:srgbClr val="1C1C1E"/>
+              </a:solidFill>
+              <a:latin typeface="SF Pro Text"/>
+            </a:endParaRPr>
           </a:p>
         </p:txBody>
       </p:sp>
@@ -7909,7 +8193,7 @@
           <a:noFill/>
         </p:spPr>
         <p:txBody>
-          <a:bodyPr wrap="square" lIns="60000" rIns="60000" tIns="40000" bIns="40000" anchor="t">
+          <a:bodyPr wrap="square" lIns="60000" tIns="40000" rIns="60000" bIns="40000" anchor="t">
             <a:spAutoFit/>
           </a:bodyPr>
           <a:lstStyle/>
@@ -7924,6 +8208,12 @@
               </a:rPr>
               <a:t>?  Why JPEG-encode photos before saving?</a:t>
             </a:r>
+            <a:endParaRPr sz="1300" b="0">
+              <a:solidFill>
+                <a:srgbClr val="1C1C1E"/>
+              </a:solidFill>
+              <a:latin typeface="SF Pro Text"/>
+            </a:endParaRPr>
           </a:p>
         </p:txBody>
       </p:sp>
@@ -7944,7 +8234,7 @@
           <a:noFill/>
         </p:spPr>
         <p:txBody>
-          <a:bodyPr wrap="square" lIns="60000" rIns="60000" tIns="40000" bIns="40000" anchor="t">
+          <a:bodyPr wrap="square" lIns="60000" tIns="40000" rIns="60000" bIns="40000" anchor="t">
             <a:spAutoFit/>
           </a:bodyPr>
           <a:lstStyle/>
@@ -7959,6 +8249,12 @@
               </a:rPr>
               <a:t>?  Why filter in Swift instead of via NSPredicate?</a:t>
             </a:r>
+            <a:endParaRPr sz="1300" b="0">
+              <a:solidFill>
+                <a:srgbClr val="1C1C1E"/>
+              </a:solidFill>
+              <a:latin typeface="SF Pro Text"/>
+            </a:endParaRPr>
           </a:p>
         </p:txBody>
       </p:sp>
@@ -7979,7 +8275,7 @@
           <a:noFill/>
         </p:spPr>
         <p:txBody>
-          <a:bodyPr wrap="square" lIns="60000" rIns="60000" tIns="40000" bIns="40000" anchor="t">
+          <a:bodyPr wrap="square" lIns="60000" tIns="40000" rIns="60000" bIns="40000" anchor="t">
             <a:spAutoFit/>
           </a:bodyPr>
           <a:lstStyle/>
@@ -7994,6 +8290,12 @@
               </a:rPr>
               <a:t>?  What single change would make this network-first?</a:t>
             </a:r>
+            <a:endParaRPr sz="1300" b="0">
+              <a:solidFill>
+                <a:srgbClr val="1C1C1E"/>
+              </a:solidFill>
+              <a:latin typeface="SF Pro Text"/>
+            </a:endParaRPr>
           </a:p>
         </p:txBody>
       </p:sp>
@@ -8014,7 +8316,7 @@
           <a:noFill/>
         </p:spPr>
         <p:txBody>
-          <a:bodyPr wrap="square" lIns="60000" rIns="60000" tIns="40000" bIns="40000" anchor="t">
+          <a:bodyPr wrap="square" lIns="60000" tIns="40000" rIns="60000" bIns="40000" anchor="t">
             <a:spAutoFit/>
           </a:bodyPr>
           <a:lstStyle/>
@@ -8029,6 +8331,12 @@
               </a:rPr>
               <a:t>NEXT WEEK →  Water Tracker (Week 8)</a:t>
             </a:r>
+            <a:endParaRPr sz="1200" b="1">
+              <a:solidFill>
+                <a:srgbClr val="0A84FF"/>
+              </a:solidFill>
+              <a:latin typeface="SF Pro Text"/>
+            </a:endParaRPr>
           </a:p>
         </p:txBody>
       </p:sp>
@@ -8049,7 +8357,7 @@
           <a:noFill/>
         </p:spPr>
         <p:txBody>
-          <a:bodyPr wrap="square" lIns="60000" rIns="60000" tIns="40000" bIns="40000" anchor="t">
+          <a:bodyPr wrap="square" lIns="60000" tIns="40000" rIns="60000" bIns="40000" anchor="t">
             <a:spAutoFit/>
           </a:bodyPr>
           <a:lstStyle/>
@@ -8064,6 +8372,12 @@
               </a:rPr>
               <a:t>Week 7 · Daily Journal · SmartFarmerAssistant</a:t>
             </a:r>
+            <a:endParaRPr sz="1000" b="0">
+              <a:solidFill>
+                <a:srgbClr val="8E8E93"/>
+              </a:solidFill>
+              <a:latin typeface="SF Pro Text"/>
+            </a:endParaRPr>
           </a:p>
         </p:txBody>
       </p:sp>
@@ -8084,7 +8398,7 @@
           <a:noFill/>
         </p:spPr>
         <p:txBody>
-          <a:bodyPr wrap="square" lIns="60000" rIns="60000" tIns="40000" bIns="40000" anchor="t">
+          <a:bodyPr wrap="square" lIns="60000" tIns="40000" rIns="60000" bIns="40000" anchor="t">
             <a:spAutoFit/>
           </a:bodyPr>
           <a:lstStyle/>
@@ -8099,6 +8413,12 @@
               </a:rPr>
               <a:t>12 / 12</a:t>
             </a:r>
+            <a:endParaRPr sz="1000" b="0">
+              <a:solidFill>
+                <a:srgbClr val="8E8E93"/>
+              </a:solidFill>
+              <a:latin typeface="SF Pro Text"/>
+            </a:endParaRPr>
           </a:p>
         </p:txBody>
       </p:sp>
@@ -8114,7 +8434,7 @@
 </file>
 
 <file path=ppt/slides/slide2.xml><?xml version="1.0" encoding="utf-8"?>
-<p:sld xmlns:a="http://schemas.openxmlformats.org/drawingml/2006/main" xmlns:p="http://schemas.openxmlformats.org/presentationml/2006/main" xmlns:r="http://schemas.openxmlformats.org/officeDocument/2006/relationships">
+<p:sld xmlns:a="http://schemas.openxmlformats.org/drawingml/2006/main" xmlns:r="http://schemas.openxmlformats.org/officeDocument/2006/relationships" xmlns:p="http://schemas.openxmlformats.org/presentationml/2006/main">
   <p:cSld>
     <p:spTree>
       <p:nvGrpSpPr>
@@ -8226,7 +8546,7 @@
           <a:noFill/>
         </p:spPr>
         <p:txBody>
-          <a:bodyPr wrap="square" lIns="60000" rIns="60000" tIns="40000" bIns="40000" anchor="t">
+          <a:bodyPr wrap="square" lIns="60000" tIns="40000" rIns="60000" bIns="40000" anchor="t">
             <a:spAutoFit/>
           </a:bodyPr>
           <a:lstStyle/>
@@ -8241,6 +8561,12 @@
               </a:rPr>
               <a:t>AGENDA</a:t>
             </a:r>
+            <a:endParaRPr sz="1200" b="1">
+              <a:solidFill>
+                <a:srgbClr val="A052D4"/>
+              </a:solidFill>
+              <a:latin typeface="SF Pro Text"/>
+            </a:endParaRPr>
           </a:p>
         </p:txBody>
       </p:sp>
@@ -8261,7 +8587,7 @@
           <a:noFill/>
         </p:spPr>
         <p:txBody>
-          <a:bodyPr wrap="square" lIns="60000" rIns="60000" tIns="40000" bIns="40000" anchor="t">
+          <a:bodyPr wrap="square" lIns="60000" tIns="40000" rIns="60000" bIns="40000" anchor="t">
             <a:spAutoFit/>
           </a:bodyPr>
           <a:lstStyle/>
@@ -8276,6 +8602,12 @@
               </a:rPr>
               <a:t>What you'll build this week</a:t>
             </a:r>
+            <a:endParaRPr sz="3000" b="1">
+              <a:solidFill>
+                <a:srgbClr val="1C1C1E"/>
+              </a:solidFill>
+              <a:latin typeface="SF Pro Display"/>
+            </a:endParaRPr>
           </a:p>
         </p:txBody>
       </p:sp>
@@ -8296,7 +8628,7 @@
           <a:noFill/>
         </p:spPr>
         <p:txBody>
-          <a:bodyPr wrap="square" lIns="60000" rIns="60000" tIns="40000" bIns="40000" anchor="t">
+          <a:bodyPr wrap="square" lIns="60000" tIns="40000" rIns="60000" bIns="40000" anchor="t">
             <a:spAutoFit/>
           </a:bodyPr>
           <a:lstStyle/>
@@ -8311,6 +8643,12 @@
               </a:rPr>
               <a:t>LEARNING OBJECTIVES</a:t>
             </a:r>
+            <a:endParaRPr sz="1200" b="1">
+              <a:solidFill>
+                <a:srgbClr val="A052D4"/>
+              </a:solidFill>
+              <a:latin typeface="SF Pro Text"/>
+            </a:endParaRPr>
           </a:p>
         </p:txBody>
       </p:sp>
@@ -8331,7 +8669,7 @@
           <a:noFill/>
         </p:spPr>
         <p:txBody>
-          <a:bodyPr wrap="square" lIns="80000" rIns="60000" tIns="40000">
+          <a:bodyPr wrap="square" lIns="80000" tIns="40000" rIns="60000">
             <a:spAutoFit/>
           </a:bodyPr>
           <a:lstStyle/>
@@ -8350,6 +8688,12 @@
               </a:rPr>
               <a:t>•  Model a JournalEntry entity in Core Data (date, content, weather, photos)</a:t>
             </a:r>
+            <a:endParaRPr sz="1700">
+              <a:solidFill>
+                <a:srgbClr val="1C1C1E"/>
+              </a:solidFill>
+              <a:latin typeface="SF Pro Text"/>
+            </a:endParaRPr>
           </a:p>
           <a:p>
             <a:pPr algn="l">
@@ -8366,6 +8710,12 @@
               </a:rPr>
               <a:t>•  Build a reverse-chronological timeline UI grouped by day</a:t>
             </a:r>
+            <a:endParaRPr sz="1700">
+              <a:solidFill>
+                <a:srgbClr val="1C1C1E"/>
+              </a:solidFill>
+              <a:latin typeface="SF Pro Text"/>
+            </a:endParaRPr>
           </a:p>
           <a:p>
             <a:pPr algn="l">
@@ -8382,6 +8732,12 @@
               </a:rPr>
               <a:t>•  Add a 4-option weather picker with SF Symbols</a:t>
             </a:r>
+            <a:endParaRPr sz="1700">
+              <a:solidFill>
+                <a:srgbClr val="1C1C1E"/>
+              </a:solidFill>
+              <a:latin typeface="SF Pro Text"/>
+            </a:endParaRPr>
           </a:p>
           <a:p>
             <a:pPr algn="l">
@@ -8398,6 +8754,12 @@
               </a:rPr>
               <a:t>•  Bridge UIImagePickerController via UIViewControllerRepresentable</a:t>
             </a:r>
+            <a:endParaRPr sz="1700">
+              <a:solidFill>
+                <a:srgbClr val="1C1C1E"/>
+              </a:solidFill>
+              <a:latin typeface="SF Pro Text"/>
+            </a:endParaRPr>
           </a:p>
           <a:p>
             <a:pPr algn="l">
@@ -8414,6 +8776,12 @@
               </a:rPr>
               <a:t>•  Combine a custom SearchBar with a weather filter chip row (no .searchable)</a:t>
             </a:r>
+            <a:endParaRPr sz="1700">
+              <a:solidFill>
+                <a:srgbClr val="1C1C1E"/>
+              </a:solidFill>
+              <a:latin typeface="SF Pro Text"/>
+            </a:endParaRPr>
           </a:p>
         </p:txBody>
       </p:sp>
@@ -8512,6 +8880,12 @@
               </a:rPr>
               <a:t>7.1</a:t>
             </a:r>
+            <a:endParaRPr sz="1300" b="1">
+              <a:solidFill>
+                <a:srgbClr val="FFFFFF"/>
+              </a:solidFill>
+              <a:latin typeface="SF Pro Display"/>
+            </a:endParaRPr>
           </a:p>
         </p:txBody>
       </p:sp>
@@ -8532,7 +8906,7 @@
           <a:noFill/>
         </p:spPr>
         <p:txBody>
-          <a:bodyPr wrap="square" lIns="60000" rIns="60000" tIns="40000" bIns="40000" anchor="t">
+          <a:bodyPr wrap="square" lIns="60000" tIns="40000" rIns="60000" bIns="40000" anchor="t">
             <a:spAutoFit/>
           </a:bodyPr>
           <a:lstStyle/>
@@ -8547,6 +8921,12 @@
               </a:rPr>
               <a:t>JournalEntry Core Data Entity</a:t>
             </a:r>
+            <a:endParaRPr sz="1600" b="1">
+              <a:solidFill>
+                <a:srgbClr val="1C1C1E"/>
+              </a:solidFill>
+              <a:latin typeface="SF Pro Display"/>
+            </a:endParaRPr>
           </a:p>
         </p:txBody>
       </p:sp>
@@ -8645,6 +9025,12 @@
               </a:rPr>
               <a:t>7.2</a:t>
             </a:r>
+            <a:endParaRPr sz="1300" b="1">
+              <a:solidFill>
+                <a:srgbClr val="FFFFFF"/>
+              </a:solidFill>
+              <a:latin typeface="SF Pro Display"/>
+            </a:endParaRPr>
           </a:p>
         </p:txBody>
       </p:sp>
@@ -8665,7 +9051,7 @@
           <a:noFill/>
         </p:spPr>
         <p:txBody>
-          <a:bodyPr wrap="square" lIns="60000" rIns="60000" tIns="40000" bIns="40000" anchor="t">
+          <a:bodyPr wrap="square" lIns="60000" tIns="40000" rIns="60000" bIns="40000" anchor="t">
             <a:spAutoFit/>
           </a:bodyPr>
           <a:lstStyle/>
@@ -8680,6 +9066,12 @@
               </a:rPr>
               <a:t>Timeline list (newest first)</a:t>
             </a:r>
+            <a:endParaRPr sz="1600" b="1">
+              <a:solidFill>
+                <a:srgbClr val="1C1C1E"/>
+              </a:solidFill>
+              <a:latin typeface="SF Pro Display"/>
+            </a:endParaRPr>
           </a:p>
         </p:txBody>
       </p:sp>
@@ -8778,6 +9170,12 @@
               </a:rPr>
               <a:t>7.3</a:t>
             </a:r>
+            <a:endParaRPr sz="1300" b="1">
+              <a:solidFill>
+                <a:srgbClr val="FFFFFF"/>
+              </a:solidFill>
+              <a:latin typeface="SF Pro Display"/>
+            </a:endParaRPr>
           </a:p>
         </p:txBody>
       </p:sp>
@@ -8798,7 +9196,7 @@
           <a:noFill/>
         </p:spPr>
         <p:txBody>
-          <a:bodyPr wrap="square" lIns="60000" rIns="60000" tIns="40000" bIns="40000" anchor="t">
+          <a:bodyPr wrap="square" lIns="60000" tIns="40000" rIns="60000" bIns="40000" anchor="t">
             <a:spAutoFit/>
           </a:bodyPr>
           <a:lstStyle/>
@@ -8813,6 +9211,12 @@
               </a:rPr>
               <a:t>Weather selection UI</a:t>
             </a:r>
+            <a:endParaRPr sz="1600" b="1">
+              <a:solidFill>
+                <a:srgbClr val="1C1C1E"/>
+              </a:solidFill>
+              <a:latin typeface="SF Pro Display"/>
+            </a:endParaRPr>
           </a:p>
         </p:txBody>
       </p:sp>
@@ -8911,6 +9315,12 @@
               </a:rPr>
               <a:t>7.4</a:t>
             </a:r>
+            <a:endParaRPr sz="1300" b="1">
+              <a:solidFill>
+                <a:srgbClr val="FFFFFF"/>
+              </a:solidFill>
+              <a:latin typeface="SF Pro Display"/>
+            </a:endParaRPr>
           </a:p>
         </p:txBody>
       </p:sp>
@@ -8931,7 +9341,7 @@
           <a:noFill/>
         </p:spPr>
         <p:txBody>
-          <a:bodyPr wrap="square" lIns="60000" rIns="60000" tIns="40000" bIns="40000" anchor="t">
+          <a:bodyPr wrap="square" lIns="60000" tIns="40000" rIns="60000" bIns="40000" anchor="t">
             <a:spAutoFit/>
           </a:bodyPr>
           <a:lstStyle/>
@@ -8946,6 +9356,12 @@
               </a:rPr>
               <a:t>Photo picker — UIKit bridge</a:t>
             </a:r>
+            <a:endParaRPr sz="1600" b="1">
+              <a:solidFill>
+                <a:srgbClr val="1C1C1E"/>
+              </a:solidFill>
+              <a:latin typeface="SF Pro Display"/>
+            </a:endParaRPr>
           </a:p>
         </p:txBody>
       </p:sp>
@@ -9044,6 +9460,12 @@
               </a:rPr>
               <a:t>7.5</a:t>
             </a:r>
+            <a:endParaRPr sz="1300" b="1">
+              <a:solidFill>
+                <a:srgbClr val="FFFFFF"/>
+              </a:solidFill>
+              <a:latin typeface="SF Pro Display"/>
+            </a:endParaRPr>
           </a:p>
         </p:txBody>
       </p:sp>
@@ -9064,7 +9486,7 @@
           <a:noFill/>
         </p:spPr>
         <p:txBody>
-          <a:bodyPr wrap="square" lIns="60000" rIns="60000" tIns="40000" bIns="40000" anchor="t">
+          <a:bodyPr wrap="square" lIns="60000" tIns="40000" rIns="60000" bIns="40000" anchor="t">
             <a:spAutoFit/>
           </a:bodyPr>
           <a:lstStyle/>
@@ -9079,6 +9501,12 @@
               </a:rPr>
               <a:t>Custom search + weather filter</a:t>
             </a:r>
+            <a:endParaRPr sz="1600" b="1">
+              <a:solidFill>
+                <a:srgbClr val="1C1C1E"/>
+              </a:solidFill>
+              <a:latin typeface="SF Pro Display"/>
+            </a:endParaRPr>
           </a:p>
         </p:txBody>
       </p:sp>
@@ -9099,7 +9527,7 @@
           <a:noFill/>
         </p:spPr>
         <p:txBody>
-          <a:bodyPr wrap="square" lIns="60000" rIns="60000" tIns="40000" bIns="40000" anchor="t">
+          <a:bodyPr wrap="square" lIns="60000" tIns="40000" rIns="60000" bIns="40000" anchor="t">
             <a:spAutoFit/>
           </a:bodyPr>
           <a:lstStyle/>
@@ -9114,6 +9542,12 @@
               </a:rPr>
               <a:t>Week 7 · Daily Journal · SmartFarmerAssistant</a:t>
             </a:r>
+            <a:endParaRPr sz="1000" b="0">
+              <a:solidFill>
+                <a:srgbClr val="8E8E93"/>
+              </a:solidFill>
+              <a:latin typeface="SF Pro Text"/>
+            </a:endParaRPr>
           </a:p>
         </p:txBody>
       </p:sp>
@@ -9134,7 +9568,7 @@
           <a:noFill/>
         </p:spPr>
         <p:txBody>
-          <a:bodyPr wrap="square" lIns="60000" rIns="60000" tIns="40000" bIns="40000" anchor="t">
+          <a:bodyPr wrap="square" lIns="60000" tIns="40000" rIns="60000" bIns="40000" anchor="t">
             <a:spAutoFit/>
           </a:bodyPr>
           <a:lstStyle/>
@@ -9149,6 +9583,12 @@
               </a:rPr>
               <a:t>2 / 12</a:t>
             </a:r>
+            <a:endParaRPr sz="1000" b="0">
+              <a:solidFill>
+                <a:srgbClr val="8E8E93"/>
+              </a:solidFill>
+              <a:latin typeface="SF Pro Text"/>
+            </a:endParaRPr>
           </a:p>
         </p:txBody>
       </p:sp>
@@ -9164,7 +9604,7 @@
 </file>
 
 <file path=ppt/slides/slide3.xml><?xml version="1.0" encoding="utf-8"?>
-<p:sld xmlns:a="http://schemas.openxmlformats.org/drawingml/2006/main" xmlns:p="http://schemas.openxmlformats.org/presentationml/2006/main" xmlns:r="http://schemas.openxmlformats.org/officeDocument/2006/relationships">
+<p:sld xmlns:a="http://schemas.openxmlformats.org/drawingml/2006/main" xmlns:r="http://schemas.openxmlformats.org/officeDocument/2006/relationships" xmlns:p="http://schemas.openxmlformats.org/presentationml/2006/main">
   <p:cSld>
     <p:spTree>
       <p:nvGrpSpPr>
@@ -9276,7 +9716,7 @@
           <a:noFill/>
         </p:spPr>
         <p:txBody>
-          <a:bodyPr wrap="square" lIns="60000" rIns="60000" tIns="40000" bIns="40000" anchor="t">
+          <a:bodyPr wrap="square" lIns="60000" tIns="40000" rIns="60000" bIns="40000" anchor="t">
             <a:spAutoFit/>
           </a:bodyPr>
           <a:lstStyle/>
@@ -9291,6 +9731,12 @@
               </a:rPr>
               <a:t>ARCHITECTURE</a:t>
             </a:r>
+            <a:endParaRPr sz="1200" b="1">
+              <a:solidFill>
+                <a:srgbClr val="0A84FF"/>
+              </a:solidFill>
+              <a:latin typeface="SF Pro Text"/>
+            </a:endParaRPr>
           </a:p>
         </p:txBody>
       </p:sp>
@@ -9311,7 +9757,7 @@
           <a:noFill/>
         </p:spPr>
         <p:txBody>
-          <a:bodyPr wrap="square" lIns="60000" rIns="60000" tIns="40000" bIns="40000" anchor="t">
+          <a:bodyPr wrap="square" lIns="60000" tIns="40000" rIns="60000" bIns="40000" anchor="t">
             <a:spAutoFit/>
           </a:bodyPr>
           <a:lstStyle/>
@@ -9326,6 +9772,12 @@
               </a:rPr>
               <a:t>MVVM — clean SwiftUI layers</a:t>
             </a:r>
+            <a:endParaRPr sz="3000" b="1">
+              <a:solidFill>
+                <a:srgbClr val="1C1C1E"/>
+              </a:solidFill>
+              <a:latin typeface="SF Pro Display"/>
+            </a:endParaRPr>
           </a:p>
         </p:txBody>
       </p:sp>
@@ -9435,7 +9887,7 @@
           <a:noFill/>
         </p:spPr>
         <p:txBody>
-          <a:bodyPr wrap="square" lIns="60000" rIns="60000" tIns="40000" bIns="40000" anchor="t">
+          <a:bodyPr wrap="square" lIns="60000" tIns="40000" rIns="60000" bIns="40000" anchor="t">
             <a:spAutoFit/>
           </a:bodyPr>
           <a:lstStyle/>
@@ -9450,6 +9902,12 @@
               </a:rPr>
               <a:t>View</a:t>
             </a:r>
+            <a:endParaRPr sz="1600" b="1">
+              <a:solidFill>
+                <a:srgbClr val="0A84FF"/>
+              </a:solidFill>
+              <a:latin typeface="SF Pro Display"/>
+            </a:endParaRPr>
           </a:p>
         </p:txBody>
       </p:sp>
@@ -9470,7 +9928,7 @@
           <a:noFill/>
         </p:spPr>
         <p:txBody>
-          <a:bodyPr wrap="square" lIns="60000" rIns="60000" tIns="40000" bIns="40000" anchor="t">
+          <a:bodyPr wrap="square" lIns="60000" tIns="40000" rIns="60000" bIns="40000" anchor="t">
             <a:spAutoFit/>
           </a:bodyPr>
           <a:lstStyle/>
@@ -9485,6 +9943,12 @@
               </a:rPr>
               <a:t>JournalTabView · JournalRowView · JournalDetailView · Add/Edit sheets · PhotoPicker · WeatherPickerView</a:t>
             </a:r>
+            <a:endParaRPr sz="1300" b="0">
+              <a:solidFill>
+                <a:srgbClr val="1C1C1E"/>
+              </a:solidFill>
+              <a:latin typeface="SF Pro Text"/>
+            </a:endParaRPr>
           </a:p>
         </p:txBody>
       </p:sp>
@@ -9594,7 +10058,7 @@
           <a:noFill/>
         </p:spPr>
         <p:txBody>
-          <a:bodyPr wrap="square" lIns="60000" rIns="60000" tIns="40000" bIns="40000" anchor="t">
+          <a:bodyPr wrap="square" lIns="60000" tIns="40000" rIns="60000" bIns="40000" anchor="t">
             <a:spAutoFit/>
           </a:bodyPr>
           <a:lstStyle/>
@@ -9609,6 +10073,12 @@
               </a:rPr>
               <a:t>ViewModel</a:t>
             </a:r>
+            <a:endParaRPr sz="1600" b="1">
+              <a:solidFill>
+                <a:srgbClr val="A052D4"/>
+              </a:solidFill>
+              <a:latin typeface="SF Pro Display"/>
+            </a:endParaRPr>
           </a:p>
         </p:txBody>
       </p:sp>
@@ -9629,7 +10099,7 @@
           <a:noFill/>
         </p:spPr>
         <p:txBody>
-          <a:bodyPr wrap="square" lIns="60000" rIns="60000" tIns="40000" bIns="40000" anchor="t">
+          <a:bodyPr wrap="square" lIns="60000" tIns="40000" rIns="60000" bIns="40000" anchor="t">
             <a:spAutoFit/>
           </a:bodyPr>
           <a:lstStyle/>
@@ -9644,6 +10114,12 @@
               </a:rPr>
               <a:t>JournalViewModel — @Published searchText + weatherFilter + filter(_:)</a:t>
             </a:r>
+            <a:endParaRPr sz="1300" b="0">
+              <a:solidFill>
+                <a:srgbClr val="1C1C1E"/>
+              </a:solidFill>
+              <a:latin typeface="SF Pro Text"/>
+            </a:endParaRPr>
           </a:p>
         </p:txBody>
       </p:sp>
@@ -9753,7 +10229,7 @@
           <a:noFill/>
         </p:spPr>
         <p:txBody>
-          <a:bodyPr wrap="square" lIns="60000" rIns="60000" tIns="40000" bIns="40000" anchor="t">
+          <a:bodyPr wrap="square" lIns="60000" tIns="40000" rIns="60000" bIns="40000" anchor="t">
             <a:spAutoFit/>
           </a:bodyPr>
           <a:lstStyle/>
@@ -9768,6 +10244,12 @@
               </a:rPr>
               <a:t>Service</a:t>
             </a:r>
+            <a:endParaRPr sz="1600" b="1">
+              <a:solidFill>
+                <a:srgbClr val="FF9500"/>
+              </a:solidFill>
+              <a:latin typeface="SF Pro Display"/>
+            </a:endParaRPr>
           </a:p>
         </p:txBody>
       </p:sp>
@@ -9788,7 +10270,7 @@
           <a:noFill/>
         </p:spPr>
         <p:txBody>
-          <a:bodyPr wrap="square" lIns="60000" rIns="60000" tIns="40000" bIns="40000" anchor="t">
+          <a:bodyPr wrap="square" lIns="60000" tIns="40000" rIns="60000" bIns="40000" anchor="t">
             <a:spAutoFit/>
           </a:bodyPr>
           <a:lstStyle/>
@@ -9803,6 +10285,12 @@
               </a:rPr>
               <a:t>JournalPhotoStore — UIImage ↔ JPEG Data helpers</a:t>
             </a:r>
+            <a:endParaRPr sz="1300" b="0">
+              <a:solidFill>
+                <a:srgbClr val="1C1C1E"/>
+              </a:solidFill>
+              <a:latin typeface="SF Pro Text"/>
+            </a:endParaRPr>
           </a:p>
         </p:txBody>
       </p:sp>
@@ -9912,7 +10400,7 @@
           <a:noFill/>
         </p:spPr>
         <p:txBody>
-          <a:bodyPr wrap="square" lIns="60000" rIns="60000" tIns="40000" bIns="40000" anchor="t">
+          <a:bodyPr wrap="square" lIns="60000" tIns="40000" rIns="60000" bIns="40000" anchor="t">
             <a:spAutoFit/>
           </a:bodyPr>
           <a:lstStyle/>
@@ -9927,6 +10415,12 @@
               </a:rPr>
               <a:t>Model</a:t>
             </a:r>
+            <a:endParaRPr sz="1600" b="1">
+              <a:solidFill>
+                <a:srgbClr val="55B55C"/>
+              </a:solidFill>
+              <a:latin typeface="SF Pro Display"/>
+            </a:endParaRPr>
           </a:p>
         </p:txBody>
       </p:sp>
@@ -9947,7 +10441,7 @@
           <a:noFill/>
         </p:spPr>
         <p:txBody>
-          <a:bodyPr wrap="square" lIns="60000" rIns="60000" tIns="40000" bIns="40000" anchor="t">
+          <a:bodyPr wrap="square" lIns="60000" tIns="40000" rIns="60000" bIns="40000" anchor="t">
             <a:spAutoFit/>
           </a:bodyPr>
           <a:lstStyle/>
@@ -9962,6 +10456,12 @@
               </a:rPr>
               <a:t>JournalEntry (NSManagedObject) + Weather (enum)</a:t>
             </a:r>
+            <a:endParaRPr sz="1300" b="0">
+              <a:solidFill>
+                <a:srgbClr val="1C1C1E"/>
+              </a:solidFill>
+              <a:latin typeface="SF Pro Text"/>
+            </a:endParaRPr>
           </a:p>
         </p:txBody>
       </p:sp>
@@ -10071,7 +10571,7 @@
           <a:noFill/>
         </p:spPr>
         <p:txBody>
-          <a:bodyPr wrap="square" lIns="60000" rIns="60000" tIns="40000" bIns="40000" anchor="t">
+          <a:bodyPr wrap="square" lIns="60000" tIns="40000" rIns="60000" bIns="40000" anchor="t">
             <a:spAutoFit/>
           </a:bodyPr>
           <a:lstStyle/>
@@ -10086,6 +10586,12 @@
               </a:rPr>
               <a:t>Resource</a:t>
             </a:r>
+            <a:endParaRPr sz="1600" b="1">
+              <a:solidFill>
+                <a:srgbClr val="8E8E93"/>
+              </a:solidFill>
+              <a:latin typeface="SF Pro Display"/>
+            </a:endParaRPr>
           </a:p>
         </p:txBody>
       </p:sp>
@@ -10106,7 +10612,7 @@
           <a:noFill/>
         </p:spPr>
         <p:txBody>
-          <a:bodyPr wrap="square" lIns="60000" rIns="60000" tIns="40000" bIns="40000" anchor="t">
+          <a:bodyPr wrap="square" lIns="60000" tIns="40000" rIns="60000" bIns="40000" anchor="t">
             <a:spAutoFit/>
           </a:bodyPr>
           <a:lstStyle/>
@@ -10121,6 +10627,12 @@
               </a:rPr>
               <a:t>(empty — entries are user-authored, no seed JSON)</a:t>
             </a:r>
+            <a:endParaRPr sz="1300" b="0">
+              <a:solidFill>
+                <a:srgbClr val="1C1C1E"/>
+              </a:solidFill>
+              <a:latin typeface="SF Pro Text"/>
+            </a:endParaRPr>
           </a:p>
         </p:txBody>
       </p:sp>
@@ -10141,7 +10653,7 @@
           <a:noFill/>
         </p:spPr>
         <p:txBody>
-          <a:bodyPr wrap="square" lIns="60000" rIns="60000" tIns="40000" bIns="40000" anchor="t">
+          <a:bodyPr wrap="square" lIns="60000" tIns="40000" rIns="60000" bIns="40000" anchor="t">
             <a:spAutoFit/>
           </a:bodyPr>
           <a:lstStyle/>
@@ -10156,6 +10668,12 @@
               </a:rPr>
               <a:t>Week 7 · Daily Journal · SmartFarmerAssistant</a:t>
             </a:r>
+            <a:endParaRPr sz="1000" b="0">
+              <a:solidFill>
+                <a:srgbClr val="8E8E93"/>
+              </a:solidFill>
+              <a:latin typeface="SF Pro Text"/>
+            </a:endParaRPr>
           </a:p>
         </p:txBody>
       </p:sp>
@@ -10176,7 +10694,7 @@
           <a:noFill/>
         </p:spPr>
         <p:txBody>
-          <a:bodyPr wrap="square" lIns="60000" rIns="60000" tIns="40000" bIns="40000" anchor="t">
+          <a:bodyPr wrap="square" lIns="60000" tIns="40000" rIns="60000" bIns="40000" anchor="t">
             <a:spAutoFit/>
           </a:bodyPr>
           <a:lstStyle/>
@@ -10191,6 +10709,12 @@
               </a:rPr>
               <a:t>3 / 12</a:t>
             </a:r>
+            <a:endParaRPr sz="1000" b="0">
+              <a:solidFill>
+                <a:srgbClr val="8E8E93"/>
+              </a:solidFill>
+              <a:latin typeface="SF Pro Text"/>
+            </a:endParaRPr>
           </a:p>
         </p:txBody>
       </p:sp>
@@ -10206,7 +10730,7 @@
 </file>
 
 <file path=ppt/slides/slide4.xml><?xml version="1.0" encoding="utf-8"?>
-<p:sld xmlns:a="http://schemas.openxmlformats.org/drawingml/2006/main" xmlns:p="http://schemas.openxmlformats.org/presentationml/2006/main" xmlns:r="http://schemas.openxmlformats.org/officeDocument/2006/relationships">
+<p:sld xmlns:a="http://schemas.openxmlformats.org/drawingml/2006/main" xmlns:r="http://schemas.openxmlformats.org/officeDocument/2006/relationships" xmlns:p="http://schemas.openxmlformats.org/presentationml/2006/main">
   <p:cSld>
     <p:spTree>
       <p:nvGrpSpPr>
@@ -10318,7 +10842,7 @@
           <a:noFill/>
         </p:spPr>
         <p:txBody>
-          <a:bodyPr wrap="square" lIns="60000" rIns="60000" tIns="40000" bIns="40000" anchor="t">
+          <a:bodyPr wrap="square" lIns="60000" tIns="40000" rIns="60000" bIns="40000" anchor="t">
             <a:spAutoFit/>
           </a:bodyPr>
           <a:lstStyle/>
@@ -10333,6 +10857,12 @@
               </a:rPr>
               <a:t>CODE LAYOUT</a:t>
             </a:r>
+            <a:endParaRPr sz="1200" b="1">
+              <a:solidFill>
+                <a:srgbClr val="0A84FF"/>
+              </a:solidFill>
+              <a:latin typeface="SF Pro Text"/>
+            </a:endParaRPr>
           </a:p>
         </p:txBody>
       </p:sp>
@@ -10353,7 +10883,7 @@
           <a:noFill/>
         </p:spPr>
         <p:txBody>
-          <a:bodyPr wrap="square" lIns="60000" rIns="60000" tIns="40000" bIns="40000" anchor="t">
+          <a:bodyPr wrap="square" lIns="60000" tIns="40000" rIns="60000" bIns="40000" anchor="t">
             <a:spAutoFit/>
           </a:bodyPr>
           <a:lstStyle/>
@@ -10368,6 +10898,12 @@
               </a:rPr>
               <a:t>Journal module — folder by folder</a:t>
             </a:r>
+            <a:endParaRPr sz="3000" b="1">
+              <a:solidFill>
+                <a:srgbClr val="1C1C1E"/>
+              </a:solidFill>
+              <a:latin typeface="SF Pro Display"/>
+            </a:endParaRPr>
           </a:p>
         </p:txBody>
       </p:sp>
@@ -10388,7 +10924,7 @@
           <a:noFill/>
         </p:spPr>
         <p:txBody>
-          <a:bodyPr wrap="square" lIns="80000" rIns="60000" tIns="40000">
+          <a:bodyPr wrap="square" lIns="80000" tIns="40000" rIns="60000">
             <a:spAutoFit/>
           </a:bodyPr>
           <a:lstStyle/>
@@ -10407,6 +10943,12 @@
               </a:rPr>
               <a:t>•  Mirrors Finance/, CalendarReminders/, PestDisease/ — same shape across modules</a:t>
             </a:r>
+            <a:endParaRPr sz="1600">
+              <a:solidFill>
+                <a:srgbClr val="1C1C1E"/>
+              </a:solidFill>
+              <a:latin typeface="SF Pro Text"/>
+            </a:endParaRPr>
           </a:p>
           <a:p>
             <a:pPr algn="l">
@@ -10423,6 +10965,12 @@
               </a:rPr>
               <a:t>•  Models/ holds the NSManagedObject class + the Weather enum</a:t>
             </a:r>
+            <a:endParaRPr sz="1600">
+              <a:solidFill>
+                <a:srgbClr val="1C1C1E"/>
+              </a:solidFill>
+              <a:latin typeface="SF Pro Text"/>
+            </a:endParaRPr>
           </a:p>
           <a:p>
             <a:pPr algn="l">
@@ -10439,6 +10987,12 @@
               </a:rPr>
               <a:t>•  Services/ isolates the UIImage ↔ Data conversion</a:t>
             </a:r>
+            <a:endParaRPr sz="1600">
+              <a:solidFill>
+                <a:srgbClr val="1C1C1E"/>
+              </a:solidFill>
+              <a:latin typeface="SF Pro Text"/>
+            </a:endParaRPr>
           </a:p>
           <a:p>
             <a:pPr algn="l">
@@ -10455,6 +11009,12 @@
               </a:rPr>
               <a:t>•  ViewModels/ owns search + weather filter + day grouping</a:t>
             </a:r>
+            <a:endParaRPr sz="1600">
+              <a:solidFill>
+                <a:srgbClr val="1C1C1E"/>
+              </a:solidFill>
+              <a:latin typeface="SF Pro Text"/>
+            </a:endParaRPr>
           </a:p>
           <a:p>
             <a:pPr algn="l">
@@ -10471,6 +11031,12 @@
               </a:rPr>
               <a:t>•  SearchBar and ExpandableSection are reused from PestDisease — no duplicates</a:t>
             </a:r>
+            <a:endParaRPr sz="1600">
+              <a:solidFill>
+                <a:srgbClr val="1C1C1E"/>
+              </a:solidFill>
+              <a:latin typeface="SF Pro Text"/>
+            </a:endParaRPr>
           </a:p>
         </p:txBody>
       </p:sp>
@@ -10537,7 +11103,7 @@
           <a:noFill/>
         </p:spPr>
         <p:txBody>
-          <a:bodyPr wrap="square" lIns="140000" rIns="80000" tIns="100000">
+          <a:bodyPr wrap="square" lIns="140000" tIns="100000" rIns="80000">
             <a:spAutoFit/>
           </a:bodyPr>
           <a:lstStyle/>
@@ -10548,10 +11114,16 @@
                 <a:solidFill>
                   <a:srgbClr val="F2F2F7"/>
                 </a:solidFill>
-                <a:latin typeface="Menlo"/>
+                <a:latin typeface="Menlo" panose="020B0609030804020204"/>
               </a:rPr>
               <a:t>SmartFarmerAssistantFinish/</a:t>
             </a:r>
+            <a:endParaRPr sz="1100">
+              <a:solidFill>
+                <a:srgbClr val="F2F2F7"/>
+              </a:solidFill>
+              <a:latin typeface="Menlo" panose="020B0609030804020204"/>
+            </a:endParaRPr>
           </a:p>
           <a:p>
             <a:pPr algn="l"/>
@@ -10560,10 +11132,16 @@
                 <a:solidFill>
                   <a:srgbClr val="F2F2F7"/>
                 </a:solidFill>
-                <a:latin typeface="Menlo"/>
+                <a:latin typeface="Menlo" panose="020B0609030804020204"/>
               </a:rPr>
               <a:t>└── Journal/</a:t>
             </a:r>
+            <a:endParaRPr sz="1100">
+              <a:solidFill>
+                <a:srgbClr val="F2F2F7"/>
+              </a:solidFill>
+              <a:latin typeface="Menlo" panose="020B0609030804020204"/>
+            </a:endParaRPr>
           </a:p>
           <a:p>
             <a:pPr algn="l"/>
@@ -10572,10 +11150,16 @@
                 <a:solidFill>
                   <a:srgbClr val="F2F2F7"/>
                 </a:solidFill>
-                <a:latin typeface="Menlo"/>
+                <a:latin typeface="Menlo" panose="020B0609030804020204"/>
               </a:rPr>
               <a:t>    ├── Models/</a:t>
             </a:r>
+            <a:endParaRPr sz="1100">
+              <a:solidFill>
+                <a:srgbClr val="F2F2F7"/>
+              </a:solidFill>
+              <a:latin typeface="Menlo" panose="020B0609030804020204"/>
+            </a:endParaRPr>
           </a:p>
           <a:p>
             <a:pPr algn="l"/>
@@ -10584,10 +11168,16 @@
                 <a:solidFill>
                   <a:srgbClr val="F2F2F7"/>
                 </a:solidFill>
-                <a:latin typeface="Menlo"/>
+                <a:latin typeface="Menlo" panose="020B0609030804020204"/>
               </a:rPr>
               <a:t>    │   ├── JournalEntry+CoreDataClass.swift</a:t>
             </a:r>
+            <a:endParaRPr sz="1100">
+              <a:solidFill>
+                <a:srgbClr val="F2F2F7"/>
+              </a:solidFill>
+              <a:latin typeface="Menlo" panose="020B0609030804020204"/>
+            </a:endParaRPr>
           </a:p>
           <a:p>
             <a:pPr algn="l"/>
@@ -10596,10 +11186,16 @@
                 <a:solidFill>
                   <a:srgbClr val="F2F2F7"/>
                 </a:solidFill>
-                <a:latin typeface="Menlo"/>
+                <a:latin typeface="Menlo" panose="020B0609030804020204"/>
               </a:rPr>
               <a:t>    │   ├── JournalEntry+CoreDataProperties.swift</a:t>
             </a:r>
+            <a:endParaRPr sz="1100">
+              <a:solidFill>
+                <a:srgbClr val="F2F2F7"/>
+              </a:solidFill>
+              <a:latin typeface="Menlo" panose="020B0609030804020204"/>
+            </a:endParaRPr>
           </a:p>
           <a:p>
             <a:pPr algn="l"/>
@@ -10608,10 +11204,16 @@
                 <a:solidFill>
                   <a:srgbClr val="F2F2F7"/>
                 </a:solidFill>
-                <a:latin typeface="Menlo"/>
+                <a:latin typeface="Menlo" panose="020B0609030804020204"/>
               </a:rPr>
               <a:t>    │   └── Weather.swift</a:t>
             </a:r>
+            <a:endParaRPr sz="1100">
+              <a:solidFill>
+                <a:srgbClr val="F2F2F7"/>
+              </a:solidFill>
+              <a:latin typeface="Menlo" panose="020B0609030804020204"/>
+            </a:endParaRPr>
           </a:p>
           <a:p>
             <a:pPr algn="l"/>
@@ -10620,10 +11222,16 @@
                 <a:solidFill>
                   <a:srgbClr val="F2F2F7"/>
                 </a:solidFill>
-                <a:latin typeface="Menlo"/>
+                <a:latin typeface="Menlo" panose="020B0609030804020204"/>
               </a:rPr>
               <a:t>    ├── ViewModels/</a:t>
             </a:r>
+            <a:endParaRPr sz="1100">
+              <a:solidFill>
+                <a:srgbClr val="F2F2F7"/>
+              </a:solidFill>
+              <a:latin typeface="Menlo" panose="020B0609030804020204"/>
+            </a:endParaRPr>
           </a:p>
           <a:p>
             <a:pPr algn="l"/>
@@ -10632,10 +11240,16 @@
                 <a:solidFill>
                   <a:srgbClr val="F2F2F7"/>
                 </a:solidFill>
-                <a:latin typeface="Menlo"/>
+                <a:latin typeface="Menlo" panose="020B0609030804020204"/>
               </a:rPr>
               <a:t>    │   └── JournalViewModel.swift</a:t>
             </a:r>
+            <a:endParaRPr sz="1100">
+              <a:solidFill>
+                <a:srgbClr val="F2F2F7"/>
+              </a:solidFill>
+              <a:latin typeface="Menlo" panose="020B0609030804020204"/>
+            </a:endParaRPr>
           </a:p>
           <a:p>
             <a:pPr algn="l"/>
@@ -10644,10 +11258,16 @@
                 <a:solidFill>
                   <a:srgbClr val="F2F2F7"/>
                 </a:solidFill>
-                <a:latin typeface="Menlo"/>
+                <a:latin typeface="Menlo" panose="020B0609030804020204"/>
               </a:rPr>
               <a:t>    ├── Services/</a:t>
             </a:r>
+            <a:endParaRPr sz="1100">
+              <a:solidFill>
+                <a:srgbClr val="F2F2F7"/>
+              </a:solidFill>
+              <a:latin typeface="Menlo" panose="020B0609030804020204"/>
+            </a:endParaRPr>
           </a:p>
           <a:p>
             <a:pPr algn="l"/>
@@ -10656,10 +11276,16 @@
                 <a:solidFill>
                   <a:srgbClr val="F2F2F7"/>
                 </a:solidFill>
-                <a:latin typeface="Menlo"/>
+                <a:latin typeface="Menlo" panose="020B0609030804020204"/>
               </a:rPr>
               <a:t>    │   └── JournalPhotoStore.swift</a:t>
             </a:r>
+            <a:endParaRPr sz="1100">
+              <a:solidFill>
+                <a:srgbClr val="F2F2F7"/>
+              </a:solidFill>
+              <a:latin typeface="Menlo" panose="020B0609030804020204"/>
+            </a:endParaRPr>
           </a:p>
           <a:p>
             <a:pPr algn="l"/>
@@ -10668,10 +11294,16 @@
                 <a:solidFill>
                   <a:srgbClr val="F2F2F7"/>
                 </a:solidFill>
-                <a:latin typeface="Menlo"/>
+                <a:latin typeface="Menlo" panose="020B0609030804020204"/>
               </a:rPr>
               <a:t>    ├── Views/</a:t>
             </a:r>
+            <a:endParaRPr sz="1100">
+              <a:solidFill>
+                <a:srgbClr val="F2F2F7"/>
+              </a:solidFill>
+              <a:latin typeface="Menlo" panose="020B0609030804020204"/>
+            </a:endParaRPr>
           </a:p>
           <a:p>
             <a:pPr algn="l"/>
@@ -10680,10 +11312,16 @@
                 <a:solidFill>
                   <a:srgbClr val="F2F2F7"/>
                 </a:solidFill>
-                <a:latin typeface="Menlo"/>
+                <a:latin typeface="Menlo" panose="020B0609030804020204"/>
               </a:rPr>
               <a:t>    │   ├── JournalTabView.swift</a:t>
             </a:r>
+            <a:endParaRPr sz="1100">
+              <a:solidFill>
+                <a:srgbClr val="F2F2F7"/>
+              </a:solidFill>
+              <a:latin typeface="Menlo" panose="020B0609030804020204"/>
+            </a:endParaRPr>
           </a:p>
           <a:p>
             <a:pPr algn="l"/>
@@ -10692,10 +11330,16 @@
                 <a:solidFill>
                   <a:srgbClr val="F2F2F7"/>
                 </a:solidFill>
-                <a:latin typeface="Menlo"/>
+                <a:latin typeface="Menlo" panose="020B0609030804020204"/>
               </a:rPr>
               <a:t>    │   ├── JournalRowView.swift</a:t>
             </a:r>
+            <a:endParaRPr sz="1100">
+              <a:solidFill>
+                <a:srgbClr val="F2F2F7"/>
+              </a:solidFill>
+              <a:latin typeface="Menlo" panose="020B0609030804020204"/>
+            </a:endParaRPr>
           </a:p>
           <a:p>
             <a:pPr algn="l"/>
@@ -10704,10 +11348,16 @@
                 <a:solidFill>
                   <a:srgbClr val="F2F2F7"/>
                 </a:solidFill>
-                <a:latin typeface="Menlo"/>
+                <a:latin typeface="Menlo" panose="020B0609030804020204"/>
               </a:rPr>
               <a:t>    │   ├── JournalDetailView.swift</a:t>
             </a:r>
+            <a:endParaRPr sz="1100">
+              <a:solidFill>
+                <a:srgbClr val="F2F2F7"/>
+              </a:solidFill>
+              <a:latin typeface="Menlo" panose="020B0609030804020204"/>
+            </a:endParaRPr>
           </a:p>
           <a:p>
             <a:pPr algn="l"/>
@@ -10716,10 +11366,16 @@
                 <a:solidFill>
                   <a:srgbClr val="F2F2F7"/>
                 </a:solidFill>
-                <a:latin typeface="Menlo"/>
+                <a:latin typeface="Menlo" panose="020B0609030804020204"/>
               </a:rPr>
               <a:t>    │   ├── AddJournalEntryView.swift</a:t>
             </a:r>
+            <a:endParaRPr sz="1100">
+              <a:solidFill>
+                <a:srgbClr val="F2F2F7"/>
+              </a:solidFill>
+              <a:latin typeface="Menlo" panose="020B0609030804020204"/>
+            </a:endParaRPr>
           </a:p>
           <a:p>
             <a:pPr algn="l"/>
@@ -10728,10 +11384,16 @@
                 <a:solidFill>
                   <a:srgbClr val="F2F2F7"/>
                 </a:solidFill>
-                <a:latin typeface="Menlo"/>
+                <a:latin typeface="Menlo" panose="020B0609030804020204"/>
               </a:rPr>
               <a:t>    │   ├── EditJournalEntryView.swift</a:t>
             </a:r>
+            <a:endParaRPr sz="1100">
+              <a:solidFill>
+                <a:srgbClr val="F2F2F7"/>
+              </a:solidFill>
+              <a:latin typeface="Menlo" panose="020B0609030804020204"/>
+            </a:endParaRPr>
           </a:p>
           <a:p>
             <a:pPr algn="l"/>
@@ -10740,10 +11402,16 @@
                 <a:solidFill>
                   <a:srgbClr val="F2F2F7"/>
                 </a:solidFill>
-                <a:latin typeface="Menlo"/>
+                <a:latin typeface="Menlo" panose="020B0609030804020204"/>
               </a:rPr>
               <a:t>    │   ├── WeatherPickerView.swift</a:t>
             </a:r>
+            <a:endParaRPr sz="1100">
+              <a:solidFill>
+                <a:srgbClr val="F2F2F7"/>
+              </a:solidFill>
+              <a:latin typeface="Menlo" panose="020B0609030804020204"/>
+            </a:endParaRPr>
           </a:p>
           <a:p>
             <a:pPr algn="l"/>
@@ -10752,10 +11420,16 @@
                 <a:solidFill>
                   <a:srgbClr val="F2F2F7"/>
                 </a:solidFill>
-                <a:latin typeface="Menlo"/>
+                <a:latin typeface="Menlo" panose="020B0609030804020204"/>
               </a:rPr>
               <a:t>    │   ├── PhotoPicker.swift</a:t>
             </a:r>
+            <a:endParaRPr sz="1100">
+              <a:solidFill>
+                <a:srgbClr val="F2F2F7"/>
+              </a:solidFill>
+              <a:latin typeface="Menlo" panose="020B0609030804020204"/>
+            </a:endParaRPr>
           </a:p>
           <a:p>
             <a:pPr algn="l"/>
@@ -10764,10 +11438,16 @@
                 <a:solidFill>
                   <a:srgbClr val="F2F2F7"/>
                 </a:solidFill>
-                <a:latin typeface="Menlo"/>
+                <a:latin typeface="Menlo" panose="020B0609030804020204"/>
               </a:rPr>
               <a:t>    │   └── PhotoGalleryView.swift</a:t>
             </a:r>
+            <a:endParaRPr sz="1100">
+              <a:solidFill>
+                <a:srgbClr val="F2F2F7"/>
+              </a:solidFill>
+              <a:latin typeface="Menlo" panose="020B0609030804020204"/>
+            </a:endParaRPr>
           </a:p>
           <a:p>
             <a:pPr algn="l"/>
@@ -10776,10 +11456,16 @@
                 <a:solidFill>
                   <a:srgbClr val="F2F2F7"/>
                 </a:solidFill>
-                <a:latin typeface="Menlo"/>
+                <a:latin typeface="Menlo" panose="020B0609030804020204"/>
               </a:rPr>
               <a:t>    └── Resources/</a:t>
             </a:r>
+            <a:endParaRPr sz="1100">
+              <a:solidFill>
+                <a:srgbClr val="F2F2F7"/>
+              </a:solidFill>
+              <a:latin typeface="Menlo" panose="020B0609030804020204"/>
+            </a:endParaRPr>
           </a:p>
           <a:p>
             <a:pPr algn="l"/>
@@ -10788,10 +11474,16 @@
                 <a:solidFill>
                   <a:srgbClr val="F2F2F7"/>
                 </a:solidFill>
-                <a:latin typeface="Menlo"/>
+                <a:latin typeface="Menlo" panose="020B0609030804020204"/>
               </a:rPr>
               <a:t>        └── (empty)</a:t>
             </a:r>
+            <a:endParaRPr sz="1100">
+              <a:solidFill>
+                <a:srgbClr val="F2F2F7"/>
+              </a:solidFill>
+              <a:latin typeface="Menlo" panose="020B0609030804020204"/>
+            </a:endParaRPr>
           </a:p>
         </p:txBody>
       </p:sp>
@@ -10812,7 +11504,7 @@
           <a:noFill/>
         </p:spPr>
         <p:txBody>
-          <a:bodyPr wrap="square" lIns="60000" rIns="60000" tIns="40000" bIns="40000" anchor="t">
+          <a:bodyPr wrap="square" lIns="60000" tIns="40000" rIns="60000" bIns="40000" anchor="t">
             <a:spAutoFit/>
           </a:bodyPr>
           <a:lstStyle/>
@@ -10827,6 +11519,12 @@
               </a:rPr>
               <a:t>Week 7 · Daily Journal · SmartFarmerAssistant</a:t>
             </a:r>
+            <a:endParaRPr sz="1000" b="0">
+              <a:solidFill>
+                <a:srgbClr val="8E8E93"/>
+              </a:solidFill>
+              <a:latin typeface="SF Pro Text"/>
+            </a:endParaRPr>
           </a:p>
         </p:txBody>
       </p:sp>
@@ -10847,7 +11545,7 @@
           <a:noFill/>
         </p:spPr>
         <p:txBody>
-          <a:bodyPr wrap="square" lIns="60000" rIns="60000" tIns="40000" bIns="40000" anchor="t">
+          <a:bodyPr wrap="square" lIns="60000" tIns="40000" rIns="60000" bIns="40000" anchor="t">
             <a:spAutoFit/>
           </a:bodyPr>
           <a:lstStyle/>
@@ -10862,6 +11560,12 @@
               </a:rPr>
               <a:t>4 / 12</a:t>
             </a:r>
+            <a:endParaRPr sz="1000" b="0">
+              <a:solidFill>
+                <a:srgbClr val="8E8E93"/>
+              </a:solidFill>
+              <a:latin typeface="SF Pro Text"/>
+            </a:endParaRPr>
           </a:p>
         </p:txBody>
       </p:sp>
@@ -10871,13 +11575,13 @@
     <a:masterClrMapping/>
   </p:clrMapOvr>
   <p:transition spd="med">
-    <p:push dir="l"/>
+    <p:push/>
   </p:transition>
 </p:sld>
 </file>
 
 <file path=ppt/slides/slide5.xml><?xml version="1.0" encoding="utf-8"?>
-<p:sld xmlns:a="http://schemas.openxmlformats.org/drawingml/2006/main" xmlns:p="http://schemas.openxmlformats.org/presentationml/2006/main" xmlns:r="http://schemas.openxmlformats.org/officeDocument/2006/relationships">
+<p:sld xmlns:a="http://schemas.openxmlformats.org/drawingml/2006/main" xmlns:r="http://schemas.openxmlformats.org/officeDocument/2006/relationships" xmlns:p="http://schemas.openxmlformats.org/presentationml/2006/main">
   <p:cSld>
     <p:spTree>
       <p:nvGrpSpPr>
@@ -10989,7 +11693,7 @@
           <a:noFill/>
         </p:spPr>
         <p:txBody>
-          <a:bodyPr wrap="square" lIns="60000" rIns="60000" tIns="40000" bIns="40000" anchor="t">
+          <a:bodyPr wrap="square" lIns="60000" tIns="40000" rIns="60000" bIns="40000" anchor="t">
             <a:spAutoFit/>
           </a:bodyPr>
           <a:lstStyle/>
@@ -11004,6 +11708,12 @@
               </a:rPr>
               <a:t>LESSON 7.1</a:t>
             </a:r>
+            <a:endParaRPr sz="1200" b="1">
+              <a:solidFill>
+                <a:srgbClr val="0A84FF"/>
+              </a:solidFill>
+              <a:latin typeface="SF Pro Text"/>
+            </a:endParaRPr>
           </a:p>
         </p:txBody>
       </p:sp>
@@ -11024,7 +11734,7 @@
           <a:noFill/>
         </p:spPr>
         <p:txBody>
-          <a:bodyPr wrap="square" lIns="60000" rIns="60000" tIns="40000" bIns="40000" anchor="t">
+          <a:bodyPr wrap="square" lIns="60000" tIns="40000" rIns="60000" bIns="40000" anchor="t">
             <a:spAutoFit/>
           </a:bodyPr>
           <a:lstStyle/>
@@ -11039,6 +11749,12 @@
               </a:rPr>
               <a:t>Core Data — JournalEntry Entity</a:t>
             </a:r>
+            <a:endParaRPr sz="3000" b="1">
+              <a:solidFill>
+                <a:srgbClr val="1C1C1E"/>
+              </a:solidFill>
+              <a:latin typeface="SF Pro Display"/>
+            </a:endParaRPr>
           </a:p>
         </p:txBody>
       </p:sp>
@@ -11059,7 +11775,7 @@
           <a:noFill/>
         </p:spPr>
         <p:txBody>
-          <a:bodyPr wrap="square" lIns="60000" rIns="60000" tIns="40000" bIns="40000" anchor="t">
+          <a:bodyPr wrap="square" lIns="60000" tIns="40000" rIns="60000" bIns="40000" anchor="t">
             <a:spAutoFit/>
           </a:bodyPr>
           <a:lstStyle/>
@@ -11074,6 +11790,12 @@
               </a:rPr>
               <a:t>ATTRIBUTES</a:t>
             </a:r>
+            <a:endParaRPr sz="1200" b="1">
+              <a:solidFill>
+                <a:srgbClr val="0A84FF"/>
+              </a:solidFill>
+              <a:latin typeface="SF Pro Text"/>
+            </a:endParaRPr>
           </a:p>
         </p:txBody>
       </p:sp>
@@ -11140,7 +11862,7 @@
           <a:noFill/>
         </p:spPr>
         <p:txBody>
-          <a:bodyPr wrap="square" lIns="60000" rIns="60000" tIns="40000" bIns="40000" anchor="t">
+          <a:bodyPr wrap="square" lIns="60000" tIns="40000" rIns="60000" bIns="40000" anchor="t">
             <a:spAutoFit/>
           </a:bodyPr>
           <a:lstStyle/>
@@ -11151,10 +11873,16 @@
                 <a:solidFill>
                   <a:srgbClr val="0A84FF"/>
                 </a:solidFill>
-                <a:latin typeface="Menlo"/>
+                <a:latin typeface="Menlo" panose="020B0609030804020204"/>
               </a:rPr>
               <a:t>id</a:t>
             </a:r>
+            <a:endParaRPr sz="1200" b="1">
+              <a:solidFill>
+                <a:srgbClr val="0A84FF"/>
+              </a:solidFill>
+              <a:latin typeface="Menlo" panose="020B0609030804020204"/>
+            </a:endParaRPr>
           </a:p>
         </p:txBody>
       </p:sp>
@@ -11175,7 +11903,7 @@
           <a:noFill/>
         </p:spPr>
         <p:txBody>
-          <a:bodyPr wrap="square" lIns="60000" rIns="60000" tIns="40000" bIns="40000" anchor="t">
+          <a:bodyPr wrap="square" lIns="60000" tIns="40000" rIns="60000" bIns="40000" anchor="t">
             <a:spAutoFit/>
           </a:bodyPr>
           <a:lstStyle/>
@@ -11186,10 +11914,16 @@
                 <a:solidFill>
                   <a:srgbClr val="8E8E93"/>
                 </a:solidFill>
-                <a:latin typeface="Menlo"/>
+                <a:latin typeface="Menlo" panose="020B0609030804020204"/>
               </a:rPr>
               <a:t>UUID</a:t>
             </a:r>
+            <a:endParaRPr sz="1100" b="0">
+              <a:solidFill>
+                <a:srgbClr val="8E8E93"/>
+              </a:solidFill>
+              <a:latin typeface="Menlo" panose="020B0609030804020204"/>
+            </a:endParaRPr>
           </a:p>
         </p:txBody>
       </p:sp>
@@ -11210,7 +11944,7 @@
           <a:noFill/>
         </p:spPr>
         <p:txBody>
-          <a:bodyPr wrap="square" lIns="60000" rIns="60000" tIns="40000" bIns="40000" anchor="t">
+          <a:bodyPr wrap="square" lIns="60000" tIns="40000" rIns="60000" bIns="40000" anchor="t">
             <a:spAutoFit/>
           </a:bodyPr>
           <a:lstStyle/>
@@ -11225,6 +11959,12 @@
               </a:rPr>
               <a:t>Stable identifier</a:t>
             </a:r>
+            <a:endParaRPr sz="1000" b="0">
+              <a:solidFill>
+                <a:srgbClr val="1C1C1E"/>
+              </a:solidFill>
+              <a:latin typeface="SF Pro Text"/>
+            </a:endParaRPr>
           </a:p>
         </p:txBody>
       </p:sp>
@@ -11291,7 +12031,7 @@
           <a:noFill/>
         </p:spPr>
         <p:txBody>
-          <a:bodyPr wrap="square" lIns="60000" rIns="60000" tIns="40000" bIns="40000" anchor="t">
+          <a:bodyPr wrap="square" lIns="60000" tIns="40000" rIns="60000" bIns="40000" anchor="t">
             <a:spAutoFit/>
           </a:bodyPr>
           <a:lstStyle/>
@@ -11302,10 +12042,16 @@
                 <a:solidFill>
                   <a:srgbClr val="0A84FF"/>
                 </a:solidFill>
-                <a:latin typeface="Menlo"/>
+                <a:latin typeface="Menlo" panose="020B0609030804020204"/>
               </a:rPr>
               <a:t>date</a:t>
             </a:r>
+            <a:endParaRPr sz="1200" b="1">
+              <a:solidFill>
+                <a:srgbClr val="0A84FF"/>
+              </a:solidFill>
+              <a:latin typeface="Menlo" panose="020B0609030804020204"/>
+            </a:endParaRPr>
           </a:p>
         </p:txBody>
       </p:sp>
@@ -11326,7 +12072,7 @@
           <a:noFill/>
         </p:spPr>
         <p:txBody>
-          <a:bodyPr wrap="square" lIns="60000" rIns="60000" tIns="40000" bIns="40000" anchor="t">
+          <a:bodyPr wrap="square" lIns="60000" tIns="40000" rIns="60000" bIns="40000" anchor="t">
             <a:spAutoFit/>
           </a:bodyPr>
           <a:lstStyle/>
@@ -11337,10 +12083,16 @@
                 <a:solidFill>
                   <a:srgbClr val="8E8E93"/>
                 </a:solidFill>
-                <a:latin typeface="Menlo"/>
+                <a:latin typeface="Menlo" panose="020B0609030804020204"/>
               </a:rPr>
               <a:t>Date</a:t>
             </a:r>
+            <a:endParaRPr sz="1100" b="0">
+              <a:solidFill>
+                <a:srgbClr val="8E8E93"/>
+              </a:solidFill>
+              <a:latin typeface="Menlo" panose="020B0609030804020204"/>
+            </a:endParaRPr>
           </a:p>
         </p:txBody>
       </p:sp>
@@ -11361,7 +12113,7 @@
           <a:noFill/>
         </p:spPr>
         <p:txBody>
-          <a:bodyPr wrap="square" lIns="60000" rIns="60000" tIns="40000" bIns="40000" anchor="t">
+          <a:bodyPr wrap="square" lIns="60000" tIns="40000" rIns="60000" bIns="40000" anchor="t">
             <a:spAutoFit/>
           </a:bodyPr>
           <a:lstStyle/>
@@ -11376,6 +12128,12 @@
               </a:rPr>
               <a:t>Timeline sort key + day grouping</a:t>
             </a:r>
+            <a:endParaRPr sz="1000" b="0">
+              <a:solidFill>
+                <a:srgbClr val="1C1C1E"/>
+              </a:solidFill>
+              <a:latin typeface="SF Pro Text"/>
+            </a:endParaRPr>
           </a:p>
         </p:txBody>
       </p:sp>
@@ -11442,7 +12200,7 @@
           <a:noFill/>
         </p:spPr>
         <p:txBody>
-          <a:bodyPr wrap="square" lIns="60000" rIns="60000" tIns="40000" bIns="40000" anchor="t">
+          <a:bodyPr wrap="square" lIns="60000" tIns="40000" rIns="60000" bIns="40000" anchor="t">
             <a:spAutoFit/>
           </a:bodyPr>
           <a:lstStyle/>
@@ -11453,10 +12211,16 @@
                 <a:solidFill>
                   <a:srgbClr val="0A84FF"/>
                 </a:solidFill>
-                <a:latin typeface="Menlo"/>
+                <a:latin typeface="Menlo" panose="020B0609030804020204"/>
               </a:rPr>
               <a:t>title</a:t>
             </a:r>
+            <a:endParaRPr sz="1200" b="1">
+              <a:solidFill>
+                <a:srgbClr val="0A84FF"/>
+              </a:solidFill>
+              <a:latin typeface="Menlo" panose="020B0609030804020204"/>
+            </a:endParaRPr>
           </a:p>
         </p:txBody>
       </p:sp>
@@ -11477,7 +12241,7 @@
           <a:noFill/>
         </p:spPr>
         <p:txBody>
-          <a:bodyPr wrap="square" lIns="60000" rIns="60000" tIns="40000" bIns="40000" anchor="t">
+          <a:bodyPr wrap="square" lIns="60000" tIns="40000" rIns="60000" bIns="40000" anchor="t">
             <a:spAutoFit/>
           </a:bodyPr>
           <a:lstStyle/>
@@ -11488,10 +12252,16 @@
                 <a:solidFill>
                   <a:srgbClr val="8E8E93"/>
                 </a:solidFill>
-                <a:latin typeface="Menlo"/>
+                <a:latin typeface="Menlo" panose="020B0609030804020204"/>
               </a:rPr>
               <a:t>String?</a:t>
             </a:r>
+            <a:endParaRPr sz="1100" b="0">
+              <a:solidFill>
+                <a:srgbClr val="8E8E93"/>
+              </a:solidFill>
+              <a:latin typeface="Menlo" panose="020B0609030804020204"/>
+            </a:endParaRPr>
           </a:p>
         </p:txBody>
       </p:sp>
@@ -11512,7 +12282,7 @@
           <a:noFill/>
         </p:spPr>
         <p:txBody>
-          <a:bodyPr wrap="square" lIns="60000" rIns="60000" tIns="40000" bIns="40000" anchor="t">
+          <a:bodyPr wrap="square" lIns="60000" tIns="40000" rIns="60000" bIns="40000" anchor="t">
             <a:spAutoFit/>
           </a:bodyPr>
           <a:lstStyle/>
@@ -11527,6 +12297,12 @@
               </a:rPr>
               <a:t>Optional — first line of content otherwise</a:t>
             </a:r>
+            <a:endParaRPr sz="1000" b="0">
+              <a:solidFill>
+                <a:srgbClr val="1C1C1E"/>
+              </a:solidFill>
+              <a:latin typeface="SF Pro Text"/>
+            </a:endParaRPr>
           </a:p>
         </p:txBody>
       </p:sp>
@@ -11593,7 +12369,7 @@
           <a:noFill/>
         </p:spPr>
         <p:txBody>
-          <a:bodyPr wrap="square" lIns="60000" rIns="60000" tIns="40000" bIns="40000" anchor="t">
+          <a:bodyPr wrap="square" lIns="60000" tIns="40000" rIns="60000" bIns="40000" anchor="t">
             <a:spAutoFit/>
           </a:bodyPr>
           <a:lstStyle/>
@@ -11604,10 +12380,16 @@
                 <a:solidFill>
                   <a:srgbClr val="0A84FF"/>
                 </a:solidFill>
-                <a:latin typeface="Menlo"/>
+                <a:latin typeface="Menlo" panose="020B0609030804020204"/>
               </a:rPr>
               <a:t>content</a:t>
             </a:r>
+            <a:endParaRPr sz="1200" b="1">
+              <a:solidFill>
+                <a:srgbClr val="0A84FF"/>
+              </a:solidFill>
+              <a:latin typeface="Menlo" panose="020B0609030804020204"/>
+            </a:endParaRPr>
           </a:p>
         </p:txBody>
       </p:sp>
@@ -11628,7 +12410,7 @@
           <a:noFill/>
         </p:spPr>
         <p:txBody>
-          <a:bodyPr wrap="square" lIns="60000" rIns="60000" tIns="40000" bIns="40000" anchor="t">
+          <a:bodyPr wrap="square" lIns="60000" tIns="40000" rIns="60000" bIns="40000" anchor="t">
             <a:spAutoFit/>
           </a:bodyPr>
           <a:lstStyle/>
@@ -11639,10 +12421,16 @@
                 <a:solidFill>
                   <a:srgbClr val="8E8E93"/>
                 </a:solidFill>
-                <a:latin typeface="Menlo"/>
+                <a:latin typeface="Menlo" panose="020B0609030804020204"/>
               </a:rPr>
               <a:t>String</a:t>
             </a:r>
+            <a:endParaRPr sz="1100" b="0">
+              <a:solidFill>
+                <a:srgbClr val="8E8E93"/>
+              </a:solidFill>
+              <a:latin typeface="Menlo" panose="020B0609030804020204"/>
+            </a:endParaRPr>
           </a:p>
         </p:txBody>
       </p:sp>
@@ -11663,7 +12451,7 @@
           <a:noFill/>
         </p:spPr>
         <p:txBody>
-          <a:bodyPr wrap="square" lIns="60000" rIns="60000" tIns="40000" bIns="40000" anchor="t">
+          <a:bodyPr wrap="square" lIns="60000" tIns="40000" rIns="60000" bIns="40000" anchor="t">
             <a:spAutoFit/>
           </a:bodyPr>
           <a:lstStyle/>
@@ -11678,6 +12466,12 @@
               </a:rPr>
               <a:t>Body text (edited in TextEditor)</a:t>
             </a:r>
+            <a:endParaRPr sz="1000" b="0">
+              <a:solidFill>
+                <a:srgbClr val="1C1C1E"/>
+              </a:solidFill>
+              <a:latin typeface="SF Pro Text"/>
+            </a:endParaRPr>
           </a:p>
         </p:txBody>
       </p:sp>
@@ -11744,7 +12538,7 @@
           <a:noFill/>
         </p:spPr>
         <p:txBody>
-          <a:bodyPr wrap="square" lIns="60000" rIns="60000" tIns="40000" bIns="40000" anchor="t">
+          <a:bodyPr wrap="square" lIns="60000" tIns="40000" rIns="60000" bIns="40000" anchor="t">
             <a:spAutoFit/>
           </a:bodyPr>
           <a:lstStyle/>
@@ -11755,10 +12549,16 @@
                 <a:solidFill>
                   <a:srgbClr val="0A84FF"/>
                 </a:solidFill>
-                <a:latin typeface="Menlo"/>
+                <a:latin typeface="Menlo" panose="020B0609030804020204"/>
               </a:rPr>
               <a:t>weather</a:t>
             </a:r>
+            <a:endParaRPr sz="1200" b="1">
+              <a:solidFill>
+                <a:srgbClr val="0A84FF"/>
+              </a:solidFill>
+              <a:latin typeface="Menlo" panose="020B0609030804020204"/>
+            </a:endParaRPr>
           </a:p>
         </p:txBody>
       </p:sp>
@@ -11779,7 +12579,7 @@
           <a:noFill/>
         </p:spPr>
         <p:txBody>
-          <a:bodyPr wrap="square" lIns="60000" rIns="60000" tIns="40000" bIns="40000" anchor="t">
+          <a:bodyPr wrap="square" lIns="60000" tIns="40000" rIns="60000" bIns="40000" anchor="t">
             <a:spAutoFit/>
           </a:bodyPr>
           <a:lstStyle/>
@@ -11790,10 +12590,16 @@
                 <a:solidFill>
                   <a:srgbClr val="8E8E93"/>
                 </a:solidFill>
-                <a:latin typeface="Menlo"/>
+                <a:latin typeface="Menlo" panose="020B0609030804020204"/>
               </a:rPr>
               <a:t>String</a:t>
             </a:r>
+            <a:endParaRPr sz="1100" b="0">
+              <a:solidFill>
+                <a:srgbClr val="8E8E93"/>
+              </a:solidFill>
+              <a:latin typeface="Menlo" panose="020B0609030804020204"/>
+            </a:endParaRPr>
           </a:p>
         </p:txBody>
       </p:sp>
@@ -11814,7 +12620,7 @@
           <a:noFill/>
         </p:spPr>
         <p:txBody>
-          <a:bodyPr wrap="square" lIns="60000" rIns="60000" tIns="40000" bIns="40000" anchor="t">
+          <a:bodyPr wrap="square" lIns="60000" tIns="40000" rIns="60000" bIns="40000" anchor="t">
             <a:spAutoFit/>
           </a:bodyPr>
           <a:lstStyle/>
@@ -11829,6 +12635,12 @@
               </a:rPr>
               <a:t>Raw value of the Weather enum</a:t>
             </a:r>
+            <a:endParaRPr sz="1000" b="0">
+              <a:solidFill>
+                <a:srgbClr val="1C1C1E"/>
+              </a:solidFill>
+              <a:latin typeface="SF Pro Text"/>
+            </a:endParaRPr>
           </a:p>
         </p:txBody>
       </p:sp>
@@ -11895,7 +12707,7 @@
           <a:noFill/>
         </p:spPr>
         <p:txBody>
-          <a:bodyPr wrap="square" lIns="60000" rIns="60000" tIns="40000" bIns="40000" anchor="t">
+          <a:bodyPr wrap="square" lIns="60000" tIns="40000" rIns="60000" bIns="40000" anchor="t">
             <a:spAutoFit/>
           </a:bodyPr>
           <a:lstStyle/>
@@ -11906,10 +12718,16 @@
                 <a:solidFill>
                   <a:srgbClr val="0A84FF"/>
                 </a:solidFill>
-                <a:latin typeface="Menlo"/>
+                <a:latin typeface="Menlo" panose="020B0609030804020204"/>
               </a:rPr>
               <a:t>location</a:t>
             </a:r>
+            <a:endParaRPr sz="1200" b="1">
+              <a:solidFill>
+                <a:srgbClr val="0A84FF"/>
+              </a:solidFill>
+              <a:latin typeface="Menlo" panose="020B0609030804020204"/>
+            </a:endParaRPr>
           </a:p>
         </p:txBody>
       </p:sp>
@@ -11930,7 +12748,7 @@
           <a:noFill/>
         </p:spPr>
         <p:txBody>
-          <a:bodyPr wrap="square" lIns="60000" rIns="60000" tIns="40000" bIns="40000" anchor="t">
+          <a:bodyPr wrap="square" lIns="60000" tIns="40000" rIns="60000" bIns="40000" anchor="t">
             <a:spAutoFit/>
           </a:bodyPr>
           <a:lstStyle/>
@@ -11941,10 +12759,16 @@
                 <a:solidFill>
                   <a:srgbClr val="8E8E93"/>
                 </a:solidFill>
-                <a:latin typeface="Menlo"/>
+                <a:latin typeface="Menlo" panose="020B0609030804020204"/>
               </a:rPr>
               <a:t>String?</a:t>
             </a:r>
+            <a:endParaRPr sz="1100" b="0">
+              <a:solidFill>
+                <a:srgbClr val="8E8E93"/>
+              </a:solidFill>
+              <a:latin typeface="Menlo" panose="020B0609030804020204"/>
+            </a:endParaRPr>
           </a:p>
         </p:txBody>
       </p:sp>
@@ -11965,7 +12789,7 @@
           <a:noFill/>
         </p:spPr>
         <p:txBody>
-          <a:bodyPr wrap="square" lIns="60000" rIns="60000" tIns="40000" bIns="40000" anchor="t">
+          <a:bodyPr wrap="square" lIns="60000" tIns="40000" rIns="60000" bIns="40000" anchor="t">
             <a:spAutoFit/>
           </a:bodyPr>
           <a:lstStyle/>
@@ -11980,6 +12804,12 @@
               </a:rPr>
               <a:t>Optional bonus field</a:t>
             </a:r>
+            <a:endParaRPr sz="1000" b="0">
+              <a:solidFill>
+                <a:srgbClr val="1C1C1E"/>
+              </a:solidFill>
+              <a:latin typeface="SF Pro Text"/>
+            </a:endParaRPr>
           </a:p>
         </p:txBody>
       </p:sp>
@@ -12046,7 +12876,7 @@
           <a:noFill/>
         </p:spPr>
         <p:txBody>
-          <a:bodyPr wrap="square" lIns="60000" rIns="60000" tIns="40000" bIns="40000" anchor="t">
+          <a:bodyPr wrap="square" lIns="60000" tIns="40000" rIns="60000" bIns="40000" anchor="t">
             <a:spAutoFit/>
           </a:bodyPr>
           <a:lstStyle/>
@@ -12057,10 +12887,16 @@
                 <a:solidFill>
                   <a:srgbClr val="0A84FF"/>
                 </a:solidFill>
-                <a:latin typeface="Menlo"/>
+                <a:latin typeface="Menlo" panose="020B0609030804020204"/>
               </a:rPr>
               <a:t>photos</a:t>
             </a:r>
+            <a:endParaRPr sz="1200" b="1">
+              <a:solidFill>
+                <a:srgbClr val="0A84FF"/>
+              </a:solidFill>
+              <a:latin typeface="Menlo" panose="020B0609030804020204"/>
+            </a:endParaRPr>
           </a:p>
         </p:txBody>
       </p:sp>
@@ -12081,7 +12917,7 @@
           <a:noFill/>
         </p:spPr>
         <p:txBody>
-          <a:bodyPr wrap="square" lIns="60000" rIns="60000" tIns="40000" bIns="40000" anchor="t">
+          <a:bodyPr wrap="square" lIns="60000" tIns="40000" rIns="60000" bIns="40000" anchor="t">
             <a:spAutoFit/>
           </a:bodyPr>
           <a:lstStyle/>
@@ -12092,10 +12928,16 @@
                 <a:solidFill>
                   <a:srgbClr val="8E8E93"/>
                 </a:solidFill>
-                <a:latin typeface="Menlo"/>
+                <a:latin typeface="Menlo" panose="020B0609030804020204"/>
               </a:rPr>
               <a:t>Transformable</a:t>
             </a:r>
+            <a:endParaRPr sz="1100" b="0">
+              <a:solidFill>
+                <a:srgbClr val="8E8E93"/>
+              </a:solidFill>
+              <a:latin typeface="Menlo" panose="020B0609030804020204"/>
+            </a:endParaRPr>
           </a:p>
         </p:txBody>
       </p:sp>
@@ -12116,7 +12958,7 @@
           <a:noFill/>
         </p:spPr>
         <p:txBody>
-          <a:bodyPr wrap="square" lIns="60000" rIns="60000" tIns="40000" bIns="40000" anchor="t">
+          <a:bodyPr wrap="square" lIns="60000" tIns="40000" rIns="60000" bIns="40000" anchor="t">
             <a:spAutoFit/>
           </a:bodyPr>
           <a:lstStyle/>
@@ -12131,6 +12973,12 @@
               </a:rPr>
               <a:t>[Data] — JPEGs via NSSecureUnarchiveFromData</a:t>
             </a:r>
+            <a:endParaRPr sz="1000" b="0">
+              <a:solidFill>
+                <a:srgbClr val="1C1C1E"/>
+              </a:solidFill>
+              <a:latin typeface="SF Pro Text"/>
+            </a:endParaRPr>
           </a:p>
         </p:txBody>
       </p:sp>
@@ -12197,7 +13045,7 @@
           <a:noFill/>
         </p:spPr>
         <p:txBody>
-          <a:bodyPr wrap="square" lIns="140000" rIns="80000" tIns="100000">
+          <a:bodyPr wrap="square" lIns="140000" tIns="100000" rIns="80000">
             <a:spAutoFit/>
           </a:bodyPr>
           <a:lstStyle/>
@@ -12208,10 +13056,16 @@
                 <a:solidFill>
                   <a:srgbClr val="F2F2F7"/>
                 </a:solidFill>
-                <a:latin typeface="Menlo"/>
+                <a:latin typeface="Menlo" panose="020B0609030804020204"/>
               </a:rPr>
               <a:t>// Journal/Models/JournalEntry+CoreDataProperties.swift</a:t>
             </a:r>
+            <a:endParaRPr sz="1200">
+              <a:solidFill>
+                <a:srgbClr val="F2F2F7"/>
+              </a:solidFill>
+              <a:latin typeface="Menlo" panose="020B0609030804020204"/>
+            </a:endParaRPr>
           </a:p>
           <a:p>
             <a:pPr algn="l"/>
@@ -12220,10 +13074,16 @@
                 <a:solidFill>
                   <a:srgbClr val="F2F2F7"/>
                 </a:solidFill>
-                <a:latin typeface="Menlo"/>
+                <a:latin typeface="Menlo" panose="020B0609030804020204"/>
               </a:rPr>
               <a:t>extension JournalEntry {</a:t>
             </a:r>
+            <a:endParaRPr sz="1200">
+              <a:solidFill>
+                <a:srgbClr val="F2F2F7"/>
+              </a:solidFill>
+              <a:latin typeface="Menlo" panose="020B0609030804020204"/>
+            </a:endParaRPr>
           </a:p>
           <a:p>
             <a:pPr algn="l"/>
@@ -12232,10 +13092,16 @@
                 <a:solidFill>
                   <a:srgbClr val="F2F2F7"/>
                 </a:solidFill>
-                <a:latin typeface="Menlo"/>
+                <a:latin typeface="Menlo" panose="020B0609030804020204"/>
               </a:rPr>
               <a:t>  @NSManaged public var id: UUID?</a:t>
             </a:r>
+            <a:endParaRPr sz="1200">
+              <a:solidFill>
+                <a:srgbClr val="F2F2F7"/>
+              </a:solidFill>
+              <a:latin typeface="Menlo" panose="020B0609030804020204"/>
+            </a:endParaRPr>
           </a:p>
           <a:p>
             <a:pPr algn="l"/>
@@ -12244,10 +13110,16 @@
                 <a:solidFill>
                   <a:srgbClr val="F2F2F7"/>
                 </a:solidFill>
-                <a:latin typeface="Menlo"/>
+                <a:latin typeface="Menlo" panose="020B0609030804020204"/>
               </a:rPr>
               <a:t>  @NSManaged public var date: Date?</a:t>
             </a:r>
+            <a:endParaRPr sz="1200">
+              <a:solidFill>
+                <a:srgbClr val="F2F2F7"/>
+              </a:solidFill>
+              <a:latin typeface="Menlo" panose="020B0609030804020204"/>
+            </a:endParaRPr>
           </a:p>
           <a:p>
             <a:pPr algn="l"/>
@@ -12256,10 +13128,16 @@
                 <a:solidFill>
                   <a:srgbClr val="F2F2F7"/>
                 </a:solidFill>
-                <a:latin typeface="Menlo"/>
+                <a:latin typeface="Menlo" panose="020B0609030804020204"/>
               </a:rPr>
               <a:t>  @NSManaged public var title: String?</a:t>
             </a:r>
+            <a:endParaRPr sz="1200">
+              <a:solidFill>
+                <a:srgbClr val="F2F2F7"/>
+              </a:solidFill>
+              <a:latin typeface="Menlo" panose="020B0609030804020204"/>
+            </a:endParaRPr>
           </a:p>
           <a:p>
             <a:pPr algn="l"/>
@@ -12268,10 +13146,16 @@
                 <a:solidFill>
                   <a:srgbClr val="F2F2F7"/>
                 </a:solidFill>
-                <a:latin typeface="Menlo"/>
+                <a:latin typeface="Menlo" panose="020B0609030804020204"/>
               </a:rPr>
               <a:t>  @NSManaged public var content: String?</a:t>
             </a:r>
+            <a:endParaRPr sz="1200">
+              <a:solidFill>
+                <a:srgbClr val="F2F2F7"/>
+              </a:solidFill>
+              <a:latin typeface="Menlo" panose="020B0609030804020204"/>
+            </a:endParaRPr>
           </a:p>
           <a:p>
             <a:pPr algn="l"/>
@@ -12280,10 +13164,16 @@
                 <a:solidFill>
                   <a:srgbClr val="F2F2F7"/>
                 </a:solidFill>
-                <a:latin typeface="Menlo"/>
+                <a:latin typeface="Menlo" panose="020B0609030804020204"/>
               </a:rPr>
               <a:t>  @NSManaged public var weather: String?</a:t>
             </a:r>
+            <a:endParaRPr sz="1200">
+              <a:solidFill>
+                <a:srgbClr val="F2F2F7"/>
+              </a:solidFill>
+              <a:latin typeface="Menlo" panose="020B0609030804020204"/>
+            </a:endParaRPr>
           </a:p>
           <a:p>
             <a:pPr algn="l"/>
@@ -12292,10 +13182,16 @@
                 <a:solidFill>
                   <a:srgbClr val="F2F2F7"/>
                 </a:solidFill>
-                <a:latin typeface="Menlo"/>
+                <a:latin typeface="Menlo" panose="020B0609030804020204"/>
               </a:rPr>
               <a:t>  @NSManaged public var location: String?</a:t>
             </a:r>
+            <a:endParaRPr sz="1200">
+              <a:solidFill>
+                <a:srgbClr val="F2F2F7"/>
+              </a:solidFill>
+              <a:latin typeface="Menlo" panose="020B0609030804020204"/>
+            </a:endParaRPr>
           </a:p>
           <a:p>
             <a:pPr algn="l"/>
@@ -12304,10 +13200,16 @@
                 <a:solidFill>
                   <a:srgbClr val="F2F2F7"/>
                 </a:solidFill>
-                <a:latin typeface="Menlo"/>
+                <a:latin typeface="Menlo" panose="020B0609030804020204"/>
               </a:rPr>
               <a:t>  @NSManaged public var photos: NSObject?</a:t>
             </a:r>
+            <a:endParaRPr sz="1200">
+              <a:solidFill>
+                <a:srgbClr val="F2F2F7"/>
+              </a:solidFill>
+              <a:latin typeface="Menlo" panose="020B0609030804020204"/>
+            </a:endParaRPr>
           </a:p>
           <a:p>
             <a:pPr algn="l"/>
@@ -12316,10 +13218,16 @@
                 <a:solidFill>
                   <a:srgbClr val="F2F2F7"/>
                 </a:solidFill>
-                <a:latin typeface="Menlo"/>
+                <a:latin typeface="Menlo" panose="020B0609030804020204"/>
               </a:rPr>
               <a:t>}</a:t>
             </a:r>
+            <a:endParaRPr sz="1200">
+              <a:solidFill>
+                <a:srgbClr val="F2F2F7"/>
+              </a:solidFill>
+              <a:latin typeface="Menlo" panose="020B0609030804020204"/>
+            </a:endParaRPr>
           </a:p>
           <a:p>
             <a:pPr algn="l"/>
@@ -12328,10 +13236,16 @@
                 <a:solidFill>
                   <a:srgbClr val="F2F2F7"/>
                 </a:solidFill>
-                <a:latin typeface="Menlo"/>
+                <a:latin typeface="Menlo" panose="020B0609030804020204"/>
               </a:rPr>
               <a:t> </a:t>
             </a:r>
+            <a:endParaRPr sz="1200">
+              <a:solidFill>
+                <a:srgbClr val="F2F2F7"/>
+              </a:solidFill>
+              <a:latin typeface="Menlo" panose="020B0609030804020204"/>
+            </a:endParaRPr>
           </a:p>
           <a:p>
             <a:pPr algn="l"/>
@@ -12340,10 +13254,16 @@
                 <a:solidFill>
                   <a:srgbClr val="F2F2F7"/>
                 </a:solidFill>
-                <a:latin typeface="Menlo"/>
+                <a:latin typeface="Menlo" panose="020B0609030804020204"/>
               </a:rPr>
               <a:t>extension JournalEntry: Identifiable {}</a:t>
             </a:r>
+            <a:endParaRPr sz="1200">
+              <a:solidFill>
+                <a:srgbClr val="F2F2F7"/>
+              </a:solidFill>
+              <a:latin typeface="Menlo" panose="020B0609030804020204"/>
+            </a:endParaRPr>
           </a:p>
         </p:txBody>
       </p:sp>
@@ -12410,7 +13330,7 @@
           <a:noFill/>
         </p:spPr>
         <p:txBody>
-          <a:bodyPr wrap="square" lIns="60000" rIns="60000" tIns="40000" bIns="40000" anchor="t">
+          <a:bodyPr wrap="square" lIns="60000" tIns="40000" rIns="60000" bIns="40000" anchor="t">
             <a:spAutoFit/>
           </a:bodyPr>
           <a:lstStyle/>
@@ -12425,6 +13345,12 @@
               </a:rPr>
               <a:t>⚠️  Codegen = Manual/None  ·  Transformer = NSSecureUnarchiveFromData</a:t>
             </a:r>
+            <a:endParaRPr sz="1200" b="1">
+              <a:solidFill>
+                <a:srgbClr val="FF9500"/>
+              </a:solidFill>
+              <a:latin typeface="SF Pro Display"/>
+            </a:endParaRPr>
           </a:p>
         </p:txBody>
       </p:sp>
@@ -12445,7 +13371,7 @@
           <a:noFill/>
         </p:spPr>
         <p:txBody>
-          <a:bodyPr wrap="square" lIns="60000" rIns="60000" tIns="40000" bIns="40000" anchor="t">
+          <a:bodyPr wrap="square" lIns="60000" tIns="40000" rIns="60000" bIns="40000" anchor="t">
             <a:spAutoFit/>
           </a:bodyPr>
           <a:lstStyle/>
@@ -12460,6 +13386,12 @@
               </a:rPr>
               <a:t>Set both in the Data Model Inspector — otherwise Xcode auto-generates the class (duplicate-symbol error) or the photos attribute fails to decode at fetch time.</a:t>
             </a:r>
+            <a:endParaRPr sz="1100" b="0">
+              <a:solidFill>
+                <a:srgbClr val="1C1C1E"/>
+              </a:solidFill>
+              <a:latin typeface="SF Pro Text"/>
+            </a:endParaRPr>
           </a:p>
         </p:txBody>
       </p:sp>
@@ -12480,7 +13412,7 @@
           <a:noFill/>
         </p:spPr>
         <p:txBody>
-          <a:bodyPr wrap="square" lIns="60000" rIns="60000" tIns="40000" bIns="40000" anchor="t">
+          <a:bodyPr wrap="square" lIns="60000" tIns="40000" rIns="60000" bIns="40000" anchor="t">
             <a:spAutoFit/>
           </a:bodyPr>
           <a:lstStyle/>
@@ -12495,6 +13427,12 @@
               </a:rPr>
               <a:t>Week 7 · Daily Journal · SmartFarmerAssistant</a:t>
             </a:r>
+            <a:endParaRPr sz="1000" b="0">
+              <a:solidFill>
+                <a:srgbClr val="8E8E93"/>
+              </a:solidFill>
+              <a:latin typeface="SF Pro Text"/>
+            </a:endParaRPr>
           </a:p>
         </p:txBody>
       </p:sp>
@@ -12515,7 +13453,7 @@
           <a:noFill/>
         </p:spPr>
         <p:txBody>
-          <a:bodyPr wrap="square" lIns="60000" rIns="60000" tIns="40000" bIns="40000" anchor="t">
+          <a:bodyPr wrap="square" lIns="60000" tIns="40000" rIns="60000" bIns="40000" anchor="t">
             <a:spAutoFit/>
           </a:bodyPr>
           <a:lstStyle/>
@@ -12530,6 +13468,12 @@
               </a:rPr>
               <a:t>5 / 12</a:t>
             </a:r>
+            <a:endParaRPr sz="1000" b="0">
+              <a:solidFill>
+                <a:srgbClr val="8E8E93"/>
+              </a:solidFill>
+              <a:latin typeface="SF Pro Text"/>
+            </a:endParaRPr>
           </a:p>
         </p:txBody>
       </p:sp>
@@ -12545,7 +13489,7 @@
 </file>
 
 <file path=ppt/slides/slide6.xml><?xml version="1.0" encoding="utf-8"?>
-<p:sld xmlns:a="http://schemas.openxmlformats.org/drawingml/2006/main" xmlns:p="http://schemas.openxmlformats.org/presentationml/2006/main" xmlns:r="http://schemas.openxmlformats.org/officeDocument/2006/relationships">
+<p:sld xmlns:a="http://schemas.openxmlformats.org/drawingml/2006/main" xmlns:r="http://schemas.openxmlformats.org/officeDocument/2006/relationships" xmlns:p="http://schemas.openxmlformats.org/presentationml/2006/main">
   <p:cSld>
     <p:spTree>
       <p:nvGrpSpPr>
@@ -12657,7 +13601,7 @@
           <a:noFill/>
         </p:spPr>
         <p:txBody>
-          <a:bodyPr wrap="square" lIns="60000" rIns="60000" tIns="40000" bIns="40000" anchor="t">
+          <a:bodyPr wrap="square" lIns="60000" tIns="40000" rIns="60000" bIns="40000" anchor="t">
             <a:spAutoFit/>
           </a:bodyPr>
           <a:lstStyle/>
@@ -12672,6 +13616,12 @@
               </a:rPr>
               <a:t>LESSON 7.2</a:t>
             </a:r>
+            <a:endParaRPr sz="1200" b="1">
+              <a:solidFill>
+                <a:srgbClr val="A052D4"/>
+              </a:solidFill>
+              <a:latin typeface="SF Pro Text"/>
+            </a:endParaRPr>
           </a:p>
         </p:txBody>
       </p:sp>
@@ -12692,7 +13642,7 @@
           <a:noFill/>
         </p:spPr>
         <p:txBody>
-          <a:bodyPr wrap="square" lIns="60000" rIns="60000" tIns="40000" bIns="40000" anchor="t">
+          <a:bodyPr wrap="square" lIns="60000" tIns="40000" rIns="60000" bIns="40000" anchor="t">
             <a:spAutoFit/>
           </a:bodyPr>
           <a:lstStyle/>
@@ -12707,6 +13657,12 @@
               </a:rPr>
               <a:t>Timeline UI — newest first, grouped by day</a:t>
             </a:r>
+            <a:endParaRPr sz="3000" b="1">
+              <a:solidFill>
+                <a:srgbClr val="1C1C1E"/>
+              </a:solidFill>
+              <a:latin typeface="SF Pro Display"/>
+            </a:endParaRPr>
           </a:p>
         </p:txBody>
       </p:sp>
@@ -12727,7 +13683,7 @@
           <a:noFill/>
         </p:spPr>
         <p:txBody>
-          <a:bodyPr wrap="square" lIns="80000" rIns="60000" tIns="40000">
+          <a:bodyPr wrap="square" lIns="80000" tIns="40000" rIns="60000">
             <a:spAutoFit/>
           </a:bodyPr>
           <a:lstStyle/>
@@ -12746,6 +13702,12 @@
               </a:rPr>
               <a:t>•  @FetchRequest(sort: date, ascending: false)</a:t>
             </a:r>
+            <a:endParaRPr sz="1500">
+              <a:solidFill>
+                <a:srgbClr val="1C1C1E"/>
+              </a:solidFill>
+              <a:latin typeface="SF Pro Text"/>
+            </a:endParaRPr>
           </a:p>
           <a:p>
             <a:pPr algn="l">
@@ -12762,6 +13724,12 @@
               </a:rPr>
               <a:t>•  Dictionary(grouping:by:) keyed by Calendar.startOfDay</a:t>
             </a:r>
+            <a:endParaRPr sz="1500">
+              <a:solidFill>
+                <a:srgbClr val="1C1C1E"/>
+              </a:solidFill>
+              <a:latin typeface="SF Pro Text"/>
+            </a:endParaRPr>
           </a:p>
           <a:p>
             <a:pPr algn="l">
@@ -12778,6 +13746,12 @@
               </a:rPr>
               <a:t>•  Each day → its own List Section with a formatted header</a:t>
             </a:r>
+            <a:endParaRPr sz="1500">
+              <a:solidFill>
+                <a:srgbClr val="1C1C1E"/>
+              </a:solidFill>
+              <a:latin typeface="SF Pro Text"/>
+            </a:endParaRPr>
           </a:p>
           <a:p>
             <a:pPr algn="l">
@@ -12794,6 +13768,12 @@
               </a:rPr>
               <a:t>•  Row: time · title · snippet · weather icon · photo count</a:t>
             </a:r>
+            <a:endParaRPr sz="1500">
+              <a:solidFill>
+                <a:srgbClr val="1C1C1E"/>
+              </a:solidFill>
+              <a:latin typeface="SF Pro Text"/>
+            </a:endParaRPr>
           </a:p>
           <a:p>
             <a:pPr algn="l">
@@ -12810,6 +13790,12 @@
               </a:rPr>
               <a:t>•  PlainListStyle for Apple Notes feel (no inset gaps)</a:t>
             </a:r>
+            <a:endParaRPr sz="1500">
+              <a:solidFill>
+                <a:srgbClr val="1C1C1E"/>
+              </a:solidFill>
+              <a:latin typeface="SF Pro Text"/>
+            </a:endParaRPr>
           </a:p>
           <a:p>
             <a:pPr algn="l">
@@ -12826,6 +13812,12 @@
               </a:rPr>
               <a:t>•  .onDelete deletes from viewContext; fetch re-runs automatically</a:t>
             </a:r>
+            <a:endParaRPr sz="1500">
+              <a:solidFill>
+                <a:srgbClr val="1C1C1E"/>
+              </a:solidFill>
+              <a:latin typeface="SF Pro Text"/>
+            </a:endParaRPr>
           </a:p>
         </p:txBody>
       </p:sp>
@@ -12892,7 +13884,7 @@
           <a:noFill/>
         </p:spPr>
         <p:txBody>
-          <a:bodyPr wrap="square" lIns="60000" rIns="60000" tIns="40000" bIns="40000" anchor="t">
+          <a:bodyPr wrap="square" lIns="60000" tIns="40000" rIns="60000" bIns="40000" anchor="t">
             <a:spAutoFit/>
           </a:bodyPr>
           <a:lstStyle/>
@@ -12907,6 +13899,12 @@
               </a:rPr>
               <a:t>TUESDAY, APRIL 23</a:t>
             </a:r>
+            <a:endParaRPr sz="1200" b="1">
+              <a:solidFill>
+                <a:srgbClr val="8E8E93"/>
+              </a:solidFill>
+              <a:latin typeface="SF Pro Display"/>
+            </a:endParaRPr>
           </a:p>
         </p:txBody>
       </p:sp>
@@ -12927,7 +13925,7 @@
           <a:noFill/>
         </p:spPr>
         <p:txBody>
-          <a:bodyPr wrap="square" lIns="60000" rIns="60000" tIns="40000" bIns="40000" anchor="t">
+          <a:bodyPr wrap="square" lIns="60000" tIns="40000" rIns="60000" bIns="40000" anchor="t">
             <a:spAutoFit/>
           </a:bodyPr>
           <a:lstStyle/>
@@ -12938,10 +13936,16 @@
                 <a:solidFill>
                   <a:srgbClr val="8E8E93"/>
                 </a:solidFill>
-                <a:latin typeface="Menlo"/>
+                <a:latin typeface="Menlo" panose="020B0609030804020204"/>
               </a:rPr>
               <a:t>08:14</a:t>
             </a:r>
+            <a:endParaRPr sz="1100" b="0">
+              <a:solidFill>
+                <a:srgbClr val="8E8E93"/>
+              </a:solidFill>
+              <a:latin typeface="Menlo" panose="020B0609030804020204"/>
+            </a:endParaRPr>
           </a:p>
         </p:txBody>
       </p:sp>
@@ -12962,7 +13966,7 @@
           <a:noFill/>
         </p:spPr>
         <p:txBody>
-          <a:bodyPr wrap="square" lIns="60000" rIns="60000" tIns="40000" bIns="40000" anchor="t">
+          <a:bodyPr wrap="square" lIns="60000" tIns="40000" rIns="60000" bIns="40000" anchor="t">
             <a:spAutoFit/>
           </a:bodyPr>
           <a:lstStyle/>
@@ -12977,6 +13981,12 @@
               </a:rPr>
               <a:t>Morning fog over the rice</a:t>
             </a:r>
+            <a:endParaRPr sz="1300" b="1">
+              <a:solidFill>
+                <a:srgbClr val="1C1C1E"/>
+              </a:solidFill>
+              <a:latin typeface="SF Pro Display"/>
+            </a:endParaRPr>
           </a:p>
         </p:txBody>
       </p:sp>
@@ -13040,7 +14050,7 @@
           <a:noFill/>
         </p:spPr>
         <p:txBody>
-          <a:bodyPr wrap="square" lIns="60000" rIns="60000" tIns="40000" bIns="40000" anchor="t">
+          <a:bodyPr wrap="square" lIns="60000" tIns="40000" rIns="60000" bIns="40000" anchor="t">
             <a:spAutoFit/>
           </a:bodyPr>
           <a:lstStyle/>
@@ -13055,6 +14065,12 @@
               </a:rPr>
               <a:t>📷 2</a:t>
             </a:r>
+            <a:endParaRPr sz="1000" b="0">
+              <a:solidFill>
+                <a:srgbClr val="8E8E93"/>
+              </a:solidFill>
+              <a:latin typeface="SF Pro Text"/>
+            </a:endParaRPr>
           </a:p>
         </p:txBody>
       </p:sp>
@@ -13075,7 +14091,7 @@
           <a:noFill/>
         </p:spPr>
         <p:txBody>
-          <a:bodyPr wrap="square" lIns="60000" rIns="60000" tIns="40000" bIns="40000" anchor="t">
+          <a:bodyPr wrap="square" lIns="60000" tIns="40000" rIns="60000" bIns="40000" anchor="t">
             <a:spAutoFit/>
           </a:bodyPr>
           <a:lstStyle/>
@@ -13086,10 +14102,16 @@
                 <a:solidFill>
                   <a:srgbClr val="8E8E93"/>
                 </a:solidFill>
-                <a:latin typeface="Menlo"/>
+                <a:latin typeface="Menlo" panose="020B0609030804020204"/>
               </a:rPr>
               <a:t>17:02</a:t>
             </a:r>
+            <a:endParaRPr sz="1100" b="0">
+              <a:solidFill>
+                <a:srgbClr val="8E8E93"/>
+              </a:solidFill>
+              <a:latin typeface="Menlo" panose="020B0609030804020204"/>
+            </a:endParaRPr>
           </a:p>
         </p:txBody>
       </p:sp>
@@ -13110,7 +14132,7 @@
           <a:noFill/>
         </p:spPr>
         <p:txBody>
-          <a:bodyPr wrap="square" lIns="60000" rIns="60000" tIns="40000" bIns="40000" anchor="t">
+          <a:bodyPr wrap="square" lIns="60000" tIns="40000" rIns="60000" bIns="40000" anchor="t">
             <a:spAutoFit/>
           </a:bodyPr>
           <a:lstStyle/>
@@ -13125,6 +14147,12 @@
               </a:rPr>
               <a:t>Harvest prep — met the team</a:t>
             </a:r>
+            <a:endParaRPr sz="1300" b="1">
+              <a:solidFill>
+                <a:srgbClr val="1C1C1E"/>
+              </a:solidFill>
+              <a:latin typeface="SF Pro Display"/>
+            </a:endParaRPr>
           </a:p>
         </p:txBody>
       </p:sp>
@@ -13188,7 +14216,7 @@
           <a:noFill/>
         </p:spPr>
         <p:txBody>
-          <a:bodyPr wrap="square" lIns="60000" rIns="60000" tIns="40000" bIns="40000" anchor="t">
+          <a:bodyPr wrap="square" lIns="60000" tIns="40000" rIns="60000" bIns="40000" anchor="t">
             <a:spAutoFit/>
           </a:bodyPr>
           <a:lstStyle/>
@@ -13203,6 +14231,12 @@
               </a:rPr>
               <a:t>MONDAY, APRIL 22</a:t>
             </a:r>
+            <a:endParaRPr sz="1200" b="1">
+              <a:solidFill>
+                <a:srgbClr val="8E8E93"/>
+              </a:solidFill>
+              <a:latin typeface="SF Pro Display"/>
+            </a:endParaRPr>
           </a:p>
         </p:txBody>
       </p:sp>
@@ -13223,7 +14257,7 @@
           <a:noFill/>
         </p:spPr>
         <p:txBody>
-          <a:bodyPr wrap="square" lIns="60000" rIns="60000" tIns="40000" bIns="40000" anchor="t">
+          <a:bodyPr wrap="square" lIns="60000" tIns="40000" rIns="60000" bIns="40000" anchor="t">
             <a:spAutoFit/>
           </a:bodyPr>
           <a:lstStyle/>
@@ -13234,10 +14268,16 @@
                 <a:solidFill>
                   <a:srgbClr val="8E8E93"/>
                 </a:solidFill>
-                <a:latin typeface="Menlo"/>
+                <a:latin typeface="Menlo" panose="020B0609030804020204"/>
               </a:rPr>
               <a:t>09:30</a:t>
             </a:r>
+            <a:endParaRPr sz="1100" b="0">
+              <a:solidFill>
+                <a:srgbClr val="8E8E93"/>
+              </a:solidFill>
+              <a:latin typeface="Menlo" panose="020B0609030804020204"/>
+            </a:endParaRPr>
           </a:p>
         </p:txBody>
       </p:sp>
@@ -13258,7 +14298,7 @@
           <a:noFill/>
         </p:spPr>
         <p:txBody>
-          <a:bodyPr wrap="square" lIns="60000" rIns="60000" tIns="40000" bIns="40000" anchor="t">
+          <a:bodyPr wrap="square" lIns="60000" tIns="40000" rIns="60000" bIns="40000" anchor="t">
             <a:spAutoFit/>
           </a:bodyPr>
           <a:lstStyle/>
@@ -13273,6 +14313,12 @@
               </a:rPr>
               <a:t>Heavy rain — stayed indoors</a:t>
             </a:r>
+            <a:endParaRPr sz="1300" b="1">
+              <a:solidFill>
+                <a:srgbClr val="1C1C1E"/>
+              </a:solidFill>
+              <a:latin typeface="SF Pro Display"/>
+            </a:endParaRPr>
           </a:p>
         </p:txBody>
       </p:sp>
@@ -13336,7 +14382,7 @@
           <a:noFill/>
         </p:spPr>
         <p:txBody>
-          <a:bodyPr wrap="square" lIns="60000" rIns="60000" tIns="40000" bIns="40000" anchor="t">
+          <a:bodyPr wrap="square" lIns="60000" tIns="40000" rIns="60000" bIns="40000" anchor="t">
             <a:spAutoFit/>
           </a:bodyPr>
           <a:lstStyle/>
@@ -13351,6 +14397,12 @@
               </a:rPr>
               <a:t>📷 1</a:t>
             </a:r>
+            <a:endParaRPr sz="1000" b="0">
+              <a:solidFill>
+                <a:srgbClr val="8E8E93"/>
+              </a:solidFill>
+              <a:latin typeface="SF Pro Text"/>
+            </a:endParaRPr>
           </a:p>
         </p:txBody>
       </p:sp>
@@ -13371,7 +14423,7 @@
           <a:noFill/>
         </p:spPr>
         <p:txBody>
-          <a:bodyPr wrap="square" lIns="60000" rIns="60000" tIns="40000" bIns="40000" anchor="t">
+          <a:bodyPr wrap="square" lIns="60000" tIns="40000" rIns="60000" bIns="40000" anchor="t">
             <a:spAutoFit/>
           </a:bodyPr>
           <a:lstStyle/>
@@ -13382,10 +14434,16 @@
                 <a:solidFill>
                   <a:srgbClr val="8E8E93"/>
                 </a:solidFill>
-                <a:latin typeface="Menlo"/>
+                <a:latin typeface="Menlo" panose="020B0609030804020204"/>
               </a:rPr>
               <a:t>20:11</a:t>
             </a:r>
+            <a:endParaRPr sz="1100" b="0">
+              <a:solidFill>
+                <a:srgbClr val="8E8E93"/>
+              </a:solidFill>
+              <a:latin typeface="Menlo" panose="020B0609030804020204"/>
+            </a:endParaRPr>
           </a:p>
         </p:txBody>
       </p:sp>
@@ -13406,7 +14464,7 @@
           <a:noFill/>
         </p:spPr>
         <p:txBody>
-          <a:bodyPr wrap="square" lIns="60000" rIns="60000" tIns="40000" bIns="40000" anchor="t">
+          <a:bodyPr wrap="square" lIns="60000" tIns="40000" rIns="60000" bIns="40000" anchor="t">
             <a:spAutoFit/>
           </a:bodyPr>
           <a:lstStyle/>
@@ -13421,6 +14479,12 @@
               </a:rPr>
               <a:t>Market prices update</a:t>
             </a:r>
+            <a:endParaRPr sz="1300" b="1">
+              <a:solidFill>
+                <a:srgbClr val="1C1C1E"/>
+              </a:solidFill>
+              <a:latin typeface="SF Pro Display"/>
+            </a:endParaRPr>
           </a:p>
         </p:txBody>
       </p:sp>
@@ -13484,7 +14548,7 @@
           <a:noFill/>
         </p:spPr>
         <p:txBody>
-          <a:bodyPr wrap="square" lIns="60000" rIns="60000" tIns="40000" bIns="40000" anchor="t">
+          <a:bodyPr wrap="square" lIns="60000" tIns="40000" rIns="60000" bIns="40000" anchor="t">
             <a:spAutoFit/>
           </a:bodyPr>
           <a:lstStyle/>
@@ -13499,6 +14563,12 @@
               </a:rPr>
               <a:t>Week 7 · Daily Journal · SmartFarmerAssistant</a:t>
             </a:r>
+            <a:endParaRPr sz="1000" b="0">
+              <a:solidFill>
+                <a:srgbClr val="8E8E93"/>
+              </a:solidFill>
+              <a:latin typeface="SF Pro Text"/>
+            </a:endParaRPr>
           </a:p>
         </p:txBody>
       </p:sp>
@@ -13519,7 +14589,7 @@
           <a:noFill/>
         </p:spPr>
         <p:txBody>
-          <a:bodyPr wrap="square" lIns="60000" rIns="60000" tIns="40000" bIns="40000" anchor="t">
+          <a:bodyPr wrap="square" lIns="60000" tIns="40000" rIns="60000" bIns="40000" anchor="t">
             <a:spAutoFit/>
           </a:bodyPr>
           <a:lstStyle/>
@@ -13534,6 +14604,12 @@
               </a:rPr>
               <a:t>6 / 12</a:t>
             </a:r>
+            <a:endParaRPr sz="1000" b="0">
+              <a:solidFill>
+                <a:srgbClr val="8E8E93"/>
+              </a:solidFill>
+              <a:latin typeface="SF Pro Text"/>
+            </a:endParaRPr>
           </a:p>
         </p:txBody>
       </p:sp>
@@ -13549,7 +14625,7 @@
 </file>
 
 <file path=ppt/slides/slide7.xml><?xml version="1.0" encoding="utf-8"?>
-<p:sld xmlns:a="http://schemas.openxmlformats.org/drawingml/2006/main" xmlns:p="http://schemas.openxmlformats.org/presentationml/2006/main" xmlns:r="http://schemas.openxmlformats.org/officeDocument/2006/relationships">
+<p:sld xmlns:a="http://schemas.openxmlformats.org/drawingml/2006/main" xmlns:r="http://schemas.openxmlformats.org/officeDocument/2006/relationships" xmlns:p="http://schemas.openxmlformats.org/presentationml/2006/main">
   <p:cSld>
     <p:spTree>
       <p:nvGrpSpPr>
@@ -13661,7 +14737,7 @@
           <a:noFill/>
         </p:spPr>
         <p:txBody>
-          <a:bodyPr wrap="square" lIns="60000" rIns="60000" tIns="40000" bIns="40000" anchor="t">
+          <a:bodyPr wrap="square" lIns="60000" tIns="40000" rIns="60000" bIns="40000" anchor="t">
             <a:spAutoFit/>
           </a:bodyPr>
           <a:lstStyle/>
@@ -13676,6 +14752,12 @@
               </a:rPr>
               <a:t>LESSON 7.3</a:t>
             </a:r>
+            <a:endParaRPr sz="1200" b="1">
+              <a:solidFill>
+                <a:srgbClr val="A052D4"/>
+              </a:solidFill>
+              <a:latin typeface="SF Pro Text"/>
+            </a:endParaRPr>
           </a:p>
         </p:txBody>
       </p:sp>
@@ -13696,7 +14778,7 @@
           <a:noFill/>
         </p:spPr>
         <p:txBody>
-          <a:bodyPr wrap="square" lIns="60000" rIns="60000" tIns="40000" bIns="40000" anchor="t">
+          <a:bodyPr wrap="square" lIns="60000" tIns="40000" rIns="60000" bIns="40000" anchor="t">
             <a:spAutoFit/>
           </a:bodyPr>
           <a:lstStyle/>
@@ -13711,6 +14793,12 @@
               </a:rPr>
               <a:t>Weather system — enum + SF Symbol + tint</a:t>
             </a:r>
+            <a:endParaRPr sz="3000" b="1">
+              <a:solidFill>
+                <a:srgbClr val="1C1C1E"/>
+              </a:solidFill>
+              <a:latin typeface="SF Pro Display"/>
+            </a:endParaRPr>
           </a:p>
         </p:txBody>
       </p:sp>
@@ -13822,7 +14910,7 @@
           <a:noFill/>
         </p:spPr>
         <p:txBody>
-          <a:bodyPr wrap="square" lIns="60000" rIns="60000" tIns="40000" bIns="40000" anchor="t">
+          <a:bodyPr wrap="square" lIns="60000" tIns="40000" rIns="60000" bIns="40000" anchor="t">
             <a:spAutoFit/>
           </a:bodyPr>
           <a:lstStyle/>
@@ -13837,6 +14925,12 @@
               </a:rPr>
               <a:t>Sunny</a:t>
             </a:r>
+            <a:endParaRPr sz="1200" b="1">
+              <a:solidFill>
+                <a:srgbClr val="1C1C1E"/>
+              </a:solidFill>
+              <a:latin typeface="SF Pro Display"/>
+            </a:endParaRPr>
           </a:p>
         </p:txBody>
       </p:sp>
@@ -13857,7 +14951,7 @@
           <a:noFill/>
         </p:spPr>
         <p:txBody>
-          <a:bodyPr wrap="square" lIns="60000" rIns="60000" tIns="40000" bIns="40000" anchor="t">
+          <a:bodyPr wrap="square" lIns="60000" tIns="40000" rIns="60000" bIns="40000" anchor="t">
             <a:spAutoFit/>
           </a:bodyPr>
           <a:lstStyle/>
@@ -13868,10 +14962,16 @@
                 <a:solidFill>
                   <a:srgbClr val="8E8E93"/>
                 </a:solidFill>
-                <a:latin typeface="Menlo"/>
+                <a:latin typeface="Menlo" panose="020B0609030804020204"/>
               </a:rPr>
               <a:t>sun.max.fill</a:t>
             </a:r>
+            <a:endParaRPr sz="900" b="0">
+              <a:solidFill>
+                <a:srgbClr val="8E8E93"/>
+              </a:solidFill>
+              <a:latin typeface="Menlo" panose="020B0609030804020204"/>
+            </a:endParaRPr>
           </a:p>
         </p:txBody>
       </p:sp>
@@ -13983,7 +15083,7 @@
           <a:noFill/>
         </p:spPr>
         <p:txBody>
-          <a:bodyPr wrap="square" lIns="60000" rIns="60000" tIns="40000" bIns="40000" anchor="t">
+          <a:bodyPr wrap="square" lIns="60000" tIns="40000" rIns="60000" bIns="40000" anchor="t">
             <a:spAutoFit/>
           </a:bodyPr>
           <a:lstStyle/>
@@ -13998,6 +15098,12 @@
               </a:rPr>
               <a:t>Rainy</a:t>
             </a:r>
+            <a:endParaRPr sz="1200" b="1">
+              <a:solidFill>
+                <a:srgbClr val="1C1C1E"/>
+              </a:solidFill>
+              <a:latin typeface="SF Pro Display"/>
+            </a:endParaRPr>
           </a:p>
         </p:txBody>
       </p:sp>
@@ -14018,7 +15124,7 @@
           <a:noFill/>
         </p:spPr>
         <p:txBody>
-          <a:bodyPr wrap="square" lIns="60000" rIns="60000" tIns="40000" bIns="40000" anchor="t">
+          <a:bodyPr wrap="square" lIns="60000" tIns="40000" rIns="60000" bIns="40000" anchor="t">
             <a:spAutoFit/>
           </a:bodyPr>
           <a:lstStyle/>
@@ -14029,10 +15135,16 @@
                 <a:solidFill>
                   <a:srgbClr val="8E8E93"/>
                 </a:solidFill>
-                <a:latin typeface="Menlo"/>
+                <a:latin typeface="Menlo" panose="020B0609030804020204"/>
               </a:rPr>
               <a:t>cloud.rain.fill</a:t>
             </a:r>
+            <a:endParaRPr sz="900" b="0">
+              <a:solidFill>
+                <a:srgbClr val="8E8E93"/>
+              </a:solidFill>
+              <a:latin typeface="Menlo" panose="020B0609030804020204"/>
+            </a:endParaRPr>
           </a:p>
         </p:txBody>
       </p:sp>
@@ -14144,7 +15256,7 @@
           <a:noFill/>
         </p:spPr>
         <p:txBody>
-          <a:bodyPr wrap="square" lIns="60000" rIns="60000" tIns="40000" bIns="40000" anchor="t">
+          <a:bodyPr wrap="square" lIns="60000" tIns="40000" rIns="60000" bIns="40000" anchor="t">
             <a:spAutoFit/>
           </a:bodyPr>
           <a:lstStyle/>
@@ -14159,6 +15271,12 @@
               </a:rPr>
               <a:t>Cloudy</a:t>
             </a:r>
+            <a:endParaRPr sz="1200" b="1">
+              <a:solidFill>
+                <a:srgbClr val="1C1C1E"/>
+              </a:solidFill>
+              <a:latin typeface="SF Pro Display"/>
+            </a:endParaRPr>
           </a:p>
         </p:txBody>
       </p:sp>
@@ -14179,7 +15297,7 @@
           <a:noFill/>
         </p:spPr>
         <p:txBody>
-          <a:bodyPr wrap="square" lIns="60000" rIns="60000" tIns="40000" bIns="40000" anchor="t">
+          <a:bodyPr wrap="square" lIns="60000" tIns="40000" rIns="60000" bIns="40000" anchor="t">
             <a:spAutoFit/>
           </a:bodyPr>
           <a:lstStyle/>
@@ -14190,10 +15308,16 @@
                 <a:solidFill>
                   <a:srgbClr val="8E8E93"/>
                 </a:solidFill>
-                <a:latin typeface="Menlo"/>
+                <a:latin typeface="Menlo" panose="020B0609030804020204"/>
               </a:rPr>
               <a:t>cloud.fill</a:t>
             </a:r>
+            <a:endParaRPr sz="900" b="0">
+              <a:solidFill>
+                <a:srgbClr val="8E8E93"/>
+              </a:solidFill>
+              <a:latin typeface="Menlo" panose="020B0609030804020204"/>
+            </a:endParaRPr>
           </a:p>
         </p:txBody>
       </p:sp>
@@ -14305,7 +15429,7 @@
           <a:noFill/>
         </p:spPr>
         <p:txBody>
-          <a:bodyPr wrap="square" lIns="60000" rIns="60000" tIns="40000" bIns="40000" anchor="t">
+          <a:bodyPr wrap="square" lIns="60000" tIns="40000" rIns="60000" bIns="40000" anchor="t">
             <a:spAutoFit/>
           </a:bodyPr>
           <a:lstStyle/>
@@ -14320,6 +15444,12 @@
               </a:rPr>
               <a:t>Windy</a:t>
             </a:r>
+            <a:endParaRPr sz="1200" b="1">
+              <a:solidFill>
+                <a:srgbClr val="1C1C1E"/>
+              </a:solidFill>
+              <a:latin typeface="SF Pro Display"/>
+            </a:endParaRPr>
           </a:p>
         </p:txBody>
       </p:sp>
@@ -14340,7 +15470,7 @@
           <a:noFill/>
         </p:spPr>
         <p:txBody>
-          <a:bodyPr wrap="square" lIns="60000" rIns="60000" tIns="40000" bIns="40000" anchor="t">
+          <a:bodyPr wrap="square" lIns="60000" tIns="40000" rIns="60000" bIns="40000" anchor="t">
             <a:spAutoFit/>
           </a:bodyPr>
           <a:lstStyle/>
@@ -14351,10 +15481,16 @@
                 <a:solidFill>
                   <a:srgbClr val="8E8E93"/>
                 </a:solidFill>
-                <a:latin typeface="Menlo"/>
+                <a:latin typeface="Menlo" panose="020B0609030804020204"/>
               </a:rPr>
               <a:t>wind</a:t>
             </a:r>
+            <a:endParaRPr sz="900" b="0">
+              <a:solidFill>
+                <a:srgbClr val="8E8E93"/>
+              </a:solidFill>
+              <a:latin typeface="Menlo" panose="020B0609030804020204"/>
+            </a:endParaRPr>
           </a:p>
         </p:txBody>
       </p:sp>
@@ -14421,7 +15557,7 @@
           <a:noFill/>
         </p:spPr>
         <p:txBody>
-          <a:bodyPr wrap="square" lIns="140000" rIns="80000" tIns="100000">
+          <a:bodyPr wrap="square" lIns="140000" tIns="100000" rIns="80000">
             <a:spAutoFit/>
           </a:bodyPr>
           <a:lstStyle/>
@@ -14432,10 +15568,16 @@
                 <a:solidFill>
                   <a:srgbClr val="F2F2F7"/>
                 </a:solidFill>
-                <a:latin typeface="Menlo"/>
+                <a:latin typeface="Menlo" panose="020B0609030804020204"/>
               </a:rPr>
               <a:t>enum Weather: String, CaseIterable, Identifiable {</a:t>
             </a:r>
+            <a:endParaRPr sz="1200">
+              <a:solidFill>
+                <a:srgbClr val="F2F2F7"/>
+              </a:solidFill>
+              <a:latin typeface="Menlo" panose="020B0609030804020204"/>
+            </a:endParaRPr>
           </a:p>
           <a:p>
             <a:pPr algn="l"/>
@@ -14444,10 +15586,16 @@
                 <a:solidFill>
                   <a:srgbClr val="F2F2F7"/>
                 </a:solidFill>
-                <a:latin typeface="Menlo"/>
+                <a:latin typeface="Menlo" panose="020B0609030804020204"/>
               </a:rPr>
               <a:t>    case sunny, rainy, cloudy, windy</a:t>
             </a:r>
+            <a:endParaRPr sz="1200">
+              <a:solidFill>
+                <a:srgbClr val="F2F2F7"/>
+              </a:solidFill>
+              <a:latin typeface="Menlo" panose="020B0609030804020204"/>
+            </a:endParaRPr>
           </a:p>
           <a:p>
             <a:pPr algn="l"/>
@@ -14456,10 +15604,16 @@
                 <a:solidFill>
                   <a:srgbClr val="F2F2F7"/>
                 </a:solidFill>
-                <a:latin typeface="Menlo"/>
+                <a:latin typeface="Menlo" panose="020B0609030804020204"/>
               </a:rPr>
               <a:t>    var id: String { rawValue }</a:t>
             </a:r>
+            <a:endParaRPr sz="1200">
+              <a:solidFill>
+                <a:srgbClr val="F2F2F7"/>
+              </a:solidFill>
+              <a:latin typeface="Menlo" panose="020B0609030804020204"/>
+            </a:endParaRPr>
           </a:p>
           <a:p>
             <a:pPr algn="l"/>
@@ -14468,10 +15622,16 @@
                 <a:solidFill>
                   <a:srgbClr val="F2F2F7"/>
                 </a:solidFill>
-                <a:latin typeface="Menlo"/>
+                <a:latin typeface="Menlo" panose="020B0609030804020204"/>
               </a:rPr>
               <a:t>    var symbolName: String {</a:t>
             </a:r>
+            <a:endParaRPr sz="1200">
+              <a:solidFill>
+                <a:srgbClr val="F2F2F7"/>
+              </a:solidFill>
+              <a:latin typeface="Menlo" panose="020B0609030804020204"/>
+            </a:endParaRPr>
           </a:p>
           <a:p>
             <a:pPr algn="l"/>
@@ -14480,10 +15640,16 @@
                 <a:solidFill>
                   <a:srgbClr val="F2F2F7"/>
                 </a:solidFill>
-                <a:latin typeface="Menlo"/>
+                <a:latin typeface="Menlo" panose="020B0609030804020204"/>
               </a:rPr>
               <a:t>        switch self {</a:t>
             </a:r>
+            <a:endParaRPr sz="1200">
+              <a:solidFill>
+                <a:srgbClr val="F2F2F7"/>
+              </a:solidFill>
+              <a:latin typeface="Menlo" panose="020B0609030804020204"/>
+            </a:endParaRPr>
           </a:p>
           <a:p>
             <a:pPr algn="l"/>
@@ -14492,10 +15658,16 @@
                 <a:solidFill>
                   <a:srgbClr val="F2F2F7"/>
                 </a:solidFill>
-                <a:latin typeface="Menlo"/>
+                <a:latin typeface="Menlo" panose="020B0609030804020204"/>
               </a:rPr>
               <a:t>        case .sunny:  return "sun.max.fill"</a:t>
             </a:r>
+            <a:endParaRPr sz="1200">
+              <a:solidFill>
+                <a:srgbClr val="F2F2F7"/>
+              </a:solidFill>
+              <a:latin typeface="Menlo" panose="020B0609030804020204"/>
+            </a:endParaRPr>
           </a:p>
           <a:p>
             <a:pPr algn="l"/>
@@ -14504,10 +15676,16 @@
                 <a:solidFill>
                   <a:srgbClr val="F2F2F7"/>
                 </a:solidFill>
-                <a:latin typeface="Menlo"/>
+                <a:latin typeface="Menlo" panose="020B0609030804020204"/>
               </a:rPr>
               <a:t>        case .rainy:  return "cloud.rain.fill"</a:t>
             </a:r>
+            <a:endParaRPr sz="1200">
+              <a:solidFill>
+                <a:srgbClr val="F2F2F7"/>
+              </a:solidFill>
+              <a:latin typeface="Menlo" panose="020B0609030804020204"/>
+            </a:endParaRPr>
           </a:p>
           <a:p>
             <a:pPr algn="l"/>
@@ -14516,10 +15694,16 @@
                 <a:solidFill>
                   <a:srgbClr val="F2F2F7"/>
                 </a:solidFill>
-                <a:latin typeface="Menlo"/>
+                <a:latin typeface="Menlo" panose="020B0609030804020204"/>
               </a:rPr>
               <a:t>        case .cloudy: return "cloud.fill"</a:t>
             </a:r>
+            <a:endParaRPr sz="1200">
+              <a:solidFill>
+                <a:srgbClr val="F2F2F7"/>
+              </a:solidFill>
+              <a:latin typeface="Menlo" panose="020B0609030804020204"/>
+            </a:endParaRPr>
           </a:p>
           <a:p>
             <a:pPr algn="l"/>
@@ -14528,10 +15712,16 @@
                 <a:solidFill>
                   <a:srgbClr val="F2F2F7"/>
                 </a:solidFill>
-                <a:latin typeface="Menlo"/>
+                <a:latin typeface="Menlo" panose="020B0609030804020204"/>
               </a:rPr>
               <a:t>        case .windy:  return "wind"</a:t>
             </a:r>
+            <a:endParaRPr sz="1200">
+              <a:solidFill>
+                <a:srgbClr val="F2F2F7"/>
+              </a:solidFill>
+              <a:latin typeface="Menlo" panose="020B0609030804020204"/>
+            </a:endParaRPr>
           </a:p>
           <a:p>
             <a:pPr algn="l"/>
@@ -14540,10 +15730,16 @@
                 <a:solidFill>
                   <a:srgbClr val="F2F2F7"/>
                 </a:solidFill>
-                <a:latin typeface="Menlo"/>
+                <a:latin typeface="Menlo" panose="020B0609030804020204"/>
               </a:rPr>
               <a:t>        }</a:t>
             </a:r>
+            <a:endParaRPr sz="1200">
+              <a:solidFill>
+                <a:srgbClr val="F2F2F7"/>
+              </a:solidFill>
+              <a:latin typeface="Menlo" panose="020B0609030804020204"/>
+            </a:endParaRPr>
           </a:p>
           <a:p>
             <a:pPr algn="l"/>
@@ -14552,10 +15748,16 @@
                 <a:solidFill>
                   <a:srgbClr val="F2F2F7"/>
                 </a:solidFill>
-                <a:latin typeface="Menlo"/>
+                <a:latin typeface="Menlo" panose="020B0609030804020204"/>
               </a:rPr>
               <a:t>    }</a:t>
             </a:r>
+            <a:endParaRPr sz="1200">
+              <a:solidFill>
+                <a:srgbClr val="F2F2F7"/>
+              </a:solidFill>
+              <a:latin typeface="Menlo" panose="020B0609030804020204"/>
+            </a:endParaRPr>
           </a:p>
           <a:p>
             <a:pPr algn="l"/>
@@ -14564,10 +15766,16 @@
                 <a:solidFill>
                   <a:srgbClr val="F2F2F7"/>
                 </a:solidFill>
-                <a:latin typeface="Menlo"/>
+                <a:latin typeface="Menlo" panose="020B0609030804020204"/>
               </a:rPr>
               <a:t>    var tint: Color { /* yellow / blue / gray / teal */ }</a:t>
             </a:r>
+            <a:endParaRPr sz="1200">
+              <a:solidFill>
+                <a:srgbClr val="F2F2F7"/>
+              </a:solidFill>
+              <a:latin typeface="Menlo" panose="020B0609030804020204"/>
+            </a:endParaRPr>
           </a:p>
           <a:p>
             <a:pPr algn="l"/>
@@ -14576,10 +15784,16 @@
                 <a:solidFill>
                   <a:srgbClr val="F2F2F7"/>
                 </a:solidFill>
-                <a:latin typeface="Menlo"/>
+                <a:latin typeface="Menlo" panose="020B0609030804020204"/>
               </a:rPr>
               <a:t>}</a:t>
             </a:r>
+            <a:endParaRPr sz="1200">
+              <a:solidFill>
+                <a:srgbClr val="F2F2F7"/>
+              </a:solidFill>
+              <a:latin typeface="Menlo" panose="020B0609030804020204"/>
+            </a:endParaRPr>
           </a:p>
         </p:txBody>
       </p:sp>
@@ -14646,7 +15860,7 @@
           <a:noFill/>
         </p:spPr>
         <p:txBody>
-          <a:bodyPr wrap="square" lIns="60000" rIns="60000" tIns="40000" bIns="40000" anchor="t">
+          <a:bodyPr wrap="square" lIns="60000" tIns="40000" rIns="60000" bIns="40000" anchor="t">
             <a:spAutoFit/>
           </a:bodyPr>
           <a:lstStyle/>
@@ -14661,6 +15875,12 @@
               </a:rPr>
               <a:t>WHY rawValue IN CORE DATA</a:t>
             </a:r>
+            <a:endParaRPr sz="1200" b="1">
+              <a:solidFill>
+                <a:srgbClr val="FF9500"/>
+              </a:solidFill>
+              <a:latin typeface="SF Pro Text"/>
+            </a:endParaRPr>
           </a:p>
         </p:txBody>
       </p:sp>
@@ -14681,7 +15901,7 @@
           <a:noFill/>
         </p:spPr>
         <p:txBody>
-          <a:bodyPr wrap="square" lIns="80000" rIns="60000" tIns="40000">
+          <a:bodyPr wrap="square" lIns="80000" tIns="40000" rIns="60000">
             <a:spAutoFit/>
           </a:bodyPr>
           <a:lstStyle/>
@@ -14700,6 +15920,12 @@
               </a:rPr>
               <a:t>•  @NSManaged can't hold a Swift enum</a:t>
             </a:r>
+            <a:endParaRPr sz="1100">
+              <a:solidFill>
+                <a:srgbClr val="1C1C1E"/>
+              </a:solidFill>
+              <a:latin typeface="SF Pro Text"/>
+            </a:endParaRPr>
           </a:p>
           <a:p>
             <a:pPr algn="l">
@@ -14716,6 +15942,12 @@
               </a:rPr>
               <a:t>•  String round-trips cleanly through SQLite</a:t>
             </a:r>
+            <a:endParaRPr sz="1100">
+              <a:solidFill>
+                <a:srgbClr val="1C1C1E"/>
+              </a:solidFill>
+              <a:latin typeface="SF Pro Text"/>
+            </a:endParaRPr>
           </a:p>
           <a:p>
             <a:pPr algn="l">
@@ -14732,6 +15964,12 @@
               </a:rPr>
               <a:t>•  entry.weatherTag is the one place the string → enum mapping happens</a:t>
             </a:r>
+            <a:endParaRPr sz="1100">
+              <a:solidFill>
+                <a:srgbClr val="1C1C1E"/>
+              </a:solidFill>
+              <a:latin typeface="SF Pro Text"/>
+            </a:endParaRPr>
           </a:p>
           <a:p>
             <a:pPr algn="l">
@@ -14748,6 +15986,12 @@
               </a:rPr>
               <a:t>•  New case? One file to edit — no literals scattered across the codebase</a:t>
             </a:r>
+            <a:endParaRPr sz="1100">
+              <a:solidFill>
+                <a:srgbClr val="1C1C1E"/>
+              </a:solidFill>
+              <a:latin typeface="SF Pro Text"/>
+            </a:endParaRPr>
           </a:p>
         </p:txBody>
       </p:sp>
@@ -14768,7 +16012,7 @@
           <a:noFill/>
         </p:spPr>
         <p:txBody>
-          <a:bodyPr wrap="square" lIns="60000" rIns="60000" tIns="40000" bIns="40000" anchor="t">
+          <a:bodyPr wrap="square" lIns="60000" tIns="40000" rIns="60000" bIns="40000" anchor="t">
             <a:spAutoFit/>
           </a:bodyPr>
           <a:lstStyle/>
@@ -14783,6 +16027,12 @@
               </a:rPr>
               <a:t>Week 7 · Daily Journal · SmartFarmerAssistant</a:t>
             </a:r>
+            <a:endParaRPr sz="1000" b="0">
+              <a:solidFill>
+                <a:srgbClr val="8E8E93"/>
+              </a:solidFill>
+              <a:latin typeface="SF Pro Text"/>
+            </a:endParaRPr>
           </a:p>
         </p:txBody>
       </p:sp>
@@ -14803,7 +16053,7 @@
           <a:noFill/>
         </p:spPr>
         <p:txBody>
-          <a:bodyPr wrap="square" lIns="60000" rIns="60000" tIns="40000" bIns="40000" anchor="t">
+          <a:bodyPr wrap="square" lIns="60000" tIns="40000" rIns="60000" bIns="40000" anchor="t">
             <a:spAutoFit/>
           </a:bodyPr>
           <a:lstStyle/>
@@ -14818,6 +16068,12 @@
               </a:rPr>
               <a:t>7 / 12</a:t>
             </a:r>
+            <a:endParaRPr sz="1000" b="0">
+              <a:solidFill>
+                <a:srgbClr val="8E8E93"/>
+              </a:solidFill>
+              <a:latin typeface="SF Pro Text"/>
+            </a:endParaRPr>
           </a:p>
         </p:txBody>
       </p:sp>
@@ -14833,7 +16089,7 @@
 </file>
 
 <file path=ppt/slides/slide8.xml><?xml version="1.0" encoding="utf-8"?>
-<p:sld xmlns:a="http://schemas.openxmlformats.org/drawingml/2006/main" xmlns:p="http://schemas.openxmlformats.org/presentationml/2006/main" xmlns:r="http://schemas.openxmlformats.org/officeDocument/2006/relationships">
+<p:sld xmlns:a="http://schemas.openxmlformats.org/drawingml/2006/main" xmlns:r="http://schemas.openxmlformats.org/officeDocument/2006/relationships" xmlns:p="http://schemas.openxmlformats.org/presentationml/2006/main">
   <p:cSld>
     <p:spTree>
       <p:nvGrpSpPr>
@@ -14945,7 +16201,7 @@
           <a:noFill/>
         </p:spPr>
         <p:txBody>
-          <a:bodyPr wrap="square" lIns="60000" rIns="60000" tIns="40000" bIns="40000" anchor="t">
+          <a:bodyPr wrap="square" lIns="60000" tIns="40000" rIns="60000" bIns="40000" anchor="t">
             <a:spAutoFit/>
           </a:bodyPr>
           <a:lstStyle/>
@@ -14960,6 +16216,12 @@
               </a:rPr>
               <a:t>LESSON 7.4</a:t>
             </a:r>
+            <a:endParaRPr sz="1200" b="1">
+              <a:solidFill>
+                <a:srgbClr val="FF9500"/>
+              </a:solidFill>
+              <a:latin typeface="SF Pro Text"/>
+            </a:endParaRPr>
           </a:p>
         </p:txBody>
       </p:sp>
@@ -14980,7 +16242,7 @@
           <a:noFill/>
         </p:spPr>
         <p:txBody>
-          <a:bodyPr wrap="square" lIns="60000" rIns="60000" tIns="40000" bIns="40000" anchor="t">
+          <a:bodyPr wrap="square" lIns="60000" tIns="40000" rIns="60000" bIns="40000" anchor="t">
             <a:spAutoFit/>
           </a:bodyPr>
           <a:lstStyle/>
@@ -14995,6 +16257,12 @@
               </a:rPr>
               <a:t>Photo picker — UIKit bridge flow</a:t>
             </a:r>
+            <a:endParaRPr sz="3000" b="1">
+              <a:solidFill>
+                <a:srgbClr val="1C1C1E"/>
+              </a:solidFill>
+              <a:latin typeface="SF Pro Display"/>
+            </a:endParaRPr>
           </a:p>
         </p:txBody>
       </p:sp>
@@ -15063,7 +16331,7 @@
           <a:noFill/>
         </p:spPr>
         <p:txBody>
-          <a:bodyPr wrap="square" lIns="60000" rIns="60000" tIns="40000" bIns="40000" anchor="t">
+          <a:bodyPr wrap="square" lIns="60000" tIns="40000" rIns="60000" bIns="40000" anchor="t">
             <a:spAutoFit/>
           </a:bodyPr>
           <a:lstStyle/>
@@ -15078,6 +16346,12 @@
               </a:rPr>
               <a:t>Add photo button</a:t>
             </a:r>
+            <a:endParaRPr sz="1300" b="1">
+              <a:solidFill>
+                <a:srgbClr val="A052D4"/>
+              </a:solidFill>
+              <a:latin typeface="SF Pro Display"/>
+            </a:endParaRPr>
           </a:p>
         </p:txBody>
       </p:sp>
@@ -15098,7 +16372,7 @@
           <a:noFill/>
         </p:spPr>
         <p:txBody>
-          <a:bodyPr wrap="square" lIns="60000" rIns="60000" tIns="40000" bIns="40000" anchor="t">
+          <a:bodyPr wrap="square" lIns="60000" tIns="40000" rIns="60000" bIns="40000" anchor="t">
             <a:spAutoFit/>
           </a:bodyPr>
           <a:lstStyle/>
@@ -15113,6 +16387,12 @@
               </a:rPr>
               <a:t>SwiftUI .sheet(isPresented:)</a:t>
             </a:r>
+            <a:endParaRPr sz="1000" b="0">
+              <a:solidFill>
+                <a:srgbClr val="1C1C1E"/>
+              </a:solidFill>
+              <a:latin typeface="SF Pro Text"/>
+            </a:endParaRPr>
           </a:p>
         </p:txBody>
       </p:sp>
@@ -15224,7 +16504,7 @@
           <a:noFill/>
         </p:spPr>
         <p:txBody>
-          <a:bodyPr wrap="square" lIns="60000" rIns="60000" tIns="40000" bIns="40000" anchor="t">
+          <a:bodyPr wrap="square" lIns="60000" tIns="40000" rIns="60000" bIns="40000" anchor="t">
             <a:spAutoFit/>
           </a:bodyPr>
           <a:lstStyle/>
@@ -15239,6 +16519,12 @@
               </a:rPr>
               <a:t>PhotoPicker (sheet)</a:t>
             </a:r>
+            <a:endParaRPr sz="1300" b="1">
+              <a:solidFill>
+                <a:srgbClr val="FF9500"/>
+              </a:solidFill>
+              <a:latin typeface="SF Pro Display"/>
+            </a:endParaRPr>
           </a:p>
         </p:txBody>
       </p:sp>
@@ -15259,7 +16545,7 @@
           <a:noFill/>
         </p:spPr>
         <p:txBody>
-          <a:bodyPr wrap="square" lIns="60000" rIns="60000" tIns="40000" bIns="40000" anchor="t">
+          <a:bodyPr wrap="square" lIns="60000" tIns="40000" rIns="60000" bIns="40000" anchor="t">
             <a:spAutoFit/>
           </a:bodyPr>
           <a:lstStyle/>
@@ -15274,6 +16560,12 @@
               </a:rPr>
               <a:t>UIViewControllerRepresentable</a:t>
             </a:r>
+            <a:endParaRPr sz="1000" b="0">
+              <a:solidFill>
+                <a:srgbClr val="1C1C1E"/>
+              </a:solidFill>
+              <a:latin typeface="SF Pro Text"/>
+            </a:endParaRPr>
           </a:p>
         </p:txBody>
       </p:sp>
@@ -15385,7 +16677,7 @@
           <a:noFill/>
         </p:spPr>
         <p:txBody>
-          <a:bodyPr wrap="square" lIns="60000" rIns="60000" tIns="40000" bIns="40000" anchor="t">
+          <a:bodyPr wrap="square" lIns="60000" tIns="40000" rIns="60000" bIns="40000" anchor="t">
             <a:spAutoFit/>
           </a:bodyPr>
           <a:lstStyle/>
@@ -15400,6 +16692,12 @@
               </a:rPr>
               <a:t>UIImagePickerController</a:t>
             </a:r>
+            <a:endParaRPr sz="1300" b="1">
+              <a:solidFill>
+                <a:srgbClr val="FF9500"/>
+              </a:solidFill>
+              <a:latin typeface="SF Pro Display"/>
+            </a:endParaRPr>
           </a:p>
         </p:txBody>
       </p:sp>
@@ -15420,7 +16718,7 @@
           <a:noFill/>
         </p:spPr>
         <p:txBody>
-          <a:bodyPr wrap="square" lIns="60000" rIns="60000" tIns="40000" bIns="40000" anchor="t">
+          <a:bodyPr wrap="square" lIns="60000" tIns="40000" rIns="60000" bIns="40000" anchor="t">
             <a:spAutoFit/>
           </a:bodyPr>
           <a:lstStyle/>
@@ -15435,6 +16733,12 @@
               </a:rPr>
               <a:t>makeUIViewController(context:)</a:t>
             </a:r>
+            <a:endParaRPr sz="1000" b="0">
+              <a:solidFill>
+                <a:srgbClr val="1C1C1E"/>
+              </a:solidFill>
+              <a:latin typeface="SF Pro Text"/>
+            </a:endParaRPr>
           </a:p>
         </p:txBody>
       </p:sp>
@@ -15546,7 +16850,7 @@
           <a:noFill/>
         </p:spPr>
         <p:txBody>
-          <a:bodyPr wrap="square" lIns="60000" rIns="60000" tIns="40000" bIns="40000" anchor="t">
+          <a:bodyPr wrap="square" lIns="60000" tIns="40000" rIns="60000" bIns="40000" anchor="t">
             <a:spAutoFit/>
           </a:bodyPr>
           <a:lstStyle/>
@@ -15561,6 +16865,12 @@
               </a:rPr>
               <a:t>didFinishPicking</a:t>
             </a:r>
+            <a:endParaRPr sz="1300" b="1">
+              <a:solidFill>
+                <a:srgbClr val="0A84FF"/>
+              </a:solidFill>
+              <a:latin typeface="SF Pro Display"/>
+            </a:endParaRPr>
           </a:p>
         </p:txBody>
       </p:sp>
@@ -15581,7 +16891,7 @@
           <a:noFill/>
         </p:spPr>
         <p:txBody>
-          <a:bodyPr wrap="square" lIns="60000" rIns="60000" tIns="40000" bIns="40000" anchor="t">
+          <a:bodyPr wrap="square" lIns="60000" tIns="40000" rIns="60000" bIns="40000" anchor="t">
             <a:spAutoFit/>
           </a:bodyPr>
           <a:lstStyle/>
@@ -15596,6 +16906,12 @@
               </a:rPr>
               <a:t>Coordinator delegate method</a:t>
             </a:r>
+            <a:endParaRPr sz="1000" b="0">
+              <a:solidFill>
+                <a:srgbClr val="1C1C1E"/>
+              </a:solidFill>
+              <a:latin typeface="SF Pro Text"/>
+            </a:endParaRPr>
           </a:p>
         </p:txBody>
       </p:sp>
@@ -15707,7 +17023,7 @@
           <a:noFill/>
         </p:spPr>
         <p:txBody>
-          <a:bodyPr wrap="square" lIns="60000" rIns="60000" tIns="40000" bIns="40000" anchor="t">
+          <a:bodyPr wrap="square" lIns="60000" tIns="40000" rIns="60000" bIns="40000" anchor="t">
             <a:spAutoFit/>
           </a:bodyPr>
           <a:lstStyle/>
@@ -15722,6 +17038,12 @@
               </a:rPr>
               <a:t>UIImage → JPEG Data</a:t>
             </a:r>
+            <a:endParaRPr sz="1300" b="1">
+              <a:solidFill>
+                <a:srgbClr val="0A84FF"/>
+              </a:solidFill>
+              <a:latin typeface="SF Pro Display"/>
+            </a:endParaRPr>
           </a:p>
         </p:txBody>
       </p:sp>
@@ -15742,7 +17064,7 @@
           <a:noFill/>
         </p:spPr>
         <p:txBody>
-          <a:bodyPr wrap="square" lIns="60000" rIns="60000" tIns="40000" bIns="40000" anchor="t">
+          <a:bodyPr wrap="square" lIns="60000" tIns="40000" rIns="60000" bIns="40000" anchor="t">
             <a:spAutoFit/>
           </a:bodyPr>
           <a:lstStyle/>
@@ -15757,6 +17079,12 @@
               </a:rPr>
               <a:t>jpegData(compressionQuality: 0.8)</a:t>
             </a:r>
+            <a:endParaRPr sz="1000" b="0">
+              <a:solidFill>
+                <a:srgbClr val="1C1C1E"/>
+              </a:solidFill>
+              <a:latin typeface="SF Pro Text"/>
+            </a:endParaRPr>
           </a:p>
         </p:txBody>
       </p:sp>
@@ -15868,7 +17196,7 @@
           <a:noFill/>
         </p:spPr>
         <p:txBody>
-          <a:bodyPr wrap="square" lIns="60000" rIns="60000" tIns="40000" bIns="40000" anchor="t">
+          <a:bodyPr wrap="square" lIns="60000" tIns="40000" rIns="60000" bIns="40000" anchor="t">
             <a:spAutoFit/>
           </a:bodyPr>
           <a:lstStyle/>
@@ -15883,6 +17211,12 @@
               </a:rPr>
               <a:t>entry.photos append</a:t>
             </a:r>
+            <a:endParaRPr sz="1300" b="1">
+              <a:solidFill>
+                <a:srgbClr val="34C759"/>
+              </a:solidFill>
+              <a:latin typeface="SF Pro Display"/>
+            </a:endParaRPr>
           </a:p>
         </p:txBody>
       </p:sp>
@@ -15903,7 +17237,7 @@
           <a:noFill/>
         </p:spPr>
         <p:txBody>
-          <a:bodyPr wrap="square" lIns="60000" rIns="60000" tIns="40000" bIns="40000" anchor="t">
+          <a:bodyPr wrap="square" lIns="60000" tIns="40000" rIns="60000" bIns="40000" anchor="t">
             <a:spAutoFit/>
           </a:bodyPr>
           <a:lstStyle/>
@@ -15918,6 +17252,12 @@
               </a:rPr>
               <a:t>[Data] as NSArray + save()</a:t>
             </a:r>
+            <a:endParaRPr sz="1000" b="0">
+              <a:solidFill>
+                <a:srgbClr val="1C1C1E"/>
+              </a:solidFill>
+              <a:latin typeface="SF Pro Text"/>
+            </a:endParaRPr>
           </a:p>
         </p:txBody>
       </p:sp>
@@ -15938,7 +17278,7 @@
           <a:noFill/>
         </p:spPr>
         <p:txBody>
-          <a:bodyPr wrap="square" lIns="60000" rIns="60000" tIns="40000" bIns="40000" anchor="t">
+          <a:bodyPr wrap="square" lIns="60000" tIns="40000" rIns="60000" bIns="40000" anchor="t">
             <a:spAutoFit/>
           </a:bodyPr>
           <a:lstStyle/>
@@ -15953,6 +17293,12 @@
               </a:rPr>
               <a:t>Same bridge pattern works for any UIKit controller — camera, document picker, share sheet.</a:t>
             </a:r>
+            <a:endParaRPr sz="1300" b="1">
+              <a:solidFill>
+                <a:srgbClr val="8E8E93"/>
+              </a:solidFill>
+              <a:latin typeface="SF Pro Text"/>
+            </a:endParaRPr>
           </a:p>
         </p:txBody>
       </p:sp>
@@ -16019,7 +17365,7 @@
           <a:noFill/>
         </p:spPr>
         <p:txBody>
-          <a:bodyPr wrap="square" lIns="60000" rIns="60000" tIns="40000" bIns="40000" anchor="t">
+          <a:bodyPr wrap="square" lIns="60000" tIns="40000" rIns="60000" bIns="40000" anchor="t">
             <a:spAutoFit/>
           </a:bodyPr>
           <a:lstStyle/>
@@ -16034,6 +17380,12 @@
               </a:rPr>
               <a:t>PhotosPicker is iOS 16+ — on iOS 13 we wrap UIImagePickerController. Three methods: makeUIViewController, updateUIViewController, makeCoordinator.</a:t>
             </a:r>
+            <a:endParaRPr sz="1200" b="1">
+              <a:solidFill>
+                <a:srgbClr val="FF9500"/>
+              </a:solidFill>
+              <a:latin typeface="SF Pro Text"/>
+            </a:endParaRPr>
           </a:p>
         </p:txBody>
       </p:sp>
@@ -16054,7 +17406,7 @@
           <a:noFill/>
         </p:spPr>
         <p:txBody>
-          <a:bodyPr wrap="square" lIns="60000" rIns="60000" tIns="40000" bIns="40000" anchor="t">
+          <a:bodyPr wrap="square" lIns="60000" tIns="40000" rIns="60000" bIns="40000" anchor="t">
             <a:spAutoFit/>
           </a:bodyPr>
           <a:lstStyle/>
@@ -16069,6 +17421,12 @@
               </a:rPr>
               <a:t>Week 7 · Daily Journal · SmartFarmerAssistant</a:t>
             </a:r>
+            <a:endParaRPr sz="1000" b="0">
+              <a:solidFill>
+                <a:srgbClr val="8E8E93"/>
+              </a:solidFill>
+              <a:latin typeface="SF Pro Text"/>
+            </a:endParaRPr>
           </a:p>
         </p:txBody>
       </p:sp>
@@ -16089,7 +17447,7 @@
           <a:noFill/>
         </p:spPr>
         <p:txBody>
-          <a:bodyPr wrap="square" lIns="60000" rIns="60000" tIns="40000" bIns="40000" anchor="t">
+          <a:bodyPr wrap="square" lIns="60000" tIns="40000" rIns="60000" bIns="40000" anchor="t">
             <a:spAutoFit/>
           </a:bodyPr>
           <a:lstStyle/>
@@ -16104,6 +17462,12 @@
               </a:rPr>
               <a:t>8 / 12</a:t>
             </a:r>
+            <a:endParaRPr sz="1000" b="0">
+              <a:solidFill>
+                <a:srgbClr val="8E8E93"/>
+              </a:solidFill>
+              <a:latin typeface="SF Pro Text"/>
+            </a:endParaRPr>
           </a:p>
         </p:txBody>
       </p:sp>
@@ -16119,7 +17483,7 @@
 </file>
 
 <file path=ppt/slides/slide9.xml><?xml version="1.0" encoding="utf-8"?>
-<p:sld xmlns:a="http://schemas.openxmlformats.org/drawingml/2006/main" xmlns:p="http://schemas.openxmlformats.org/presentationml/2006/main" xmlns:r="http://schemas.openxmlformats.org/officeDocument/2006/relationships">
+<p:sld xmlns:a="http://schemas.openxmlformats.org/drawingml/2006/main" xmlns:r="http://schemas.openxmlformats.org/officeDocument/2006/relationships" xmlns:p="http://schemas.openxmlformats.org/presentationml/2006/main">
   <p:cSld>
     <p:spTree>
       <p:nvGrpSpPr>
@@ -16231,7 +17595,7 @@
           <a:noFill/>
         </p:spPr>
         <p:txBody>
-          <a:bodyPr wrap="square" lIns="60000" rIns="60000" tIns="40000" bIns="40000" anchor="t">
+          <a:bodyPr wrap="square" lIns="60000" tIns="40000" rIns="60000" bIns="40000" anchor="t">
             <a:spAutoFit/>
           </a:bodyPr>
           <a:lstStyle/>
@@ -16246,6 +17610,12 @@
               </a:rPr>
               <a:t>LESSON 7.5</a:t>
             </a:r>
+            <a:endParaRPr sz="1200" b="1">
+              <a:solidFill>
+                <a:srgbClr val="0A84FF"/>
+              </a:solidFill>
+              <a:latin typeface="SF Pro Text"/>
+            </a:endParaRPr>
           </a:p>
         </p:txBody>
       </p:sp>
@@ -16266,7 +17636,7 @@
           <a:noFill/>
         </p:spPr>
         <p:txBody>
-          <a:bodyPr wrap="square" lIns="60000" rIns="60000" tIns="40000" bIns="40000" anchor="t">
+          <a:bodyPr wrap="square" lIns="60000" tIns="40000" rIns="60000" bIns="40000" anchor="t">
             <a:spAutoFit/>
           </a:bodyPr>
           <a:lstStyle/>
@@ -16281,6 +17651,12 @@
               </a:rPr>
               <a:t>Search + weather filter — one ViewModel</a:t>
             </a:r>
+            <a:endParaRPr sz="3000" b="1">
+              <a:solidFill>
+                <a:srgbClr val="1C1C1E"/>
+              </a:solidFill>
+              <a:latin typeface="SF Pro Display"/>
+            </a:endParaRPr>
           </a:p>
         </p:txBody>
       </p:sp>
@@ -16301,7 +17677,7 @@
           <a:noFill/>
         </p:spPr>
         <p:txBody>
-          <a:bodyPr wrap="square" lIns="80000" rIns="60000" tIns="40000">
+          <a:bodyPr wrap="square" lIns="80000" tIns="40000" rIns="60000">
             <a:spAutoFit/>
           </a:bodyPr>
           <a:lstStyle/>
@@ -16320,6 +17696,12 @@
               </a:rPr>
               <a:t>•  Reuse the Week 6 SearchBar (custom TextField, iOS 13+)</a:t>
             </a:r>
+            <a:endParaRPr sz="1500">
+              <a:solidFill>
+                <a:srgbClr val="1C1C1E"/>
+              </a:solidFill>
+              <a:latin typeface="SF Pro Text"/>
+            </a:endParaRPr>
           </a:p>
           <a:p>
             <a:pPr algn="l">
@@ -16336,6 +17718,12 @@
               </a:rPr>
               <a:t>•  Horizontal chip row: 'All' + 4 weather chips under the search bar</a:t>
             </a:r>
+            <a:endParaRPr sz="1500">
+              <a:solidFill>
+                <a:srgbClr val="1C1C1E"/>
+              </a:solidFill>
+              <a:latin typeface="SF Pro Text"/>
+            </a:endParaRPr>
           </a:p>
           <a:p>
             <a:pPr algn="l">
@@ -16352,6 +17740,12 @@
               </a:rPr>
               <a:t>•  Tap the same chip twice → toggles back to 'All' (nil)</a:t>
             </a:r>
+            <a:endParaRPr sz="1500">
+              <a:solidFill>
+                <a:srgbClr val="1C1C1E"/>
+              </a:solidFill>
+              <a:latin typeface="SF Pro Text"/>
+            </a:endParaRPr>
           </a:p>
           <a:p>
             <a:pPr algn="l">
@@ -16368,6 +17762,12 @@
               </a:rPr>
               <a:t>•  Single filter(_:) on the VM — composes text + weather</a:t>
             </a:r>
+            <a:endParaRPr sz="1500">
+              <a:solidFill>
+                <a:srgbClr val="1C1C1E"/>
+              </a:solidFill>
+              <a:latin typeface="SF Pro Text"/>
+            </a:endParaRPr>
           </a:p>
           <a:p>
             <a:pPr algn="l">
@@ -16384,6 +17784,12 @@
               </a:rPr>
               <a:t>•  localizedCaseInsensitiveContains works in Khmer and Latin scripts</a:t>
             </a:r>
+            <a:endParaRPr sz="1500">
+              <a:solidFill>
+                <a:srgbClr val="1C1C1E"/>
+              </a:solidFill>
+              <a:latin typeface="SF Pro Text"/>
+            </a:endParaRPr>
           </a:p>
           <a:p>
             <a:pPr algn="l">
@@ -16400,6 +17806,12 @@
               </a:rPr>
               <a:t>•  Swift-side filter on fetched results — instant, no SQLite per keystroke</a:t>
             </a:r>
+            <a:endParaRPr sz="1500">
+              <a:solidFill>
+                <a:srgbClr val="1C1C1E"/>
+              </a:solidFill>
+              <a:latin typeface="SF Pro Text"/>
+            </a:endParaRPr>
           </a:p>
         </p:txBody>
       </p:sp>
@@ -16511,7 +17923,7 @@
           <a:noFill/>
         </p:spPr>
         <p:txBody>
-          <a:bodyPr wrap="square" lIns="60000" rIns="60000" tIns="40000" bIns="40000" anchor="t">
+          <a:bodyPr wrap="square" lIns="60000" tIns="40000" rIns="60000" bIns="40000" anchor="t">
             <a:spAutoFit/>
           </a:bodyPr>
           <a:lstStyle/>
@@ -16526,6 +17938,12 @@
               </a:rPr>
               <a:t>🔍  rice</a:t>
             </a:r>
+            <a:endParaRPr sz="1200" b="0">
+              <a:solidFill>
+                <a:srgbClr val="1C1C1E"/>
+              </a:solidFill>
+              <a:latin typeface="SF Pro Text"/>
+            </a:endParaRPr>
           </a:p>
         </p:txBody>
       </p:sp>
@@ -16567,7 +17985,7 @@
           </a:fontRef>
         </p:style>
         <p:txBody>
-          <a:bodyPr rtlCol="0" anchor="ctr" lIns="30000" rIns="30000" tIns="15000" bIns="15000"/>
+          <a:bodyPr lIns="30000" tIns="15000" rIns="30000" bIns="15000" rtlCol="0" anchor="ctr"/>
           <a:lstStyle/>
           <a:p>
             <a:pPr algn="ctr"/>
@@ -16580,6 +17998,12 @@
               </a:rPr>
               <a:t>All</a:t>
             </a:r>
+            <a:endParaRPr sz="1000" b="1">
+              <a:solidFill>
+                <a:srgbClr val="1C1C1E"/>
+              </a:solidFill>
+              <a:latin typeface="SF Pro Text"/>
+            </a:endParaRPr>
           </a:p>
         </p:txBody>
       </p:sp>
@@ -16621,7 +18045,7 @@
           </a:fontRef>
         </p:style>
         <p:txBody>
-          <a:bodyPr rtlCol="0" anchor="ctr" lIns="30000" rIns="30000" tIns="15000" bIns="15000"/>
+          <a:bodyPr lIns="30000" tIns="15000" rIns="30000" bIns="15000" rtlCol="0" anchor="ctr"/>
           <a:lstStyle/>
           <a:p>
             <a:pPr algn="ctr"/>
@@ -16634,6 +18058,12 @@
               </a:rPr>
               <a:t>Sunny</a:t>
             </a:r>
+            <a:endParaRPr sz="1000" b="1">
+              <a:solidFill>
+                <a:srgbClr val="FFFFFF"/>
+              </a:solidFill>
+              <a:latin typeface="SF Pro Text"/>
+            </a:endParaRPr>
           </a:p>
         </p:txBody>
       </p:sp>
@@ -16675,7 +18105,7 @@
           </a:fontRef>
         </p:style>
         <p:txBody>
-          <a:bodyPr rtlCol="0" anchor="ctr" lIns="30000" rIns="30000" tIns="15000" bIns="15000"/>
+          <a:bodyPr lIns="30000" tIns="15000" rIns="30000" bIns="15000" rtlCol="0" anchor="ctr"/>
           <a:lstStyle/>
           <a:p>
             <a:pPr algn="ctr"/>
@@ -16688,6 +18118,12 @@
               </a:rPr>
               <a:t>Rainy</a:t>
             </a:r>
+            <a:endParaRPr sz="1000" b="1">
+              <a:solidFill>
+                <a:srgbClr val="1C1C1E"/>
+              </a:solidFill>
+              <a:latin typeface="SF Pro Text"/>
+            </a:endParaRPr>
           </a:p>
         </p:txBody>
       </p:sp>
@@ -16729,7 +18165,7 @@
           </a:fontRef>
         </p:style>
         <p:txBody>
-          <a:bodyPr rtlCol="0" anchor="ctr" lIns="30000" rIns="30000" tIns="15000" bIns="15000"/>
+          <a:bodyPr lIns="30000" tIns="15000" rIns="30000" bIns="15000" rtlCol="0" anchor="ctr"/>
           <a:lstStyle/>
           <a:p>
             <a:pPr algn="ctr"/>
@@ -16742,6 +18178,12 @@
               </a:rPr>
               <a:t>Cloudy</a:t>
             </a:r>
+            <a:endParaRPr sz="1000" b="1">
+              <a:solidFill>
+                <a:srgbClr val="1C1C1E"/>
+              </a:solidFill>
+              <a:latin typeface="SF Pro Text"/>
+            </a:endParaRPr>
           </a:p>
         </p:txBody>
       </p:sp>
@@ -16783,7 +18225,7 @@
           </a:fontRef>
         </p:style>
         <p:txBody>
-          <a:bodyPr rtlCol="0" anchor="ctr" lIns="30000" rIns="30000" tIns="15000" bIns="15000"/>
+          <a:bodyPr lIns="30000" tIns="15000" rIns="30000" bIns="15000" rtlCol="0" anchor="ctr"/>
           <a:lstStyle/>
           <a:p>
             <a:pPr algn="ctr"/>
@@ -16796,6 +18238,12 @@
               </a:rPr>
               <a:t>Windy</a:t>
             </a:r>
+            <a:endParaRPr sz="1000" b="1">
+              <a:solidFill>
+                <a:srgbClr val="1C1C1E"/>
+              </a:solidFill>
+              <a:latin typeface="SF Pro Text"/>
+            </a:endParaRPr>
           </a:p>
         </p:txBody>
       </p:sp>
@@ -16816,7 +18264,7 @@
           <a:noFill/>
         </p:spPr>
         <p:txBody>
-          <a:bodyPr wrap="square" lIns="60000" rIns="60000" tIns="40000" bIns="40000" anchor="t">
+          <a:bodyPr wrap="square" lIns="60000" tIns="40000" rIns="60000" bIns="40000" anchor="t">
             <a:spAutoFit/>
           </a:bodyPr>
           <a:lstStyle/>
@@ -16831,6 +18279,12 @@
               </a:rPr>
               <a:t>Morning fog over the rice</a:t>
             </a:r>
+            <a:endParaRPr sz="1300" b="1">
+              <a:solidFill>
+                <a:srgbClr val="1C1C1E"/>
+              </a:solidFill>
+              <a:latin typeface="SF Pro Display"/>
+            </a:endParaRPr>
           </a:p>
         </p:txBody>
       </p:sp>
@@ -16894,7 +18348,7 @@
           <a:noFill/>
         </p:spPr>
         <p:txBody>
-          <a:bodyPr wrap="square" lIns="60000" rIns="60000" tIns="40000" bIns="40000" anchor="t">
+          <a:bodyPr wrap="square" lIns="60000" tIns="40000" rIns="60000" bIns="40000" anchor="t">
             <a:spAutoFit/>
           </a:bodyPr>
           <a:lstStyle/>
@@ -16909,6 +18363,12 @@
               </a:rPr>
               <a:t>Rice harvest — day 2</a:t>
             </a:r>
+            <a:endParaRPr sz="1300" b="1">
+              <a:solidFill>
+                <a:srgbClr val="1C1C1E"/>
+              </a:solidFill>
+              <a:latin typeface="SF Pro Display"/>
+            </a:endParaRPr>
           </a:p>
         </p:txBody>
       </p:sp>
@@ -16972,7 +18432,7 @@
           <a:noFill/>
         </p:spPr>
         <p:txBody>
-          <a:bodyPr wrap="square" lIns="60000" rIns="60000" tIns="40000" bIns="40000" anchor="t">
+          <a:bodyPr wrap="square" lIns="60000" tIns="40000" rIns="60000" bIns="40000" anchor="t">
             <a:spAutoFit/>
           </a:bodyPr>
           <a:lstStyle/>
@@ -16987,6 +18447,12 @@
               </a:rPr>
               <a:t>Rice prices spiked at market</a:t>
             </a:r>
+            <a:endParaRPr sz="1300" b="1">
+              <a:solidFill>
+                <a:srgbClr val="1C1C1E"/>
+              </a:solidFill>
+              <a:latin typeface="SF Pro Display"/>
+            </a:endParaRPr>
           </a:p>
         </p:txBody>
       </p:sp>
@@ -17050,7 +18516,7 @@
           <a:noFill/>
         </p:spPr>
         <p:txBody>
-          <a:bodyPr wrap="square" lIns="60000" rIns="60000" tIns="40000" bIns="40000" anchor="t">
+          <a:bodyPr wrap="square" lIns="60000" tIns="40000" rIns="60000" bIns="40000" anchor="t">
             <a:spAutoFit/>
           </a:bodyPr>
           <a:lstStyle/>
@@ -17065,6 +18531,12 @@
               </a:rPr>
               <a:t>3 results · query: 'rice' · weather: Sunny</a:t>
             </a:r>
+            <a:endParaRPr sz="1000" b="0">
+              <a:solidFill>
+                <a:srgbClr val="8E8E93"/>
+              </a:solidFill>
+              <a:latin typeface="SF Pro Text"/>
+            </a:endParaRPr>
           </a:p>
         </p:txBody>
       </p:sp>
@@ -17085,7 +18557,7 @@
           <a:noFill/>
         </p:spPr>
         <p:txBody>
-          <a:bodyPr wrap="square" lIns="60000" rIns="60000" tIns="40000" bIns="40000" anchor="t">
+          <a:bodyPr wrap="square" lIns="60000" tIns="40000" rIns="60000" bIns="40000" anchor="t">
             <a:spAutoFit/>
           </a:bodyPr>
           <a:lstStyle/>
@@ -17100,6 +18572,12 @@
               </a:rPr>
               <a:t>Week 7 · Daily Journal · SmartFarmerAssistant</a:t>
             </a:r>
+            <a:endParaRPr sz="1000" b="0">
+              <a:solidFill>
+                <a:srgbClr val="8E8E93"/>
+              </a:solidFill>
+              <a:latin typeface="SF Pro Text"/>
+            </a:endParaRPr>
           </a:p>
         </p:txBody>
       </p:sp>
@@ -17120,7 +18598,7 @@
           <a:noFill/>
         </p:spPr>
         <p:txBody>
-          <a:bodyPr wrap="square" lIns="60000" rIns="60000" tIns="40000" bIns="40000" anchor="t">
+          <a:bodyPr wrap="square" lIns="60000" tIns="40000" rIns="60000" bIns="40000" anchor="t">
             <a:spAutoFit/>
           </a:bodyPr>
           <a:lstStyle/>
@@ -17135,6 +18613,12 @@
               </a:rPr>
               <a:t>9 / 12</a:t>
             </a:r>
+            <a:endParaRPr sz="1000" b="0">
+              <a:solidFill>
+                <a:srgbClr val="8E8E93"/>
+              </a:solidFill>
+              <a:latin typeface="SF Pro Text"/>
+            </a:endParaRPr>
           </a:p>
         </p:txBody>
       </p:sp>
@@ -17465,7 +18949,11 @@
       </a:style>
     </a:lnDef>
   </a:objectDefaults>
-  <a:extraClrSchemeLst/>
+  <a:extLst>
+    <a:ext uri="{05A4C25C-085E-4340-85A3-A5531E510DB2}">
+      <thm15:themeFamily xmlns:thm15="http://schemas.microsoft.com/office/thememl/2012/main" name="Office Theme" id="{62F939B6-93AF-4DB8-9C6B-D6C7DFDC589F}" vid="{4A3C46E8-61CC-4603-A589-7422A47A8E4A}"/>
+    </a:ext>
+  </a:extLst>
 </a:theme>
 </file>
 
@@ -17785,6 +19273,10 @@
       </a:style>
     </a:lnDef>
   </a:objectDefaults>
-  <a:extraClrSchemeLst/>
+  <a:extLst>
+    <a:ext uri="{05A4C25C-085E-4340-85A3-A5531E510DB2}">
+      <thm15:themeFamily xmlns:thm15="http://schemas.microsoft.com/office/thememl/2012/main" name="Office Theme" id="{62F939B6-93AF-4DB8-9C6B-D6C7DFDC589F}" vid="{4A3C46E8-61CC-4603-A589-7422A47A8E4A}"/>
+    </a:ext>
+  </a:extLst>
 </a:theme>
 </file>